--- a/en/03_Deliverables/PPTX/M0_EN_Deck_CFG-5_Lesson01_SenseAndRespond_v1.pptx
+++ b/en/03_Deliverables/PPTX/M0_EN_Deck_CFG-5_Lesson01_SenseAndRespond_v1.pptx
@@ -4,37 +4,40 @@
   <p:sldMasterIdLst>
     <p:sldMasterId id="2147483648" r:id="rId1"/>
   </p:sldMasterIdLst>
+  <p:notesMasterIdLst>
+    <p:notesMasterId r:id="rId30"/>
+  </p:notesMasterIdLst>
   <p:sldIdLst>
-    <p:sldId id="256" r:id="rId7"/>
-    <p:sldId id="257" r:id="rId9"/>
-    <p:sldId id="258" r:id="rId10"/>
-    <p:sldId id="259" r:id="rId11"/>
-    <p:sldId id="260" r:id="rId12"/>
-    <p:sldId id="261" r:id="rId13"/>
-    <p:sldId id="262" r:id="rId14"/>
-    <p:sldId id="263" r:id="rId15"/>
-    <p:sldId id="264" r:id="rId16"/>
-    <p:sldId id="265" r:id="rId17"/>
-    <p:sldId id="266" r:id="rId18"/>
-    <p:sldId id="267" r:id="rId19"/>
-    <p:sldId id="268" r:id="rId20"/>
-    <p:sldId id="269" r:id="rId21"/>
-    <p:sldId id="270" r:id="rId22"/>
-    <p:sldId id="271" r:id="rId23"/>
-    <p:sldId id="272" r:id="rId24"/>
-    <p:sldId id="273" r:id="rId25"/>
-    <p:sldId id="274" r:id="rId26"/>
-    <p:sldId id="275" r:id="rId27"/>
-    <p:sldId id="276" r:id="rId28"/>
-    <p:sldId id="277" r:id="rId29"/>
-    <p:sldId id="278" r:id="rId30"/>
-    <p:sldId id="279" r:id="rId31"/>
-    <p:sldId id="280" r:id="rId32"/>
-    <p:sldId id="281" r:id="rId33"/>
-    <p:sldId id="282" r:id="rId34"/>
-    <p:sldId id="283" r:id="rId35"/>
+    <p:sldId id="256" r:id="rId2"/>
+    <p:sldId id="257" r:id="rId3"/>
+    <p:sldId id="258" r:id="rId4"/>
+    <p:sldId id="259" r:id="rId5"/>
+    <p:sldId id="260" r:id="rId6"/>
+    <p:sldId id="261" r:id="rId7"/>
+    <p:sldId id="262" r:id="rId8"/>
+    <p:sldId id="263" r:id="rId9"/>
+    <p:sldId id="264" r:id="rId10"/>
+    <p:sldId id="265" r:id="rId11"/>
+    <p:sldId id="266" r:id="rId12"/>
+    <p:sldId id="267" r:id="rId13"/>
+    <p:sldId id="268" r:id="rId14"/>
+    <p:sldId id="269" r:id="rId15"/>
+    <p:sldId id="270" r:id="rId16"/>
+    <p:sldId id="271" r:id="rId17"/>
+    <p:sldId id="272" r:id="rId18"/>
+    <p:sldId id="273" r:id="rId19"/>
+    <p:sldId id="274" r:id="rId20"/>
+    <p:sldId id="275" r:id="rId21"/>
+    <p:sldId id="276" r:id="rId22"/>
+    <p:sldId id="277" r:id="rId23"/>
+    <p:sldId id="278" r:id="rId24"/>
+    <p:sldId id="279" r:id="rId25"/>
+    <p:sldId id="280" r:id="rId26"/>
+    <p:sldId id="281" r:id="rId27"/>
+    <p:sldId id="282" r:id="rId28"/>
+    <p:sldId id="283" r:id="rId29"/>
   </p:sldIdLst>
-  <p:sldSz cx="9144000" cy="5143500" type="screen4x3"/>
+  <p:sldSz cx="9144000" cy="5143500" type="screen16x9"/>
   <p:notesSz cx="6858000" cy="9144000"/>
   <p:defaultTextStyle>
     <a:defPPr>
@@ -131,11 +134,27 @@
       </a:defRPr>
     </a:lvl9pPr>
   </p:defaultTextStyle>
+  <p:extLst>
+    <p:ext uri="{EFAFB233-063F-42B5-8137-9DF3F51BA10A}">
+      <p15:sldGuideLst xmlns:p15="http://schemas.microsoft.com/office/powerpoint/2012/main">
+        <p15:guide id="1" orient="horz" pos="2160">
+          <p15:clr>
+            <a:srgbClr val="A4A3A4"/>
+          </p15:clr>
+        </p15:guide>
+        <p15:guide id="2" pos="2880">
+          <p15:clr>
+            <a:srgbClr val="A4A3A4"/>
+          </p15:clr>
+        </p15:guide>
+      </p15:sldGuideLst>
+    </p:ext>
+  </p:extLst>
 </p:presentation>
 </file>
 
 <file path=ppt/notesMasters/notesMaster1.xml><?xml version="1.0" encoding="utf-8"?>
-<p:notesMaster xmlns:a="http://schemas.openxmlformats.org/drawingml/2006/main" xmlns:p="http://schemas.openxmlformats.org/presentationml/2006/main" xmlns:r="http://schemas.openxmlformats.org/officeDocument/2006/relationships">
+<p:notesMaster xmlns:a="http://schemas.openxmlformats.org/drawingml/2006/main" xmlns:r="http://schemas.openxmlformats.org/officeDocument/2006/relationships" xmlns:p="http://schemas.openxmlformats.org/presentationml/2006/main">
   <p:cSld>
     <p:bg>
       <p:bgRef idx="1001">
@@ -156,241 +175,16 @@
           <a:chExt cx="0" cy="0"/>
         </a:xfrm>
       </p:grpSpPr>
-      <p:sp>
-        <p:nvSpPr>
-          <p:cNvPr id="2" name="Header Placeholder 1"/>
-          <p:cNvSpPr>
-            <a:spLocks noGrp="1"/>
-          </p:cNvSpPr>
-          <p:nvPr>
-            <p:ph type="hdr" sz="quarter"/>
-          </p:nvPr>
-        </p:nvSpPr>
-        <p:spPr>
-          <a:xfrm>
-            <a:off x="0" y="0"/>
-            <a:ext cx="2971800" cy="457200"/>
-          </a:xfrm>
-          <a:prstGeom prst="rect">
-            <a:avLst/>
-          </a:prstGeom>
-        </p:spPr>
-        <p:txBody>
-          <a:bodyPr vert="horz" lIns="91440" tIns="45720" rIns="91440" bIns="45720" rtlCol="0"/>
-          <a:lstStyle>
-            <a:lvl1pPr algn="l">
-              <a:defRPr sz="1200"/>
-            </a:lvl1pPr>
-          </a:lstStyle>
-          <a:p>
-            <a:endParaRPr lang="en-US"/>
-          </a:p>
-        </p:txBody>
-      </p:sp>
-      <p:sp>
-        <p:nvSpPr>
-          <p:cNvPr id="3" name="Date Placeholder 2"/>
-          <p:cNvSpPr>
-            <a:spLocks noGrp="1"/>
-          </p:cNvSpPr>
-          <p:nvPr>
-            <p:ph type="dt" idx="1"/>
-          </p:nvPr>
-        </p:nvSpPr>
-        <p:spPr>
-          <a:xfrm>
-            <a:off x="3884613" y="0"/>
-            <a:ext cx="2971800" cy="457200"/>
-          </a:xfrm>
-          <a:prstGeom prst="rect">
-            <a:avLst/>
-          </a:prstGeom>
-        </p:spPr>
-        <p:txBody>
-          <a:bodyPr vert="horz" lIns="91440" tIns="45720" rIns="91440" bIns="45720" rtlCol="0"/>
-          <a:lstStyle>
-            <a:lvl1pPr algn="r">
-              <a:defRPr sz="1200"/>
-            </a:lvl1pPr>
-          </a:lstStyle>
-          <a:p>
-            <a:fld id="{0F89C1C7-3DCD-1040-A9CF-14679D8B5DDD}" type="datetimeFigureOut">
-              <a:rPr lang="en-US" smtClean="0"/>
-              <a:t>10/17/16</a:t>
-            </a:fld>
-            <a:endParaRPr lang="en-US"/>
-          </a:p>
-        </p:txBody>
-      </p:sp>
-      <p:sp>
-        <p:nvSpPr>
-          <p:cNvPr id="4" name="Slide Image Placeholder 3"/>
-          <p:cNvSpPr>
-            <a:spLocks noGrp="1" noRot="1" noChangeAspect="1"/>
-          </p:cNvSpPr>
-          <p:nvPr>
-            <p:ph type="sldImg" idx="2"/>
-          </p:nvPr>
-        </p:nvSpPr>
-        <p:spPr>
-          <a:xfrm>
-            <a:off x="1143000" y="685800"/>
-            <a:ext cx="4572000" cy="3429000"/>
-          </a:xfrm>
-          <a:prstGeom prst="rect">
-            <a:avLst/>
-          </a:prstGeom>
-          <a:noFill/>
-          <a:ln w="12700">
-            <a:solidFill>
-              <a:prstClr val="black"/>
-            </a:solidFill>
-          </a:ln>
-        </p:spPr>
-        <p:txBody>
-          <a:bodyPr vert="horz" lIns="91440" tIns="45720" rIns="91440" bIns="45720" rtlCol="0" anchor="ctr"/>
-          <a:lstStyle/>
-          <a:p>
-            <a:endParaRPr lang="en-US"/>
-          </a:p>
-        </p:txBody>
-      </p:sp>
-      <p:sp>
-        <p:nvSpPr>
-          <p:cNvPr id="5" name="Notes Placeholder 4"/>
-          <p:cNvSpPr>
-            <a:spLocks noGrp="1"/>
-          </p:cNvSpPr>
-          <p:nvPr>
-            <p:ph type="body" sz="quarter" idx="3"/>
-          </p:nvPr>
-        </p:nvSpPr>
-        <p:spPr>
-          <a:xfrm>
-            <a:off x="685800" y="4343400"/>
-            <a:ext cx="5486400" cy="4114800"/>
-          </a:xfrm>
-          <a:prstGeom prst="rect">
-            <a:avLst/>
-          </a:prstGeom>
-        </p:spPr>
-        <p:txBody>
-          <a:bodyPr vert="horz" lIns="91440" tIns="45720" rIns="91440" bIns="45720" rtlCol="0"/>
-          <a:lstStyle/>
-          <a:p>
-            <a:pPr lvl="0"/>
-            <a:r>
-              <a:rPr lang="en-US" smtClean="0"/>
-              <a:t>Click to edit Master text styles</a:t>
-            </a:r>
-          </a:p>
-          <a:p>
-            <a:pPr lvl="1"/>
-            <a:r>
-              <a:rPr lang="en-US" smtClean="0"/>
-              <a:t>Second level</a:t>
-            </a:r>
-          </a:p>
-          <a:p>
-            <a:pPr lvl="2"/>
-            <a:r>
-              <a:rPr lang="en-US" smtClean="0"/>
-              <a:t>Third level</a:t>
-            </a:r>
-          </a:p>
-          <a:p>
-            <a:pPr lvl="3"/>
-            <a:r>
-              <a:rPr lang="en-US" smtClean="0"/>
-              <a:t>Fourth level</a:t>
-            </a:r>
-          </a:p>
-          <a:p>
-            <a:pPr lvl="4"/>
-            <a:r>
-              <a:rPr lang="en-US" smtClean="0"/>
-              <a:t>Fifth level</a:t>
-            </a:r>
-            <a:endParaRPr lang="en-US"/>
-          </a:p>
-        </p:txBody>
-      </p:sp>
-      <p:sp>
-        <p:nvSpPr>
-          <p:cNvPr id="6" name="Footer Placeholder 5"/>
-          <p:cNvSpPr>
-            <a:spLocks noGrp="1"/>
-          </p:cNvSpPr>
-          <p:nvPr>
-            <p:ph type="ftr" sz="quarter" idx="4"/>
-          </p:nvPr>
-        </p:nvSpPr>
-        <p:spPr>
-          <a:xfrm>
-            <a:off x="0" y="8685213"/>
-            <a:ext cx="2971800" cy="457200"/>
-          </a:xfrm>
-          <a:prstGeom prst="rect">
-            <a:avLst/>
-          </a:prstGeom>
-        </p:spPr>
-        <p:txBody>
-          <a:bodyPr vert="horz" lIns="91440" tIns="45720" rIns="91440" bIns="45720" rtlCol="0" anchor="b"/>
-          <a:lstStyle>
-            <a:lvl1pPr algn="l">
-              <a:defRPr sz="1200"/>
-            </a:lvl1pPr>
-          </a:lstStyle>
-          <a:p>
-            <a:endParaRPr lang="en-US"/>
-          </a:p>
-        </p:txBody>
-      </p:sp>
-      <p:sp>
-        <p:nvSpPr>
-          <p:cNvPr id="7" name="Slide Number Placeholder 6"/>
-          <p:cNvSpPr>
-            <a:spLocks noGrp="1"/>
-          </p:cNvSpPr>
-          <p:nvPr>
-            <p:ph type="sldNum" sz="quarter" idx="5"/>
-          </p:nvPr>
-        </p:nvSpPr>
-        <p:spPr>
-          <a:xfrm>
-            <a:off x="3884613" y="8685213"/>
-            <a:ext cx="2971800" cy="457200"/>
-          </a:xfrm>
-          <a:prstGeom prst="rect">
-            <a:avLst/>
-          </a:prstGeom>
-        </p:spPr>
-        <p:txBody>
-          <a:bodyPr vert="horz" lIns="91440" tIns="45720" rIns="91440" bIns="45720" rtlCol="0" anchor="b"/>
-          <a:lstStyle>
-            <a:lvl1pPr algn="r">
-              <a:defRPr sz="1200"/>
-            </a:lvl1pPr>
-          </a:lstStyle>
-          <a:p>
-            <a:fld id="{BB5E49A5-4136-284D-997B-48E1D791AD67}" type="slidenum">
-              <a:rPr lang="en-US" smtClean="0"/>
-              <a:t>‹#›</a:t>
-            </a:fld>
-            <a:endParaRPr lang="en-US"/>
-          </a:p>
-        </p:txBody>
-      </p:sp>
     </p:spTree>
     <p:extLst>
       <p:ext uri="{BB962C8B-B14F-4D97-AF65-F5344CB8AC3E}">
-        <p14:creationId xmlns:p14="http://schemas.microsoft.com/office/powerpoint/2010/main" val="2623252185"/>
+        <p14:creationId xmlns:p14="http://schemas.microsoft.com/office/powerpoint/2010/main" val="437491579"/>
       </p:ext>
     </p:extLst>
   </p:cSld>
   <p:clrMap bg1="lt1" tx1="dk1" bg2="lt2" tx2="dk2" accent1="accent1" accent2="accent2" accent3="accent3" accent4="accent4" accent5="accent5" accent6="accent6" hlink="hlink" folHlink="folHlink"/>
   <p:notesStyle>
-    <a:lvl1pPr marL="0" algn="l" defTabSz="457200" rtl="0" eaLnBrk="1" latinLnBrk="0" hangingPunct="1">
+    <a:lvl1pPr marL="0" algn="l" defTabSz="914400" rtl="0" eaLnBrk="1" latinLnBrk="0" hangingPunct="1">
       <a:defRPr sz="1200" kern="1200">
         <a:solidFill>
           <a:schemeClr val="tx1"/>
@@ -400,7 +194,7 @@
         <a:cs typeface="+mn-cs"/>
       </a:defRPr>
     </a:lvl1pPr>
-    <a:lvl2pPr marL="457200" algn="l" defTabSz="457200" rtl="0" eaLnBrk="1" latinLnBrk="0" hangingPunct="1">
+    <a:lvl2pPr marL="457200" algn="l" defTabSz="914400" rtl="0" eaLnBrk="1" latinLnBrk="0" hangingPunct="1">
       <a:defRPr sz="1200" kern="1200">
         <a:solidFill>
           <a:schemeClr val="tx1"/>
@@ -410,7 +204,7 @@
         <a:cs typeface="+mn-cs"/>
       </a:defRPr>
     </a:lvl2pPr>
-    <a:lvl3pPr marL="914400" algn="l" defTabSz="457200" rtl="0" eaLnBrk="1" latinLnBrk="0" hangingPunct="1">
+    <a:lvl3pPr marL="914400" algn="l" defTabSz="914400" rtl="0" eaLnBrk="1" latinLnBrk="0" hangingPunct="1">
       <a:defRPr sz="1200" kern="1200">
         <a:solidFill>
           <a:schemeClr val="tx1"/>
@@ -420,7 +214,7 @@
         <a:cs typeface="+mn-cs"/>
       </a:defRPr>
     </a:lvl3pPr>
-    <a:lvl4pPr marL="1371600" algn="l" defTabSz="457200" rtl="0" eaLnBrk="1" latinLnBrk="0" hangingPunct="1">
+    <a:lvl4pPr marL="1371600" algn="l" defTabSz="914400" rtl="0" eaLnBrk="1" latinLnBrk="0" hangingPunct="1">
       <a:defRPr sz="1200" kern="1200">
         <a:solidFill>
           <a:schemeClr val="tx1"/>
@@ -430,7 +224,7 @@
         <a:cs typeface="+mn-cs"/>
       </a:defRPr>
     </a:lvl4pPr>
-    <a:lvl5pPr marL="1828800" algn="l" defTabSz="457200" rtl="0" eaLnBrk="1" latinLnBrk="0" hangingPunct="1">
+    <a:lvl5pPr marL="1828800" algn="l" defTabSz="914400" rtl="0" eaLnBrk="1" latinLnBrk="0" hangingPunct="1">
       <a:defRPr sz="1200" kern="1200">
         <a:solidFill>
           <a:schemeClr val="tx1"/>
@@ -440,7 +234,7 @@
         <a:cs typeface="+mn-cs"/>
       </a:defRPr>
     </a:lvl5pPr>
-    <a:lvl6pPr marL="2286000" algn="l" defTabSz="457200" rtl="0" eaLnBrk="1" latinLnBrk="0" hangingPunct="1">
+    <a:lvl6pPr marL="2286000" algn="l" defTabSz="914400" rtl="0" eaLnBrk="1" latinLnBrk="0" hangingPunct="1">
       <a:defRPr sz="1200" kern="1200">
         <a:solidFill>
           <a:schemeClr val="tx1"/>
@@ -450,7 +244,7 @@
         <a:cs typeface="+mn-cs"/>
       </a:defRPr>
     </a:lvl6pPr>
-    <a:lvl7pPr marL="2743200" algn="l" defTabSz="457200" rtl="0" eaLnBrk="1" latinLnBrk="0" hangingPunct="1">
+    <a:lvl7pPr marL="2743200" algn="l" defTabSz="914400" rtl="0" eaLnBrk="1" latinLnBrk="0" hangingPunct="1">
       <a:defRPr sz="1200" kern="1200">
         <a:solidFill>
           <a:schemeClr val="tx1"/>
@@ -460,7 +254,7 @@
         <a:cs typeface="+mn-cs"/>
       </a:defRPr>
     </a:lvl7pPr>
-    <a:lvl8pPr marL="3200400" algn="l" defTabSz="457200" rtl="0" eaLnBrk="1" latinLnBrk="0" hangingPunct="1">
+    <a:lvl8pPr marL="3200400" algn="l" defTabSz="914400" rtl="0" eaLnBrk="1" latinLnBrk="0" hangingPunct="1">
       <a:defRPr sz="1200" kern="1200">
         <a:solidFill>
           <a:schemeClr val="tx1"/>
@@ -470,7 +264,7 @@
         <a:cs typeface="+mn-cs"/>
       </a:defRPr>
     </a:lvl8pPr>
-    <a:lvl9pPr marL="3657600" algn="l" defTabSz="457200" rtl="0" eaLnBrk="1" latinLnBrk="0" hangingPunct="1">
+    <a:lvl9pPr marL="3657600" algn="l" defTabSz="914400" rtl="0" eaLnBrk="1" latinLnBrk="0" hangingPunct="1">
       <a:defRPr sz="1200" kern="1200">
         <a:solidFill>
           <a:schemeClr val="tx1"/>
@@ -485,7 +279,7 @@
 </file>
 
 <file path=ppt/notesSlides/notesSlide1.xml><?xml version="1.0" encoding="utf-8"?>
-<p:notes xmlns:a="http://schemas.openxmlformats.org/drawingml/2006/main" xmlns:p="http://schemas.openxmlformats.org/presentationml/2006/main" xmlns:r="http://schemas.openxmlformats.org/officeDocument/2006/relationships">
+<p:notes xmlns:a="http://schemas.openxmlformats.org/drawingml/2006/main" xmlns:r="http://schemas.openxmlformats.org/officeDocument/2006/relationships" xmlns:p="http://schemas.openxmlformats.org/presentationml/2006/main">
   <p:cSld>
     <p:spTree>
       <p:nvGrpSpPr>
@@ -505,7 +299,7 @@
         <p:nvSpPr>
           <p:cNvPr id="2" name="Slide Image Placeholder 1"/>
           <p:cNvSpPr>
-            <a:spLocks noGrp="1"/>
+            <a:spLocks noGrp="1" noRot="1" noChangeAspect="1"/>
           </p:cNvSpPr>
           <p:nvPr>
             <p:ph type="sldImg" idx="2"/>
@@ -520,7 +314,7 @@
             <a:spLocks noGrp="1"/>
           </p:cNvSpPr>
           <p:nvPr>
-            <p:ph type="body" idx="3" sz="quarter"/>
+            <p:ph type="body" sz="quarter" idx="3"/>
           </p:nvPr>
         </p:nvSpPr>
         <p:spPr/>
@@ -541,7 +335,7 @@
             <a:spLocks noGrp="1"/>
           </p:cNvSpPr>
           <p:nvPr>
-            <p:ph type="sldNum" idx="5" sz="quarter"/>
+            <p:ph type="sldNum" sz="quarter" idx="5"/>
           </p:nvPr>
         </p:nvSpPr>
         <p:spPr/>
@@ -555,7 +349,7 @@
 </file>
 
 <file path=ppt/notesSlides/notesSlide10.xml><?xml version="1.0" encoding="utf-8"?>
-<p:notes xmlns:a="http://schemas.openxmlformats.org/drawingml/2006/main" xmlns:p="http://schemas.openxmlformats.org/presentationml/2006/main" xmlns:r="http://schemas.openxmlformats.org/officeDocument/2006/relationships">
+<p:notes xmlns:a="http://schemas.openxmlformats.org/drawingml/2006/main" xmlns:r="http://schemas.openxmlformats.org/officeDocument/2006/relationships" xmlns:p="http://schemas.openxmlformats.org/presentationml/2006/main">
   <p:cSld>
     <p:spTree>
       <p:nvGrpSpPr>
@@ -575,7 +369,7 @@
         <p:nvSpPr>
           <p:cNvPr id="2" name="Slide Image Placeholder 1"/>
           <p:cNvSpPr>
-            <a:spLocks noGrp="1"/>
+            <a:spLocks noGrp="1" noRot="1" noChangeAspect="1"/>
           </p:cNvSpPr>
           <p:nvPr>
             <p:ph type="sldImg" idx="2"/>
@@ -590,7 +384,7 @@
             <a:spLocks noGrp="1"/>
           </p:cNvSpPr>
           <p:nvPr>
-            <p:ph type="body" idx="3" sz="quarter"/>
+            <p:ph type="body" sz="quarter" idx="3"/>
           </p:nvPr>
         </p:nvSpPr>
         <p:spPr/>
@@ -611,7 +405,7 @@
             <a:spLocks noGrp="1"/>
           </p:cNvSpPr>
           <p:nvPr>
-            <p:ph type="sldNum" idx="5" sz="quarter"/>
+            <p:ph type="sldNum" sz="quarter" idx="5"/>
           </p:nvPr>
         </p:nvSpPr>
         <p:spPr/>
@@ -625,7 +419,7 @@
 </file>
 
 <file path=ppt/notesSlides/notesSlide11.xml><?xml version="1.0" encoding="utf-8"?>
-<p:notes xmlns:a="http://schemas.openxmlformats.org/drawingml/2006/main" xmlns:p="http://schemas.openxmlformats.org/presentationml/2006/main" xmlns:r="http://schemas.openxmlformats.org/officeDocument/2006/relationships">
+<p:notes xmlns:a="http://schemas.openxmlformats.org/drawingml/2006/main" xmlns:r="http://schemas.openxmlformats.org/officeDocument/2006/relationships" xmlns:p="http://schemas.openxmlformats.org/presentationml/2006/main">
   <p:cSld>
     <p:spTree>
       <p:nvGrpSpPr>
@@ -645,7 +439,7 @@
         <p:nvSpPr>
           <p:cNvPr id="2" name="Slide Image Placeholder 1"/>
           <p:cNvSpPr>
-            <a:spLocks noGrp="1"/>
+            <a:spLocks noGrp="1" noRot="1" noChangeAspect="1"/>
           </p:cNvSpPr>
           <p:nvPr>
             <p:ph type="sldImg" idx="2"/>
@@ -660,7 +454,7 @@
             <a:spLocks noGrp="1"/>
           </p:cNvSpPr>
           <p:nvPr>
-            <p:ph type="body" idx="3" sz="quarter"/>
+            <p:ph type="body" sz="quarter" idx="3"/>
           </p:nvPr>
         </p:nvSpPr>
         <p:spPr/>
@@ -681,7 +475,7 @@
             <a:spLocks noGrp="1"/>
           </p:cNvSpPr>
           <p:nvPr>
-            <p:ph type="sldNum" idx="5" sz="quarter"/>
+            <p:ph type="sldNum" sz="quarter" idx="5"/>
           </p:nvPr>
         </p:nvSpPr>
         <p:spPr/>
@@ -695,7 +489,7 @@
 </file>
 
 <file path=ppt/notesSlides/notesSlide12.xml><?xml version="1.0" encoding="utf-8"?>
-<p:notes xmlns:a="http://schemas.openxmlformats.org/drawingml/2006/main" xmlns:p="http://schemas.openxmlformats.org/presentationml/2006/main" xmlns:r="http://schemas.openxmlformats.org/officeDocument/2006/relationships">
+<p:notes xmlns:a="http://schemas.openxmlformats.org/drawingml/2006/main" xmlns:r="http://schemas.openxmlformats.org/officeDocument/2006/relationships" xmlns:p="http://schemas.openxmlformats.org/presentationml/2006/main">
   <p:cSld>
     <p:spTree>
       <p:nvGrpSpPr>
@@ -715,7 +509,7 @@
         <p:nvSpPr>
           <p:cNvPr id="2" name="Slide Image Placeholder 1"/>
           <p:cNvSpPr>
-            <a:spLocks noGrp="1"/>
+            <a:spLocks noGrp="1" noRot="1" noChangeAspect="1"/>
           </p:cNvSpPr>
           <p:nvPr>
             <p:ph type="sldImg" idx="2"/>
@@ -730,7 +524,7 @@
             <a:spLocks noGrp="1"/>
           </p:cNvSpPr>
           <p:nvPr>
-            <p:ph type="body" idx="3" sz="quarter"/>
+            <p:ph type="body" sz="quarter" idx="3"/>
           </p:nvPr>
         </p:nvSpPr>
         <p:spPr/>
@@ -751,7 +545,7 @@
             <a:spLocks noGrp="1"/>
           </p:cNvSpPr>
           <p:nvPr>
-            <p:ph type="sldNum" idx="5" sz="quarter"/>
+            <p:ph type="sldNum" sz="quarter" idx="5"/>
           </p:nvPr>
         </p:nvSpPr>
         <p:spPr/>
@@ -765,7 +559,7 @@
 </file>
 
 <file path=ppt/notesSlides/notesSlide13.xml><?xml version="1.0" encoding="utf-8"?>
-<p:notes xmlns:a="http://schemas.openxmlformats.org/drawingml/2006/main" xmlns:p="http://schemas.openxmlformats.org/presentationml/2006/main" xmlns:r="http://schemas.openxmlformats.org/officeDocument/2006/relationships">
+<p:notes xmlns:a="http://schemas.openxmlformats.org/drawingml/2006/main" xmlns:r="http://schemas.openxmlformats.org/officeDocument/2006/relationships" xmlns:p="http://schemas.openxmlformats.org/presentationml/2006/main">
   <p:cSld>
     <p:spTree>
       <p:nvGrpSpPr>
@@ -785,7 +579,7 @@
         <p:nvSpPr>
           <p:cNvPr id="2" name="Slide Image Placeholder 1"/>
           <p:cNvSpPr>
-            <a:spLocks noGrp="1"/>
+            <a:spLocks noGrp="1" noRot="1" noChangeAspect="1"/>
           </p:cNvSpPr>
           <p:nvPr>
             <p:ph type="sldImg" idx="2"/>
@@ -800,7 +594,7 @@
             <a:spLocks noGrp="1"/>
           </p:cNvSpPr>
           <p:nvPr>
-            <p:ph type="body" idx="3" sz="quarter"/>
+            <p:ph type="body" sz="quarter" idx="3"/>
           </p:nvPr>
         </p:nvSpPr>
         <p:spPr/>
@@ -821,7 +615,7 @@
             <a:spLocks noGrp="1"/>
           </p:cNvSpPr>
           <p:nvPr>
-            <p:ph type="sldNum" idx="5" sz="quarter"/>
+            <p:ph type="sldNum" sz="quarter" idx="5"/>
           </p:nvPr>
         </p:nvSpPr>
         <p:spPr/>
@@ -835,7 +629,7 @@
 </file>
 
 <file path=ppt/notesSlides/notesSlide14.xml><?xml version="1.0" encoding="utf-8"?>
-<p:notes xmlns:a="http://schemas.openxmlformats.org/drawingml/2006/main" xmlns:p="http://schemas.openxmlformats.org/presentationml/2006/main" xmlns:r="http://schemas.openxmlformats.org/officeDocument/2006/relationships">
+<p:notes xmlns:a="http://schemas.openxmlformats.org/drawingml/2006/main" xmlns:r="http://schemas.openxmlformats.org/officeDocument/2006/relationships" xmlns:p="http://schemas.openxmlformats.org/presentationml/2006/main">
   <p:cSld>
     <p:spTree>
       <p:nvGrpSpPr>
@@ -855,7 +649,7 @@
         <p:nvSpPr>
           <p:cNvPr id="2" name="Slide Image Placeholder 1"/>
           <p:cNvSpPr>
-            <a:spLocks noGrp="1"/>
+            <a:spLocks noGrp="1" noRot="1" noChangeAspect="1"/>
           </p:cNvSpPr>
           <p:nvPr>
             <p:ph type="sldImg" idx="2"/>
@@ -870,7 +664,7 @@
             <a:spLocks noGrp="1"/>
           </p:cNvSpPr>
           <p:nvPr>
-            <p:ph type="body" idx="3" sz="quarter"/>
+            <p:ph type="body" sz="quarter" idx="3"/>
           </p:nvPr>
         </p:nvSpPr>
         <p:spPr/>
@@ -891,7 +685,7 @@
             <a:spLocks noGrp="1"/>
           </p:cNvSpPr>
           <p:nvPr>
-            <p:ph type="sldNum" idx="5" sz="quarter"/>
+            <p:ph type="sldNum" sz="quarter" idx="5"/>
           </p:nvPr>
         </p:nvSpPr>
         <p:spPr/>
@@ -905,7 +699,7 @@
 </file>
 
 <file path=ppt/notesSlides/notesSlide15.xml><?xml version="1.0" encoding="utf-8"?>
-<p:notes xmlns:a="http://schemas.openxmlformats.org/drawingml/2006/main" xmlns:p="http://schemas.openxmlformats.org/presentationml/2006/main" xmlns:r="http://schemas.openxmlformats.org/officeDocument/2006/relationships">
+<p:notes xmlns:a="http://schemas.openxmlformats.org/drawingml/2006/main" xmlns:r="http://schemas.openxmlformats.org/officeDocument/2006/relationships" xmlns:p="http://schemas.openxmlformats.org/presentationml/2006/main">
   <p:cSld>
     <p:spTree>
       <p:nvGrpSpPr>
@@ -925,7 +719,7 @@
         <p:nvSpPr>
           <p:cNvPr id="2" name="Slide Image Placeholder 1"/>
           <p:cNvSpPr>
-            <a:spLocks noGrp="1"/>
+            <a:spLocks noGrp="1" noRot="1" noChangeAspect="1"/>
           </p:cNvSpPr>
           <p:nvPr>
             <p:ph type="sldImg" idx="2"/>
@@ -940,7 +734,7 @@
             <a:spLocks noGrp="1"/>
           </p:cNvSpPr>
           <p:nvPr>
-            <p:ph type="body" idx="3" sz="quarter"/>
+            <p:ph type="body" sz="quarter" idx="3"/>
           </p:nvPr>
         </p:nvSpPr>
         <p:spPr/>
@@ -961,7 +755,7 @@
             <a:spLocks noGrp="1"/>
           </p:cNvSpPr>
           <p:nvPr>
-            <p:ph type="sldNum" idx="5" sz="quarter"/>
+            <p:ph type="sldNum" sz="quarter" idx="5"/>
           </p:nvPr>
         </p:nvSpPr>
         <p:spPr/>
@@ -975,7 +769,7 @@
 </file>
 
 <file path=ppt/notesSlides/notesSlide16.xml><?xml version="1.0" encoding="utf-8"?>
-<p:notes xmlns:a="http://schemas.openxmlformats.org/drawingml/2006/main" xmlns:p="http://schemas.openxmlformats.org/presentationml/2006/main" xmlns:r="http://schemas.openxmlformats.org/officeDocument/2006/relationships">
+<p:notes xmlns:a="http://schemas.openxmlformats.org/drawingml/2006/main" xmlns:r="http://schemas.openxmlformats.org/officeDocument/2006/relationships" xmlns:p="http://schemas.openxmlformats.org/presentationml/2006/main">
   <p:cSld>
     <p:spTree>
       <p:nvGrpSpPr>
@@ -995,7 +789,7 @@
         <p:nvSpPr>
           <p:cNvPr id="2" name="Slide Image Placeholder 1"/>
           <p:cNvSpPr>
-            <a:spLocks noGrp="1"/>
+            <a:spLocks noGrp="1" noRot="1" noChangeAspect="1"/>
           </p:cNvSpPr>
           <p:nvPr>
             <p:ph type="sldImg" idx="2"/>
@@ -1010,7 +804,7 @@
             <a:spLocks noGrp="1"/>
           </p:cNvSpPr>
           <p:nvPr>
-            <p:ph type="body" idx="3" sz="quarter"/>
+            <p:ph type="body" sz="quarter" idx="3"/>
           </p:nvPr>
         </p:nvSpPr>
         <p:spPr/>
@@ -1031,7 +825,7 @@
             <a:spLocks noGrp="1"/>
           </p:cNvSpPr>
           <p:nvPr>
-            <p:ph type="sldNum" idx="5" sz="quarter"/>
+            <p:ph type="sldNum" sz="quarter" idx="5"/>
           </p:nvPr>
         </p:nvSpPr>
         <p:spPr/>
@@ -1045,7 +839,7 @@
 </file>
 
 <file path=ppt/notesSlides/notesSlide17.xml><?xml version="1.0" encoding="utf-8"?>
-<p:notes xmlns:a="http://schemas.openxmlformats.org/drawingml/2006/main" xmlns:p="http://schemas.openxmlformats.org/presentationml/2006/main" xmlns:r="http://schemas.openxmlformats.org/officeDocument/2006/relationships">
+<p:notes xmlns:a="http://schemas.openxmlformats.org/drawingml/2006/main" xmlns:r="http://schemas.openxmlformats.org/officeDocument/2006/relationships" xmlns:p="http://schemas.openxmlformats.org/presentationml/2006/main">
   <p:cSld>
     <p:spTree>
       <p:nvGrpSpPr>
@@ -1065,7 +859,7 @@
         <p:nvSpPr>
           <p:cNvPr id="2" name="Slide Image Placeholder 1"/>
           <p:cNvSpPr>
-            <a:spLocks noGrp="1"/>
+            <a:spLocks noGrp="1" noRot="1" noChangeAspect="1"/>
           </p:cNvSpPr>
           <p:nvPr>
             <p:ph type="sldImg" idx="2"/>
@@ -1080,7 +874,7 @@
             <a:spLocks noGrp="1"/>
           </p:cNvSpPr>
           <p:nvPr>
-            <p:ph type="body" idx="3" sz="quarter"/>
+            <p:ph type="body" sz="quarter" idx="3"/>
           </p:nvPr>
         </p:nvSpPr>
         <p:spPr/>
@@ -1101,7 +895,7 @@
             <a:spLocks noGrp="1"/>
           </p:cNvSpPr>
           <p:nvPr>
-            <p:ph type="sldNum" idx="5" sz="quarter"/>
+            <p:ph type="sldNum" sz="quarter" idx="5"/>
           </p:nvPr>
         </p:nvSpPr>
         <p:spPr/>
@@ -1115,7 +909,7 @@
 </file>
 
 <file path=ppt/notesSlides/notesSlide18.xml><?xml version="1.0" encoding="utf-8"?>
-<p:notes xmlns:a="http://schemas.openxmlformats.org/drawingml/2006/main" xmlns:p="http://schemas.openxmlformats.org/presentationml/2006/main" xmlns:r="http://schemas.openxmlformats.org/officeDocument/2006/relationships">
+<p:notes xmlns:a="http://schemas.openxmlformats.org/drawingml/2006/main" xmlns:r="http://schemas.openxmlformats.org/officeDocument/2006/relationships" xmlns:p="http://schemas.openxmlformats.org/presentationml/2006/main">
   <p:cSld>
     <p:spTree>
       <p:nvGrpSpPr>
@@ -1135,7 +929,7 @@
         <p:nvSpPr>
           <p:cNvPr id="2" name="Slide Image Placeholder 1"/>
           <p:cNvSpPr>
-            <a:spLocks noGrp="1"/>
+            <a:spLocks noGrp="1" noRot="1" noChangeAspect="1"/>
           </p:cNvSpPr>
           <p:nvPr>
             <p:ph type="sldImg" idx="2"/>
@@ -1150,7 +944,7 @@
             <a:spLocks noGrp="1"/>
           </p:cNvSpPr>
           <p:nvPr>
-            <p:ph type="body" idx="3" sz="quarter"/>
+            <p:ph type="body" sz="quarter" idx="3"/>
           </p:nvPr>
         </p:nvSpPr>
         <p:spPr/>
@@ -1171,7 +965,7 @@
             <a:spLocks noGrp="1"/>
           </p:cNvSpPr>
           <p:nvPr>
-            <p:ph type="sldNum" idx="5" sz="quarter"/>
+            <p:ph type="sldNum" sz="quarter" idx="5"/>
           </p:nvPr>
         </p:nvSpPr>
         <p:spPr/>
@@ -1185,7 +979,7 @@
 </file>
 
 <file path=ppt/notesSlides/notesSlide19.xml><?xml version="1.0" encoding="utf-8"?>
-<p:notes xmlns:a="http://schemas.openxmlformats.org/drawingml/2006/main" xmlns:p="http://schemas.openxmlformats.org/presentationml/2006/main" xmlns:r="http://schemas.openxmlformats.org/officeDocument/2006/relationships">
+<p:notes xmlns:a="http://schemas.openxmlformats.org/drawingml/2006/main" xmlns:r="http://schemas.openxmlformats.org/officeDocument/2006/relationships" xmlns:p="http://schemas.openxmlformats.org/presentationml/2006/main">
   <p:cSld>
     <p:spTree>
       <p:nvGrpSpPr>
@@ -1205,7 +999,7 @@
         <p:nvSpPr>
           <p:cNvPr id="2" name="Slide Image Placeholder 1"/>
           <p:cNvSpPr>
-            <a:spLocks noGrp="1"/>
+            <a:spLocks noGrp="1" noRot="1" noChangeAspect="1"/>
           </p:cNvSpPr>
           <p:nvPr>
             <p:ph type="sldImg" idx="2"/>
@@ -1220,7 +1014,7 @@
             <a:spLocks noGrp="1"/>
           </p:cNvSpPr>
           <p:nvPr>
-            <p:ph type="body" idx="3" sz="quarter"/>
+            <p:ph type="body" sz="quarter" idx="3"/>
           </p:nvPr>
         </p:nvSpPr>
         <p:spPr/>
@@ -1241,7 +1035,7 @@
             <a:spLocks noGrp="1"/>
           </p:cNvSpPr>
           <p:nvPr>
-            <p:ph type="sldNum" idx="5" sz="quarter"/>
+            <p:ph type="sldNum" sz="quarter" idx="5"/>
           </p:nvPr>
         </p:nvSpPr>
         <p:spPr/>
@@ -1255,7 +1049,7 @@
 </file>
 
 <file path=ppt/notesSlides/notesSlide2.xml><?xml version="1.0" encoding="utf-8"?>
-<p:notes xmlns:a="http://schemas.openxmlformats.org/drawingml/2006/main" xmlns:p="http://schemas.openxmlformats.org/presentationml/2006/main" xmlns:r="http://schemas.openxmlformats.org/officeDocument/2006/relationships">
+<p:notes xmlns:a="http://schemas.openxmlformats.org/drawingml/2006/main" xmlns:r="http://schemas.openxmlformats.org/officeDocument/2006/relationships" xmlns:p="http://schemas.openxmlformats.org/presentationml/2006/main">
   <p:cSld>
     <p:spTree>
       <p:nvGrpSpPr>
@@ -1275,7 +1069,7 @@
         <p:nvSpPr>
           <p:cNvPr id="2" name="Slide Image Placeholder 1"/>
           <p:cNvSpPr>
-            <a:spLocks noGrp="1"/>
+            <a:spLocks noGrp="1" noRot="1" noChangeAspect="1"/>
           </p:cNvSpPr>
           <p:nvPr>
             <p:ph type="sldImg" idx="2"/>
@@ -1290,7 +1084,7 @@
             <a:spLocks noGrp="1"/>
           </p:cNvSpPr>
           <p:nvPr>
-            <p:ph type="body" idx="3" sz="quarter"/>
+            <p:ph type="body" sz="quarter" idx="3"/>
           </p:nvPr>
         </p:nvSpPr>
         <p:spPr/>
@@ -1311,7 +1105,7 @@
             <a:spLocks noGrp="1"/>
           </p:cNvSpPr>
           <p:nvPr>
-            <p:ph type="sldNum" idx="5" sz="quarter"/>
+            <p:ph type="sldNum" sz="quarter" idx="5"/>
           </p:nvPr>
         </p:nvSpPr>
         <p:spPr/>
@@ -1325,7 +1119,7 @@
 </file>
 
 <file path=ppt/notesSlides/notesSlide20.xml><?xml version="1.0" encoding="utf-8"?>
-<p:notes xmlns:a="http://schemas.openxmlformats.org/drawingml/2006/main" xmlns:p="http://schemas.openxmlformats.org/presentationml/2006/main" xmlns:r="http://schemas.openxmlformats.org/officeDocument/2006/relationships">
+<p:notes xmlns:a="http://schemas.openxmlformats.org/drawingml/2006/main" xmlns:r="http://schemas.openxmlformats.org/officeDocument/2006/relationships" xmlns:p="http://schemas.openxmlformats.org/presentationml/2006/main">
   <p:cSld>
     <p:spTree>
       <p:nvGrpSpPr>
@@ -1345,7 +1139,7 @@
         <p:nvSpPr>
           <p:cNvPr id="2" name="Slide Image Placeholder 1"/>
           <p:cNvSpPr>
-            <a:spLocks noGrp="1"/>
+            <a:spLocks noGrp="1" noRot="1" noChangeAspect="1"/>
           </p:cNvSpPr>
           <p:nvPr>
             <p:ph type="sldImg" idx="2"/>
@@ -1360,7 +1154,7 @@
             <a:spLocks noGrp="1"/>
           </p:cNvSpPr>
           <p:nvPr>
-            <p:ph type="body" idx="3" sz="quarter"/>
+            <p:ph type="body" sz="quarter" idx="3"/>
           </p:nvPr>
         </p:nvSpPr>
         <p:spPr/>
@@ -1381,7 +1175,7 @@
             <a:spLocks noGrp="1"/>
           </p:cNvSpPr>
           <p:nvPr>
-            <p:ph type="sldNum" idx="5" sz="quarter"/>
+            <p:ph type="sldNum" sz="quarter" idx="5"/>
           </p:nvPr>
         </p:nvSpPr>
         <p:spPr/>
@@ -1395,7 +1189,7 @@
 </file>
 
 <file path=ppt/notesSlides/notesSlide21.xml><?xml version="1.0" encoding="utf-8"?>
-<p:notes xmlns:a="http://schemas.openxmlformats.org/drawingml/2006/main" xmlns:p="http://schemas.openxmlformats.org/presentationml/2006/main" xmlns:r="http://schemas.openxmlformats.org/officeDocument/2006/relationships">
+<p:notes xmlns:a="http://schemas.openxmlformats.org/drawingml/2006/main" xmlns:r="http://schemas.openxmlformats.org/officeDocument/2006/relationships" xmlns:p="http://schemas.openxmlformats.org/presentationml/2006/main">
   <p:cSld>
     <p:spTree>
       <p:nvGrpSpPr>
@@ -1415,7 +1209,7 @@
         <p:nvSpPr>
           <p:cNvPr id="2" name="Slide Image Placeholder 1"/>
           <p:cNvSpPr>
-            <a:spLocks noGrp="1"/>
+            <a:spLocks noGrp="1" noRot="1" noChangeAspect="1"/>
           </p:cNvSpPr>
           <p:nvPr>
             <p:ph type="sldImg" idx="2"/>
@@ -1430,7 +1224,7 @@
             <a:spLocks noGrp="1"/>
           </p:cNvSpPr>
           <p:nvPr>
-            <p:ph type="body" idx="3" sz="quarter"/>
+            <p:ph type="body" sz="quarter" idx="3"/>
           </p:nvPr>
         </p:nvSpPr>
         <p:spPr/>
@@ -1451,7 +1245,7 @@
             <a:spLocks noGrp="1"/>
           </p:cNvSpPr>
           <p:nvPr>
-            <p:ph type="sldNum" idx="5" sz="quarter"/>
+            <p:ph type="sldNum" sz="quarter" idx="5"/>
           </p:nvPr>
         </p:nvSpPr>
         <p:spPr/>
@@ -1465,7 +1259,7 @@
 </file>
 
 <file path=ppt/notesSlides/notesSlide22.xml><?xml version="1.0" encoding="utf-8"?>
-<p:notes xmlns:a="http://schemas.openxmlformats.org/drawingml/2006/main" xmlns:p="http://schemas.openxmlformats.org/presentationml/2006/main" xmlns:r="http://schemas.openxmlformats.org/officeDocument/2006/relationships">
+<p:notes xmlns:a="http://schemas.openxmlformats.org/drawingml/2006/main" xmlns:r="http://schemas.openxmlformats.org/officeDocument/2006/relationships" xmlns:p="http://schemas.openxmlformats.org/presentationml/2006/main">
   <p:cSld>
     <p:spTree>
       <p:nvGrpSpPr>
@@ -1485,7 +1279,7 @@
         <p:nvSpPr>
           <p:cNvPr id="2" name="Slide Image Placeholder 1"/>
           <p:cNvSpPr>
-            <a:spLocks noGrp="1"/>
+            <a:spLocks noGrp="1" noRot="1" noChangeAspect="1"/>
           </p:cNvSpPr>
           <p:nvPr>
             <p:ph type="sldImg" idx="2"/>
@@ -1500,7 +1294,7 @@
             <a:spLocks noGrp="1"/>
           </p:cNvSpPr>
           <p:nvPr>
-            <p:ph type="body" idx="3" sz="quarter"/>
+            <p:ph type="body" sz="quarter" idx="3"/>
           </p:nvPr>
         </p:nvSpPr>
         <p:spPr/>
@@ -1521,7 +1315,7 @@
             <a:spLocks noGrp="1"/>
           </p:cNvSpPr>
           <p:nvPr>
-            <p:ph type="sldNum" idx="5" sz="quarter"/>
+            <p:ph type="sldNum" sz="quarter" idx="5"/>
           </p:nvPr>
         </p:nvSpPr>
         <p:spPr/>
@@ -1535,7 +1329,7 @@
 </file>
 
 <file path=ppt/notesSlides/notesSlide23.xml><?xml version="1.0" encoding="utf-8"?>
-<p:notes xmlns:a="http://schemas.openxmlformats.org/drawingml/2006/main" xmlns:p="http://schemas.openxmlformats.org/presentationml/2006/main" xmlns:r="http://schemas.openxmlformats.org/officeDocument/2006/relationships">
+<p:notes xmlns:a="http://schemas.openxmlformats.org/drawingml/2006/main" xmlns:r="http://schemas.openxmlformats.org/officeDocument/2006/relationships" xmlns:p="http://schemas.openxmlformats.org/presentationml/2006/main">
   <p:cSld>
     <p:spTree>
       <p:nvGrpSpPr>
@@ -1555,7 +1349,7 @@
         <p:nvSpPr>
           <p:cNvPr id="2" name="Slide Image Placeholder 1"/>
           <p:cNvSpPr>
-            <a:spLocks noGrp="1"/>
+            <a:spLocks noGrp="1" noRot="1" noChangeAspect="1"/>
           </p:cNvSpPr>
           <p:nvPr>
             <p:ph type="sldImg" idx="2"/>
@@ -1570,7 +1364,7 @@
             <a:spLocks noGrp="1"/>
           </p:cNvSpPr>
           <p:nvPr>
-            <p:ph type="body" idx="3" sz="quarter"/>
+            <p:ph type="body" sz="quarter" idx="3"/>
           </p:nvPr>
         </p:nvSpPr>
         <p:spPr/>
@@ -1591,7 +1385,7 @@
             <a:spLocks noGrp="1"/>
           </p:cNvSpPr>
           <p:nvPr>
-            <p:ph type="sldNum" idx="5" sz="quarter"/>
+            <p:ph type="sldNum" sz="quarter" idx="5"/>
           </p:nvPr>
         </p:nvSpPr>
         <p:spPr/>
@@ -1605,7 +1399,7 @@
 </file>
 
 <file path=ppt/notesSlides/notesSlide24.xml><?xml version="1.0" encoding="utf-8"?>
-<p:notes xmlns:a="http://schemas.openxmlformats.org/drawingml/2006/main" xmlns:p="http://schemas.openxmlformats.org/presentationml/2006/main" xmlns:r="http://schemas.openxmlformats.org/officeDocument/2006/relationships">
+<p:notes xmlns:a="http://schemas.openxmlformats.org/drawingml/2006/main" xmlns:r="http://schemas.openxmlformats.org/officeDocument/2006/relationships" xmlns:p="http://schemas.openxmlformats.org/presentationml/2006/main">
   <p:cSld>
     <p:spTree>
       <p:nvGrpSpPr>
@@ -1625,7 +1419,7 @@
         <p:nvSpPr>
           <p:cNvPr id="2" name="Slide Image Placeholder 1"/>
           <p:cNvSpPr>
-            <a:spLocks noGrp="1"/>
+            <a:spLocks noGrp="1" noRot="1" noChangeAspect="1"/>
           </p:cNvSpPr>
           <p:nvPr>
             <p:ph type="sldImg" idx="2"/>
@@ -1640,7 +1434,7 @@
             <a:spLocks noGrp="1"/>
           </p:cNvSpPr>
           <p:nvPr>
-            <p:ph type="body" idx="3" sz="quarter"/>
+            <p:ph type="body" sz="quarter" idx="3"/>
           </p:nvPr>
         </p:nvSpPr>
         <p:spPr/>
@@ -1661,7 +1455,7 @@
             <a:spLocks noGrp="1"/>
           </p:cNvSpPr>
           <p:nvPr>
-            <p:ph type="sldNum" idx="5" sz="quarter"/>
+            <p:ph type="sldNum" sz="quarter" idx="5"/>
           </p:nvPr>
         </p:nvSpPr>
         <p:spPr/>
@@ -1675,7 +1469,7 @@
 </file>
 
 <file path=ppt/notesSlides/notesSlide25.xml><?xml version="1.0" encoding="utf-8"?>
-<p:notes xmlns:a="http://schemas.openxmlformats.org/drawingml/2006/main" xmlns:p="http://schemas.openxmlformats.org/presentationml/2006/main" xmlns:r="http://schemas.openxmlformats.org/officeDocument/2006/relationships">
+<p:notes xmlns:a="http://schemas.openxmlformats.org/drawingml/2006/main" xmlns:r="http://schemas.openxmlformats.org/officeDocument/2006/relationships" xmlns:p="http://schemas.openxmlformats.org/presentationml/2006/main">
   <p:cSld>
     <p:spTree>
       <p:nvGrpSpPr>
@@ -1695,7 +1489,7 @@
         <p:nvSpPr>
           <p:cNvPr id="2" name="Slide Image Placeholder 1"/>
           <p:cNvSpPr>
-            <a:spLocks noGrp="1"/>
+            <a:spLocks noGrp="1" noRot="1" noChangeAspect="1"/>
           </p:cNvSpPr>
           <p:nvPr>
             <p:ph type="sldImg" idx="2"/>
@@ -1710,7 +1504,7 @@
             <a:spLocks noGrp="1"/>
           </p:cNvSpPr>
           <p:nvPr>
-            <p:ph type="body" idx="3" sz="quarter"/>
+            <p:ph type="body" sz="quarter" idx="3"/>
           </p:nvPr>
         </p:nvSpPr>
         <p:spPr/>
@@ -1731,7 +1525,7 @@
             <a:spLocks noGrp="1"/>
           </p:cNvSpPr>
           <p:nvPr>
-            <p:ph type="sldNum" idx="5" sz="quarter"/>
+            <p:ph type="sldNum" sz="quarter" idx="5"/>
           </p:nvPr>
         </p:nvSpPr>
         <p:spPr/>
@@ -1745,7 +1539,7 @@
 </file>
 
 <file path=ppt/notesSlides/notesSlide26.xml><?xml version="1.0" encoding="utf-8"?>
-<p:notes xmlns:a="http://schemas.openxmlformats.org/drawingml/2006/main" xmlns:p="http://schemas.openxmlformats.org/presentationml/2006/main" xmlns:r="http://schemas.openxmlformats.org/officeDocument/2006/relationships">
+<p:notes xmlns:a="http://schemas.openxmlformats.org/drawingml/2006/main" xmlns:r="http://schemas.openxmlformats.org/officeDocument/2006/relationships" xmlns:p="http://schemas.openxmlformats.org/presentationml/2006/main">
   <p:cSld>
     <p:spTree>
       <p:nvGrpSpPr>
@@ -1765,7 +1559,7 @@
         <p:nvSpPr>
           <p:cNvPr id="2" name="Slide Image Placeholder 1"/>
           <p:cNvSpPr>
-            <a:spLocks noGrp="1"/>
+            <a:spLocks noGrp="1" noRot="1" noChangeAspect="1"/>
           </p:cNvSpPr>
           <p:nvPr>
             <p:ph type="sldImg" idx="2"/>
@@ -1780,7 +1574,7 @@
             <a:spLocks noGrp="1"/>
           </p:cNvSpPr>
           <p:nvPr>
-            <p:ph type="body" idx="3" sz="quarter"/>
+            <p:ph type="body" sz="quarter" idx="3"/>
           </p:nvPr>
         </p:nvSpPr>
         <p:spPr/>
@@ -1801,7 +1595,7 @@
             <a:spLocks noGrp="1"/>
           </p:cNvSpPr>
           <p:nvPr>
-            <p:ph type="sldNum" idx="5" sz="quarter"/>
+            <p:ph type="sldNum" sz="quarter" idx="5"/>
           </p:nvPr>
         </p:nvSpPr>
         <p:spPr/>
@@ -1815,7 +1609,7 @@
 </file>
 
 <file path=ppt/notesSlides/notesSlide27.xml><?xml version="1.0" encoding="utf-8"?>
-<p:notes xmlns:a="http://schemas.openxmlformats.org/drawingml/2006/main" xmlns:p="http://schemas.openxmlformats.org/presentationml/2006/main" xmlns:r="http://schemas.openxmlformats.org/officeDocument/2006/relationships">
+<p:notes xmlns:a="http://schemas.openxmlformats.org/drawingml/2006/main" xmlns:r="http://schemas.openxmlformats.org/officeDocument/2006/relationships" xmlns:p="http://schemas.openxmlformats.org/presentationml/2006/main">
   <p:cSld>
     <p:spTree>
       <p:nvGrpSpPr>
@@ -1835,7 +1629,7 @@
         <p:nvSpPr>
           <p:cNvPr id="2" name="Slide Image Placeholder 1"/>
           <p:cNvSpPr>
-            <a:spLocks noGrp="1"/>
+            <a:spLocks noGrp="1" noRot="1" noChangeAspect="1"/>
           </p:cNvSpPr>
           <p:nvPr>
             <p:ph type="sldImg" idx="2"/>
@@ -1850,7 +1644,7 @@
             <a:spLocks noGrp="1"/>
           </p:cNvSpPr>
           <p:nvPr>
-            <p:ph type="body" idx="3" sz="quarter"/>
+            <p:ph type="body" sz="quarter" idx="3"/>
           </p:nvPr>
         </p:nvSpPr>
         <p:spPr/>
@@ -1871,7 +1665,7 @@
             <a:spLocks noGrp="1"/>
           </p:cNvSpPr>
           <p:nvPr>
-            <p:ph type="sldNum" idx="5" sz="quarter"/>
+            <p:ph type="sldNum" sz="quarter" idx="5"/>
           </p:nvPr>
         </p:nvSpPr>
         <p:spPr/>
@@ -1885,7 +1679,7 @@
 </file>
 
 <file path=ppt/notesSlides/notesSlide28.xml><?xml version="1.0" encoding="utf-8"?>
-<p:notes xmlns:a="http://schemas.openxmlformats.org/drawingml/2006/main" xmlns:p="http://schemas.openxmlformats.org/presentationml/2006/main" xmlns:r="http://schemas.openxmlformats.org/officeDocument/2006/relationships">
+<p:notes xmlns:a="http://schemas.openxmlformats.org/drawingml/2006/main" xmlns:r="http://schemas.openxmlformats.org/officeDocument/2006/relationships" xmlns:p="http://schemas.openxmlformats.org/presentationml/2006/main">
   <p:cSld>
     <p:spTree>
       <p:nvGrpSpPr>
@@ -1905,7 +1699,7 @@
         <p:nvSpPr>
           <p:cNvPr id="2" name="Slide Image Placeholder 1"/>
           <p:cNvSpPr>
-            <a:spLocks noGrp="1"/>
+            <a:spLocks noGrp="1" noRot="1" noChangeAspect="1"/>
           </p:cNvSpPr>
           <p:nvPr>
             <p:ph type="sldImg" idx="2"/>
@@ -1920,7 +1714,7 @@
             <a:spLocks noGrp="1"/>
           </p:cNvSpPr>
           <p:nvPr>
-            <p:ph type="body" idx="3" sz="quarter"/>
+            <p:ph type="body" sz="quarter" idx="3"/>
           </p:nvPr>
         </p:nvSpPr>
         <p:spPr/>
@@ -1941,7 +1735,7 @@
             <a:spLocks noGrp="1"/>
           </p:cNvSpPr>
           <p:nvPr>
-            <p:ph type="sldNum" idx="5" sz="quarter"/>
+            <p:ph type="sldNum" sz="quarter" idx="5"/>
           </p:nvPr>
         </p:nvSpPr>
         <p:spPr/>
@@ -1955,7 +1749,7 @@
 </file>
 
 <file path=ppt/notesSlides/notesSlide3.xml><?xml version="1.0" encoding="utf-8"?>
-<p:notes xmlns:a="http://schemas.openxmlformats.org/drawingml/2006/main" xmlns:p="http://schemas.openxmlformats.org/presentationml/2006/main" xmlns:r="http://schemas.openxmlformats.org/officeDocument/2006/relationships">
+<p:notes xmlns:a="http://schemas.openxmlformats.org/drawingml/2006/main" xmlns:r="http://schemas.openxmlformats.org/officeDocument/2006/relationships" xmlns:p="http://schemas.openxmlformats.org/presentationml/2006/main">
   <p:cSld>
     <p:spTree>
       <p:nvGrpSpPr>
@@ -1975,7 +1769,7 @@
         <p:nvSpPr>
           <p:cNvPr id="2" name="Slide Image Placeholder 1"/>
           <p:cNvSpPr>
-            <a:spLocks noGrp="1"/>
+            <a:spLocks noGrp="1" noRot="1" noChangeAspect="1"/>
           </p:cNvSpPr>
           <p:nvPr>
             <p:ph type="sldImg" idx="2"/>
@@ -1990,7 +1784,7 @@
             <a:spLocks noGrp="1"/>
           </p:cNvSpPr>
           <p:nvPr>
-            <p:ph type="body" idx="3" sz="quarter"/>
+            <p:ph type="body" sz="quarter" idx="3"/>
           </p:nvPr>
         </p:nvSpPr>
         <p:spPr/>
@@ -2011,7 +1805,7 @@
             <a:spLocks noGrp="1"/>
           </p:cNvSpPr>
           <p:nvPr>
-            <p:ph type="sldNum" idx="5" sz="quarter"/>
+            <p:ph type="sldNum" sz="quarter" idx="5"/>
           </p:nvPr>
         </p:nvSpPr>
         <p:spPr/>
@@ -2025,7 +1819,7 @@
 </file>
 
 <file path=ppt/notesSlides/notesSlide4.xml><?xml version="1.0" encoding="utf-8"?>
-<p:notes xmlns:a="http://schemas.openxmlformats.org/drawingml/2006/main" xmlns:p="http://schemas.openxmlformats.org/presentationml/2006/main" xmlns:r="http://schemas.openxmlformats.org/officeDocument/2006/relationships">
+<p:notes xmlns:a="http://schemas.openxmlformats.org/drawingml/2006/main" xmlns:r="http://schemas.openxmlformats.org/officeDocument/2006/relationships" xmlns:p="http://schemas.openxmlformats.org/presentationml/2006/main">
   <p:cSld>
     <p:spTree>
       <p:nvGrpSpPr>
@@ -2045,7 +1839,7 @@
         <p:nvSpPr>
           <p:cNvPr id="2" name="Slide Image Placeholder 1"/>
           <p:cNvSpPr>
-            <a:spLocks noGrp="1"/>
+            <a:spLocks noGrp="1" noRot="1" noChangeAspect="1"/>
           </p:cNvSpPr>
           <p:nvPr>
             <p:ph type="sldImg" idx="2"/>
@@ -2060,7 +1854,7 @@
             <a:spLocks noGrp="1"/>
           </p:cNvSpPr>
           <p:nvPr>
-            <p:ph type="body" idx="3" sz="quarter"/>
+            <p:ph type="body" sz="quarter" idx="3"/>
           </p:nvPr>
         </p:nvSpPr>
         <p:spPr/>
@@ -2081,7 +1875,7 @@
             <a:spLocks noGrp="1"/>
           </p:cNvSpPr>
           <p:nvPr>
-            <p:ph type="sldNum" idx="5" sz="quarter"/>
+            <p:ph type="sldNum" sz="quarter" idx="5"/>
           </p:nvPr>
         </p:nvSpPr>
         <p:spPr/>
@@ -2095,7 +1889,7 @@
 </file>
 
 <file path=ppt/notesSlides/notesSlide5.xml><?xml version="1.0" encoding="utf-8"?>
-<p:notes xmlns:a="http://schemas.openxmlformats.org/drawingml/2006/main" xmlns:p="http://schemas.openxmlformats.org/presentationml/2006/main" xmlns:r="http://schemas.openxmlformats.org/officeDocument/2006/relationships">
+<p:notes xmlns:a="http://schemas.openxmlformats.org/drawingml/2006/main" xmlns:r="http://schemas.openxmlformats.org/officeDocument/2006/relationships" xmlns:p="http://schemas.openxmlformats.org/presentationml/2006/main">
   <p:cSld>
     <p:spTree>
       <p:nvGrpSpPr>
@@ -2115,7 +1909,7 @@
         <p:nvSpPr>
           <p:cNvPr id="2" name="Slide Image Placeholder 1"/>
           <p:cNvSpPr>
-            <a:spLocks noGrp="1"/>
+            <a:spLocks noGrp="1" noRot="1" noChangeAspect="1"/>
           </p:cNvSpPr>
           <p:nvPr>
             <p:ph type="sldImg" idx="2"/>
@@ -2130,7 +1924,7 @@
             <a:spLocks noGrp="1"/>
           </p:cNvSpPr>
           <p:nvPr>
-            <p:ph type="body" idx="3" sz="quarter"/>
+            <p:ph type="body" sz="quarter" idx="3"/>
           </p:nvPr>
         </p:nvSpPr>
         <p:spPr/>
@@ -2151,7 +1945,7 @@
             <a:spLocks noGrp="1"/>
           </p:cNvSpPr>
           <p:nvPr>
-            <p:ph type="sldNum" idx="5" sz="quarter"/>
+            <p:ph type="sldNum" sz="quarter" idx="5"/>
           </p:nvPr>
         </p:nvSpPr>
         <p:spPr/>
@@ -2165,7 +1959,7 @@
 </file>
 
 <file path=ppt/notesSlides/notesSlide6.xml><?xml version="1.0" encoding="utf-8"?>
-<p:notes xmlns:a="http://schemas.openxmlformats.org/drawingml/2006/main" xmlns:p="http://schemas.openxmlformats.org/presentationml/2006/main" xmlns:r="http://schemas.openxmlformats.org/officeDocument/2006/relationships">
+<p:notes xmlns:a="http://schemas.openxmlformats.org/drawingml/2006/main" xmlns:r="http://schemas.openxmlformats.org/officeDocument/2006/relationships" xmlns:p="http://schemas.openxmlformats.org/presentationml/2006/main">
   <p:cSld>
     <p:spTree>
       <p:nvGrpSpPr>
@@ -2185,7 +1979,7 @@
         <p:nvSpPr>
           <p:cNvPr id="2" name="Slide Image Placeholder 1"/>
           <p:cNvSpPr>
-            <a:spLocks noGrp="1"/>
+            <a:spLocks noGrp="1" noRot="1" noChangeAspect="1"/>
           </p:cNvSpPr>
           <p:nvPr>
             <p:ph type="sldImg" idx="2"/>
@@ -2200,7 +1994,7 @@
             <a:spLocks noGrp="1"/>
           </p:cNvSpPr>
           <p:nvPr>
-            <p:ph type="body" idx="3" sz="quarter"/>
+            <p:ph type="body" sz="quarter" idx="3"/>
           </p:nvPr>
         </p:nvSpPr>
         <p:spPr/>
@@ -2221,7 +2015,7 @@
             <a:spLocks noGrp="1"/>
           </p:cNvSpPr>
           <p:nvPr>
-            <p:ph type="sldNum" idx="5" sz="quarter"/>
+            <p:ph type="sldNum" sz="quarter" idx="5"/>
           </p:nvPr>
         </p:nvSpPr>
         <p:spPr/>
@@ -2235,7 +2029,7 @@
 </file>
 
 <file path=ppt/notesSlides/notesSlide7.xml><?xml version="1.0" encoding="utf-8"?>
-<p:notes xmlns:a="http://schemas.openxmlformats.org/drawingml/2006/main" xmlns:p="http://schemas.openxmlformats.org/presentationml/2006/main" xmlns:r="http://schemas.openxmlformats.org/officeDocument/2006/relationships">
+<p:notes xmlns:a="http://schemas.openxmlformats.org/drawingml/2006/main" xmlns:r="http://schemas.openxmlformats.org/officeDocument/2006/relationships" xmlns:p="http://schemas.openxmlformats.org/presentationml/2006/main">
   <p:cSld>
     <p:spTree>
       <p:nvGrpSpPr>
@@ -2255,7 +2049,7 @@
         <p:nvSpPr>
           <p:cNvPr id="2" name="Slide Image Placeholder 1"/>
           <p:cNvSpPr>
-            <a:spLocks noGrp="1"/>
+            <a:spLocks noGrp="1" noRot="1" noChangeAspect="1"/>
           </p:cNvSpPr>
           <p:nvPr>
             <p:ph type="sldImg" idx="2"/>
@@ -2270,7 +2064,7 @@
             <a:spLocks noGrp="1"/>
           </p:cNvSpPr>
           <p:nvPr>
-            <p:ph type="body" idx="3" sz="quarter"/>
+            <p:ph type="body" sz="quarter" idx="3"/>
           </p:nvPr>
         </p:nvSpPr>
         <p:spPr/>
@@ -2291,7 +2085,7 @@
             <a:spLocks noGrp="1"/>
           </p:cNvSpPr>
           <p:nvPr>
-            <p:ph type="sldNum" idx="5" sz="quarter"/>
+            <p:ph type="sldNum" sz="quarter" idx="5"/>
           </p:nvPr>
         </p:nvSpPr>
         <p:spPr/>
@@ -2305,7 +2099,7 @@
 </file>
 
 <file path=ppt/notesSlides/notesSlide8.xml><?xml version="1.0" encoding="utf-8"?>
-<p:notes xmlns:a="http://schemas.openxmlformats.org/drawingml/2006/main" xmlns:p="http://schemas.openxmlformats.org/presentationml/2006/main" xmlns:r="http://schemas.openxmlformats.org/officeDocument/2006/relationships">
+<p:notes xmlns:a="http://schemas.openxmlformats.org/drawingml/2006/main" xmlns:r="http://schemas.openxmlformats.org/officeDocument/2006/relationships" xmlns:p="http://schemas.openxmlformats.org/presentationml/2006/main">
   <p:cSld>
     <p:spTree>
       <p:nvGrpSpPr>
@@ -2325,7 +2119,7 @@
         <p:nvSpPr>
           <p:cNvPr id="2" name="Slide Image Placeholder 1"/>
           <p:cNvSpPr>
-            <a:spLocks noGrp="1"/>
+            <a:spLocks noGrp="1" noRot="1" noChangeAspect="1"/>
           </p:cNvSpPr>
           <p:nvPr>
             <p:ph type="sldImg" idx="2"/>
@@ -2340,7 +2134,7 @@
             <a:spLocks noGrp="1"/>
           </p:cNvSpPr>
           <p:nvPr>
-            <p:ph type="body" idx="3" sz="quarter"/>
+            <p:ph type="body" sz="quarter" idx="3"/>
           </p:nvPr>
         </p:nvSpPr>
         <p:spPr/>
@@ -2361,7 +2155,7 @@
             <a:spLocks noGrp="1"/>
           </p:cNvSpPr>
           <p:nvPr>
-            <p:ph type="sldNum" idx="5" sz="quarter"/>
+            <p:ph type="sldNum" sz="quarter" idx="5"/>
           </p:nvPr>
         </p:nvSpPr>
         <p:spPr/>
@@ -2375,7 +2169,7 @@
 </file>
 
 <file path=ppt/notesSlides/notesSlide9.xml><?xml version="1.0" encoding="utf-8"?>
-<p:notes xmlns:a="http://schemas.openxmlformats.org/drawingml/2006/main" xmlns:p="http://schemas.openxmlformats.org/presentationml/2006/main" xmlns:r="http://schemas.openxmlformats.org/officeDocument/2006/relationships">
+<p:notes xmlns:a="http://schemas.openxmlformats.org/drawingml/2006/main" xmlns:r="http://schemas.openxmlformats.org/officeDocument/2006/relationships" xmlns:p="http://schemas.openxmlformats.org/presentationml/2006/main">
   <p:cSld>
     <p:spTree>
       <p:nvGrpSpPr>
@@ -2395,7 +2189,7 @@
         <p:nvSpPr>
           <p:cNvPr id="2" name="Slide Image Placeholder 1"/>
           <p:cNvSpPr>
-            <a:spLocks noGrp="1"/>
+            <a:spLocks noGrp="1" noRot="1" noChangeAspect="1"/>
           </p:cNvSpPr>
           <p:nvPr>
             <p:ph type="sldImg" idx="2"/>
@@ -2410,7 +2204,7 @@
             <a:spLocks noGrp="1"/>
           </p:cNvSpPr>
           <p:nvPr>
-            <p:ph type="body" idx="3" sz="quarter"/>
+            <p:ph type="body" sz="quarter" idx="3"/>
           </p:nvPr>
         </p:nvSpPr>
         <p:spPr/>
@@ -2431,7 +2225,7 @@
             <a:spLocks noGrp="1"/>
           </p:cNvSpPr>
           <p:nvPr>
-            <p:ph type="sldNum" idx="5" sz="quarter"/>
+            <p:ph type="sldNum" sz="quarter" idx="5"/>
           </p:nvPr>
         </p:nvSpPr>
         <p:spPr/>
@@ -2482,10 +2276,9 @@
           <a:lstStyle/>
           <a:p>
             <a:r>
-              <a:rPr lang="en-US" smtClean="0"/>
+              <a:rPr lang="en-US"/>
               <a:t>Click to edit Master title style</a:t>
             </a:r>
-            <a:endParaRPr lang="en-US"/>
           </a:p>
         </p:txBody>
       </p:sp>
@@ -2601,10 +2394,9 @@
           </a:lstStyle>
           <a:p>
             <a:r>
-              <a:rPr lang="en-US" smtClean="0"/>
+              <a:rPr lang="en-US"/>
               <a:t>Click to edit Master subtitle style</a:t>
             </a:r>
-            <a:endParaRPr lang="en-US"/>
           </a:p>
         </p:txBody>
       </p:sp>
@@ -2625,7 +2417,7 @@
           <a:p>
             <a:fld id="{5BCAD085-E8A6-8845-BD4E-CB4CCA059FC4}" type="datetimeFigureOut">
               <a:rPr lang="en-US" smtClean="0"/>
-              <a:t>1/27/13</a:t>
+              <a:t>9/1/2026</a:t>
             </a:fld>
             <a:endParaRPr lang="en-US"/>
           </a:p>
@@ -2719,10 +2511,9 @@
           <a:lstStyle/>
           <a:p>
             <a:r>
-              <a:rPr lang="en-US" smtClean="0"/>
+              <a:rPr lang="en-US"/>
               <a:t>Click to edit Master title style</a:t>
             </a:r>
-            <a:endParaRPr lang="en-US"/>
           </a:p>
         </p:txBody>
       </p:sp>
@@ -2743,38 +2534,37 @@
           <a:p>
             <a:pPr lvl="0"/>
             <a:r>
-              <a:rPr lang="en-US" smtClean="0"/>
+              <a:rPr lang="en-US"/>
               <a:t>Click to edit Master text styles</a:t>
             </a:r>
           </a:p>
           <a:p>
             <a:pPr lvl="1"/>
             <a:r>
-              <a:rPr lang="en-US" smtClean="0"/>
+              <a:rPr lang="en-US"/>
               <a:t>Second level</a:t>
             </a:r>
           </a:p>
           <a:p>
             <a:pPr lvl="2"/>
             <a:r>
-              <a:rPr lang="en-US" smtClean="0"/>
+              <a:rPr lang="en-US"/>
               <a:t>Third level</a:t>
             </a:r>
           </a:p>
           <a:p>
             <a:pPr lvl="3"/>
             <a:r>
-              <a:rPr lang="en-US" smtClean="0"/>
+              <a:rPr lang="en-US"/>
               <a:t>Fourth level</a:t>
             </a:r>
           </a:p>
           <a:p>
             <a:pPr lvl="4"/>
             <a:r>
-              <a:rPr lang="en-US" smtClean="0"/>
+              <a:rPr lang="en-US"/>
               <a:t>Fifth level</a:t>
             </a:r>
-            <a:endParaRPr lang="en-US"/>
           </a:p>
         </p:txBody>
       </p:sp>
@@ -2795,7 +2585,7 @@
           <a:p>
             <a:fld id="{5BCAD085-E8A6-8845-BD4E-CB4CCA059FC4}" type="datetimeFigureOut">
               <a:rPr lang="en-US" smtClean="0"/>
-              <a:t>1/27/13</a:t>
+              <a:t>9/1/2026</a:t>
             </a:fld>
             <a:endParaRPr lang="en-US"/>
           </a:p>
@@ -2894,10 +2684,9 @@
           <a:lstStyle/>
           <a:p>
             <a:r>
-              <a:rPr lang="en-US" smtClean="0"/>
+              <a:rPr lang="en-US"/>
               <a:t>Click to edit Master title style</a:t>
             </a:r>
-            <a:endParaRPr lang="en-US"/>
           </a:p>
         </p:txBody>
       </p:sp>
@@ -2923,38 +2712,37 @@
           <a:p>
             <a:pPr lvl="0"/>
             <a:r>
-              <a:rPr lang="en-US" smtClean="0"/>
+              <a:rPr lang="en-US"/>
               <a:t>Click to edit Master text styles</a:t>
             </a:r>
           </a:p>
           <a:p>
             <a:pPr lvl="1"/>
             <a:r>
-              <a:rPr lang="en-US" smtClean="0"/>
+              <a:rPr lang="en-US"/>
               <a:t>Second level</a:t>
             </a:r>
           </a:p>
           <a:p>
             <a:pPr lvl="2"/>
             <a:r>
-              <a:rPr lang="en-US" smtClean="0"/>
+              <a:rPr lang="en-US"/>
               <a:t>Third level</a:t>
             </a:r>
           </a:p>
           <a:p>
             <a:pPr lvl="3"/>
             <a:r>
-              <a:rPr lang="en-US" smtClean="0"/>
+              <a:rPr lang="en-US"/>
               <a:t>Fourth level</a:t>
             </a:r>
           </a:p>
           <a:p>
             <a:pPr lvl="4"/>
             <a:r>
-              <a:rPr lang="en-US" smtClean="0"/>
+              <a:rPr lang="en-US"/>
               <a:t>Fifth level</a:t>
             </a:r>
-            <a:endParaRPr lang="en-US"/>
           </a:p>
         </p:txBody>
       </p:sp>
@@ -2975,7 +2763,7 @@
           <a:p>
             <a:fld id="{5BCAD085-E8A6-8845-BD4E-CB4CCA059FC4}" type="datetimeFigureOut">
               <a:rPr lang="en-US" smtClean="0"/>
-              <a:t>1/27/13</a:t>
+              <a:t>9/1/2026</a:t>
             </a:fld>
             <a:endParaRPr lang="en-US"/>
           </a:p>
@@ -3069,10 +2857,9 @@
           <a:lstStyle/>
           <a:p>
             <a:r>
-              <a:rPr lang="en-US" smtClean="0"/>
+              <a:rPr lang="en-US"/>
               <a:t>Click to edit Master title style</a:t>
             </a:r>
-            <a:endParaRPr lang="en-US"/>
           </a:p>
         </p:txBody>
       </p:sp>
@@ -3093,38 +2880,37 @@
           <a:p>
             <a:pPr lvl="0"/>
             <a:r>
-              <a:rPr lang="en-US" smtClean="0"/>
+              <a:rPr lang="en-US"/>
               <a:t>Click to edit Master text styles</a:t>
             </a:r>
           </a:p>
           <a:p>
             <a:pPr lvl="1"/>
             <a:r>
-              <a:rPr lang="en-US" smtClean="0"/>
+              <a:rPr lang="en-US"/>
               <a:t>Second level</a:t>
             </a:r>
           </a:p>
           <a:p>
             <a:pPr lvl="2"/>
             <a:r>
-              <a:rPr lang="en-US" smtClean="0"/>
+              <a:rPr lang="en-US"/>
               <a:t>Third level</a:t>
             </a:r>
           </a:p>
           <a:p>
             <a:pPr lvl="3"/>
             <a:r>
-              <a:rPr lang="en-US" smtClean="0"/>
+              <a:rPr lang="en-US"/>
               <a:t>Fourth level</a:t>
             </a:r>
           </a:p>
           <a:p>
             <a:pPr lvl="4"/>
             <a:r>
-              <a:rPr lang="en-US" smtClean="0"/>
+              <a:rPr lang="en-US"/>
               <a:t>Fifth level</a:t>
             </a:r>
-            <a:endParaRPr lang="en-US"/>
           </a:p>
         </p:txBody>
       </p:sp>
@@ -3145,7 +2931,7 @@
           <a:p>
             <a:fld id="{5BCAD085-E8A6-8845-BD4E-CB4CCA059FC4}" type="datetimeFigureOut">
               <a:rPr lang="en-US" smtClean="0"/>
-              <a:t>1/27/13</a:t>
+              <a:t>9/1/2026</a:t>
             </a:fld>
             <a:endParaRPr lang="en-US"/>
           </a:p>
@@ -3248,10 +3034,9 @@
           </a:lstStyle>
           <a:p>
             <a:r>
-              <a:rPr lang="en-US" smtClean="0"/>
+              <a:rPr lang="en-US"/>
               <a:t>Click to edit Master title style</a:t>
             </a:r>
-            <a:endParaRPr lang="en-US"/>
           </a:p>
         </p:txBody>
       </p:sp>
@@ -3368,7 +3153,7 @@
           <a:p>
             <a:pPr lvl="0"/>
             <a:r>
-              <a:rPr lang="en-US" smtClean="0"/>
+              <a:rPr lang="en-US"/>
               <a:t>Click to edit Master text styles</a:t>
             </a:r>
           </a:p>
@@ -3391,7 +3176,7 @@
           <a:p>
             <a:fld id="{5BCAD085-E8A6-8845-BD4E-CB4CCA059FC4}" type="datetimeFigureOut">
               <a:rPr lang="en-US" smtClean="0"/>
-              <a:t>1/27/13</a:t>
+              <a:t>9/1/2026</a:t>
             </a:fld>
             <a:endParaRPr lang="en-US"/>
           </a:p>
@@ -3485,10 +3270,9 @@
           <a:lstStyle/>
           <a:p>
             <a:r>
-              <a:rPr lang="en-US" smtClean="0"/>
+              <a:rPr lang="en-US"/>
               <a:t>Click to edit Master title style</a:t>
             </a:r>
-            <a:endParaRPr lang="en-US"/>
           </a:p>
         </p:txBody>
       </p:sp>
@@ -3542,38 +3326,37 @@
           <a:p>
             <a:pPr lvl="0"/>
             <a:r>
-              <a:rPr lang="en-US" smtClean="0"/>
+              <a:rPr lang="en-US"/>
               <a:t>Click to edit Master text styles</a:t>
             </a:r>
           </a:p>
           <a:p>
             <a:pPr lvl="1"/>
             <a:r>
-              <a:rPr lang="en-US" smtClean="0"/>
+              <a:rPr lang="en-US"/>
               <a:t>Second level</a:t>
             </a:r>
           </a:p>
           <a:p>
             <a:pPr lvl="2"/>
             <a:r>
-              <a:rPr lang="en-US" smtClean="0"/>
+              <a:rPr lang="en-US"/>
               <a:t>Third level</a:t>
             </a:r>
           </a:p>
           <a:p>
             <a:pPr lvl="3"/>
             <a:r>
-              <a:rPr lang="en-US" smtClean="0"/>
+              <a:rPr lang="en-US"/>
               <a:t>Fourth level</a:t>
             </a:r>
           </a:p>
           <a:p>
             <a:pPr lvl="4"/>
             <a:r>
-              <a:rPr lang="en-US" smtClean="0"/>
+              <a:rPr lang="en-US"/>
               <a:t>Fifth level</a:t>
             </a:r>
-            <a:endParaRPr lang="en-US"/>
           </a:p>
         </p:txBody>
       </p:sp>
@@ -3627,38 +3410,37 @@
           <a:p>
             <a:pPr lvl="0"/>
             <a:r>
-              <a:rPr lang="en-US" smtClean="0"/>
+              <a:rPr lang="en-US"/>
               <a:t>Click to edit Master text styles</a:t>
             </a:r>
           </a:p>
           <a:p>
             <a:pPr lvl="1"/>
             <a:r>
-              <a:rPr lang="en-US" smtClean="0"/>
+              <a:rPr lang="en-US"/>
               <a:t>Second level</a:t>
             </a:r>
           </a:p>
           <a:p>
             <a:pPr lvl="2"/>
             <a:r>
-              <a:rPr lang="en-US" smtClean="0"/>
+              <a:rPr lang="en-US"/>
               <a:t>Third level</a:t>
             </a:r>
           </a:p>
           <a:p>
             <a:pPr lvl="3"/>
             <a:r>
-              <a:rPr lang="en-US" smtClean="0"/>
+              <a:rPr lang="en-US"/>
               <a:t>Fourth level</a:t>
             </a:r>
           </a:p>
           <a:p>
             <a:pPr lvl="4"/>
             <a:r>
-              <a:rPr lang="en-US" smtClean="0"/>
+              <a:rPr lang="en-US"/>
               <a:t>Fifth level</a:t>
             </a:r>
-            <a:endParaRPr lang="en-US"/>
           </a:p>
         </p:txBody>
       </p:sp>
@@ -3679,7 +3461,7 @@
           <a:p>
             <a:fld id="{5BCAD085-E8A6-8845-BD4E-CB4CCA059FC4}" type="datetimeFigureOut">
               <a:rPr lang="en-US" smtClean="0"/>
-              <a:t>1/27/13</a:t>
+              <a:t>9/1/2026</a:t>
             </a:fld>
             <a:endParaRPr lang="en-US"/>
           </a:p>
@@ -3777,10 +3559,9 @@
           </a:lstStyle>
           <a:p>
             <a:r>
-              <a:rPr lang="en-US" smtClean="0"/>
+              <a:rPr lang="en-US"/>
               <a:t>Click to edit Master title style</a:t>
             </a:r>
-            <a:endParaRPr lang="en-US"/>
           </a:p>
         </p:txBody>
       </p:sp>
@@ -3843,7 +3624,7 @@
           <a:p>
             <a:pPr lvl="0"/>
             <a:r>
-              <a:rPr lang="en-US" smtClean="0"/>
+              <a:rPr lang="en-US"/>
               <a:t>Click to edit Master text styles</a:t>
             </a:r>
           </a:p>
@@ -3899,38 +3680,37 @@
           <a:p>
             <a:pPr lvl="0"/>
             <a:r>
-              <a:rPr lang="en-US" smtClean="0"/>
+              <a:rPr lang="en-US"/>
               <a:t>Click to edit Master text styles</a:t>
             </a:r>
           </a:p>
           <a:p>
             <a:pPr lvl="1"/>
             <a:r>
-              <a:rPr lang="en-US" smtClean="0"/>
+              <a:rPr lang="en-US"/>
               <a:t>Second level</a:t>
             </a:r>
           </a:p>
           <a:p>
             <a:pPr lvl="2"/>
             <a:r>
-              <a:rPr lang="en-US" smtClean="0"/>
+              <a:rPr lang="en-US"/>
               <a:t>Third level</a:t>
             </a:r>
           </a:p>
           <a:p>
             <a:pPr lvl="3"/>
             <a:r>
-              <a:rPr lang="en-US" smtClean="0"/>
+              <a:rPr lang="en-US"/>
               <a:t>Fourth level</a:t>
             </a:r>
           </a:p>
           <a:p>
             <a:pPr lvl="4"/>
             <a:r>
-              <a:rPr lang="en-US" smtClean="0"/>
+              <a:rPr lang="en-US"/>
               <a:t>Fifth level</a:t>
             </a:r>
-            <a:endParaRPr lang="en-US"/>
           </a:p>
         </p:txBody>
       </p:sp>
@@ -3993,7 +3773,7 @@
           <a:p>
             <a:pPr lvl="0"/>
             <a:r>
-              <a:rPr lang="en-US" smtClean="0"/>
+              <a:rPr lang="en-US"/>
               <a:t>Click to edit Master text styles</a:t>
             </a:r>
           </a:p>
@@ -4049,38 +3829,37 @@
           <a:p>
             <a:pPr lvl="0"/>
             <a:r>
-              <a:rPr lang="en-US" smtClean="0"/>
+              <a:rPr lang="en-US"/>
               <a:t>Click to edit Master text styles</a:t>
             </a:r>
           </a:p>
           <a:p>
             <a:pPr lvl="1"/>
             <a:r>
-              <a:rPr lang="en-US" smtClean="0"/>
+              <a:rPr lang="en-US"/>
               <a:t>Second level</a:t>
             </a:r>
           </a:p>
           <a:p>
             <a:pPr lvl="2"/>
             <a:r>
-              <a:rPr lang="en-US" smtClean="0"/>
+              <a:rPr lang="en-US"/>
               <a:t>Third level</a:t>
             </a:r>
           </a:p>
           <a:p>
             <a:pPr lvl="3"/>
             <a:r>
-              <a:rPr lang="en-US" smtClean="0"/>
+              <a:rPr lang="en-US"/>
               <a:t>Fourth level</a:t>
             </a:r>
           </a:p>
           <a:p>
             <a:pPr lvl="4"/>
             <a:r>
-              <a:rPr lang="en-US" smtClean="0"/>
+              <a:rPr lang="en-US"/>
               <a:t>Fifth level</a:t>
             </a:r>
-            <a:endParaRPr lang="en-US"/>
           </a:p>
         </p:txBody>
       </p:sp>
@@ -4101,7 +3880,7 @@
           <a:p>
             <a:fld id="{5BCAD085-E8A6-8845-BD4E-CB4CCA059FC4}" type="datetimeFigureOut">
               <a:rPr lang="en-US" smtClean="0"/>
-              <a:t>1/27/13</a:t>
+              <a:t>9/1/2026</a:t>
             </a:fld>
             <a:endParaRPr lang="en-US"/>
           </a:p>
@@ -4195,10 +3974,9 @@
           <a:lstStyle/>
           <a:p>
             <a:r>
-              <a:rPr lang="en-US" smtClean="0"/>
+              <a:rPr lang="en-US"/>
               <a:t>Click to edit Master title style</a:t>
             </a:r>
-            <a:endParaRPr lang="en-US"/>
           </a:p>
         </p:txBody>
       </p:sp>
@@ -4219,7 +3997,7 @@
           <a:p>
             <a:fld id="{5BCAD085-E8A6-8845-BD4E-CB4CCA059FC4}" type="datetimeFigureOut">
               <a:rPr lang="en-US" smtClean="0"/>
-              <a:t>1/27/13</a:t>
+              <a:t>9/1/2026</a:t>
             </a:fld>
             <a:endParaRPr lang="en-US"/>
           </a:p>
@@ -4314,7 +4092,7 @@
           <a:p>
             <a:fld id="{5BCAD085-E8A6-8845-BD4E-CB4CCA059FC4}" type="datetimeFigureOut">
               <a:rPr lang="en-US" smtClean="0"/>
-              <a:t>1/27/13</a:t>
+              <a:t>9/1/2026</a:t>
             </a:fld>
             <a:endParaRPr lang="en-US"/>
           </a:p>
@@ -4417,10 +4195,9 @@
           </a:lstStyle>
           <a:p>
             <a:r>
-              <a:rPr lang="en-US" smtClean="0"/>
+              <a:rPr lang="en-US"/>
               <a:t>Click to edit Master title style</a:t>
             </a:r>
-            <a:endParaRPr lang="en-US"/>
           </a:p>
         </p:txBody>
       </p:sp>
@@ -4474,38 +4251,37 @@
           <a:p>
             <a:pPr lvl="0"/>
             <a:r>
-              <a:rPr lang="en-US" smtClean="0"/>
+              <a:rPr lang="en-US"/>
               <a:t>Click to edit Master text styles</a:t>
             </a:r>
           </a:p>
           <a:p>
             <a:pPr lvl="1"/>
             <a:r>
-              <a:rPr lang="en-US" smtClean="0"/>
+              <a:rPr lang="en-US"/>
               <a:t>Second level</a:t>
             </a:r>
           </a:p>
           <a:p>
             <a:pPr lvl="2"/>
             <a:r>
-              <a:rPr lang="en-US" smtClean="0"/>
+              <a:rPr lang="en-US"/>
               <a:t>Third level</a:t>
             </a:r>
           </a:p>
           <a:p>
             <a:pPr lvl="3"/>
             <a:r>
-              <a:rPr lang="en-US" smtClean="0"/>
+              <a:rPr lang="en-US"/>
               <a:t>Fourth level</a:t>
             </a:r>
           </a:p>
           <a:p>
             <a:pPr lvl="4"/>
             <a:r>
-              <a:rPr lang="en-US" smtClean="0"/>
+              <a:rPr lang="en-US"/>
               <a:t>Fifth level</a:t>
             </a:r>
-            <a:endParaRPr lang="en-US"/>
           </a:p>
         </p:txBody>
       </p:sp>
@@ -4568,7 +4344,7 @@
           <a:p>
             <a:pPr lvl="0"/>
             <a:r>
-              <a:rPr lang="en-US" smtClean="0"/>
+              <a:rPr lang="en-US"/>
               <a:t>Click to edit Master text styles</a:t>
             </a:r>
           </a:p>
@@ -4591,7 +4367,7 @@
           <a:p>
             <a:fld id="{5BCAD085-E8A6-8845-BD4E-CB4CCA059FC4}" type="datetimeFigureOut">
               <a:rPr lang="en-US" smtClean="0"/>
-              <a:t>1/27/13</a:t>
+              <a:t>9/1/2026</a:t>
             </a:fld>
             <a:endParaRPr lang="en-US"/>
           </a:p>
@@ -4694,10 +4470,9 @@
           </a:lstStyle>
           <a:p>
             <a:r>
-              <a:rPr lang="en-US" smtClean="0"/>
+              <a:rPr lang="en-US"/>
               <a:t>Click to edit Master title style</a:t>
             </a:r>
-            <a:endParaRPr lang="en-US"/>
           </a:p>
         </p:txBody>
       </p:sp>
@@ -4821,7 +4596,7 @@
           <a:p>
             <a:pPr lvl="0"/>
             <a:r>
-              <a:rPr lang="en-US" smtClean="0"/>
+              <a:rPr lang="en-US"/>
               <a:t>Click to edit Master text styles</a:t>
             </a:r>
           </a:p>
@@ -4844,7 +4619,7 @@
           <a:p>
             <a:fld id="{5BCAD085-E8A6-8845-BD4E-CB4CCA059FC4}" type="datetimeFigureOut">
               <a:rPr lang="en-US" smtClean="0"/>
-              <a:t>1/27/13</a:t>
+              <a:t>9/1/2026</a:t>
             </a:fld>
             <a:endParaRPr lang="en-US"/>
           </a:p>
@@ -4953,10 +4728,9 @@
           <a:lstStyle/>
           <a:p>
             <a:r>
-              <a:rPr lang="en-US" smtClean="0"/>
+              <a:rPr lang="en-US"/>
               <a:t>Click to edit Master title style</a:t>
             </a:r>
-            <a:endParaRPr lang="en-US"/>
           </a:p>
         </p:txBody>
       </p:sp>
@@ -4987,38 +4761,37 @@
           <a:p>
             <a:pPr lvl="0"/>
             <a:r>
-              <a:rPr lang="en-US" smtClean="0"/>
+              <a:rPr lang="en-US"/>
               <a:t>Click to edit Master text styles</a:t>
             </a:r>
           </a:p>
           <a:p>
             <a:pPr lvl="1"/>
             <a:r>
-              <a:rPr lang="en-US" smtClean="0"/>
+              <a:rPr lang="en-US"/>
               <a:t>Second level</a:t>
             </a:r>
           </a:p>
           <a:p>
             <a:pPr lvl="2"/>
             <a:r>
-              <a:rPr lang="en-US" smtClean="0"/>
+              <a:rPr lang="en-US"/>
               <a:t>Third level</a:t>
             </a:r>
           </a:p>
           <a:p>
             <a:pPr lvl="3"/>
             <a:r>
-              <a:rPr lang="en-US" smtClean="0"/>
+              <a:rPr lang="en-US"/>
               <a:t>Fourth level</a:t>
             </a:r>
           </a:p>
           <a:p>
             <a:pPr lvl="4"/>
             <a:r>
-              <a:rPr lang="en-US" smtClean="0"/>
+              <a:rPr lang="en-US"/>
               <a:t>Fifth level</a:t>
             </a:r>
-            <a:endParaRPr lang="en-US"/>
           </a:p>
         </p:txBody>
       </p:sp>
@@ -5057,7 +4830,7 @@
           <a:p>
             <a:fld id="{5BCAD085-E8A6-8845-BD4E-CB4CCA059FC4}" type="datetimeFigureOut">
               <a:rPr lang="en-US" smtClean="0"/>
-              <a:t>1/27/13</a:t>
+              <a:t>9/1/2026</a:t>
             </a:fld>
             <a:endParaRPr lang="en-US"/>
           </a:p>
@@ -5416,7 +5189,7 @@
 </file>
 
 <file path=ppt/slides/slide1.xml><?xml version="1.0" encoding="utf-8"?>
-<p:sld xmlns:a="http://schemas.openxmlformats.org/drawingml/2006/main" xmlns:p="http://schemas.openxmlformats.org/presentationml/2006/main" xmlns:r="http://schemas.openxmlformats.org/officeDocument/2006/relationships">
+<p:sld xmlns:a="http://schemas.openxmlformats.org/drawingml/2006/main" xmlns:r="http://schemas.openxmlformats.org/officeDocument/2006/relationships" xmlns:p="http://schemas.openxmlformats.org/presentationml/2006/main">
   <p:cSld>
     <p:spTree>
       <p:nvGrpSpPr>
@@ -5424,7 +5197,14 @@
         <p:cNvGrpSpPr/>
         <p:nvPr/>
       </p:nvGrpSpPr>
-      <p:grpSpPr/>
+      <p:grpSpPr>
+        <a:xfrm>
+          <a:off x="0" y="0"/>
+          <a:ext cx="0" cy="0"/>
+          <a:chOff x="0" y="0"/>
+          <a:chExt cx="0" cy="0"/>
+        </a:xfrm>
+      </p:grpSpPr>
       <p:sp>
         <p:nvSpPr>
           <p:cNvPr id="2" name="Rectangle 1"/>
@@ -5465,6 +5245,7 @@
           <a:lstStyle/>
           <a:p>
             <a:pPr algn="ctr"/>
+            <a:endParaRPr/>
           </a:p>
         </p:txBody>
       </p:sp>
@@ -5485,7 +5266,7 @@
           <a:noFill/>
         </p:spPr>
         <p:txBody>
-          <a:bodyPr wrap="square" anchor="t" lIns="0" rIns="0" tIns="0" bIns="0">
+          <a:bodyPr wrap="square" lIns="0" tIns="0" rIns="0" bIns="0" anchor="t">
             <a:spAutoFit/>
           </a:bodyPr>
           <a:lstStyle/>
@@ -5524,7 +5305,7 @@
           <a:noFill/>
         </p:spPr>
         <p:txBody>
-          <a:bodyPr wrap="square" anchor="t" lIns="0" rIns="0" tIns="0" bIns="0">
+          <a:bodyPr wrap="square" lIns="0" tIns="0" rIns="0" bIns="0" anchor="t">
             <a:spAutoFit/>
           </a:bodyPr>
           <a:lstStyle/>
@@ -5563,7 +5344,7 @@
           <a:noFill/>
         </p:spPr>
         <p:txBody>
-          <a:bodyPr wrap="square" anchor="t" lIns="0" rIns="0" tIns="0" bIns="0">
+          <a:bodyPr wrap="square" lIns="0" tIns="0" rIns="0" bIns="0" anchor="t">
             <a:spAutoFit/>
           </a:bodyPr>
           <a:lstStyle/>
@@ -5625,6 +5406,7 @@
           <a:lstStyle/>
           <a:p>
             <a:pPr algn="ctr"/>
+            <a:endParaRPr/>
           </a:p>
         </p:txBody>
       </p:sp>
@@ -5645,7 +5427,7 @@
           <a:noFill/>
         </p:spPr>
         <p:txBody>
-          <a:bodyPr wrap="square" anchor="t" lIns="0" rIns="0" tIns="0" bIns="0">
+          <a:bodyPr wrap="square" lIns="0" tIns="0" rIns="0" bIns="0" anchor="t">
             <a:spAutoFit/>
           </a:bodyPr>
           <a:lstStyle/>
@@ -5684,7 +5466,7 @@
           <a:noFill/>
         </p:spPr>
         <p:txBody>
-          <a:bodyPr wrap="square" anchor="t" lIns="0" rIns="0" tIns="0" bIns="0">
+          <a:bodyPr wrap="square" lIns="0" tIns="0" rIns="0" bIns="0" anchor="t">
             <a:spAutoFit/>
           </a:bodyPr>
           <a:lstStyle/>
@@ -5715,7 +5497,7 @@
           <p:nvPr/>
         </p:nvPicPr>
         <p:blipFill>
-          <a:blip r:embed="rId2"/>
+          <a:blip r:embed="rId3"/>
           <a:stretch>
             <a:fillRect/>
           </a:stretch>
@@ -5747,7 +5529,7 @@
           <a:noFill/>
         </p:spPr>
         <p:txBody>
-          <a:bodyPr wrap="square" anchor="t" lIns="0" rIns="0" tIns="0" bIns="0">
+          <a:bodyPr wrap="square" lIns="0" tIns="0" rIns="0" bIns="0" anchor="t">
             <a:spAutoFit/>
           </a:bodyPr>
           <a:lstStyle/>
@@ -5778,7 +5560,7 @@
 </file>
 
 <file path=ppt/slides/slide10.xml><?xml version="1.0" encoding="utf-8"?>
-<p:sld xmlns:a="http://schemas.openxmlformats.org/drawingml/2006/main" xmlns:p="http://schemas.openxmlformats.org/presentationml/2006/main" xmlns:r="http://schemas.openxmlformats.org/officeDocument/2006/relationships">
+<p:sld xmlns:a="http://schemas.openxmlformats.org/drawingml/2006/main" xmlns:r="http://schemas.openxmlformats.org/officeDocument/2006/relationships" xmlns:p="http://schemas.openxmlformats.org/presentationml/2006/main">
   <p:cSld>
     <p:spTree>
       <p:nvGrpSpPr>
@@ -5786,7 +5568,14 @@
         <p:cNvGrpSpPr/>
         <p:nvPr/>
       </p:nvGrpSpPr>
-      <p:grpSpPr/>
+      <p:grpSpPr>
+        <a:xfrm>
+          <a:off x="0" y="0"/>
+          <a:ext cx="0" cy="0"/>
+          <a:chOff x="0" y="0"/>
+          <a:chExt cx="0" cy="0"/>
+        </a:xfrm>
+      </p:grpSpPr>
       <p:sp>
         <p:nvSpPr>
           <p:cNvPr id="2" name="Rectangle 1"/>
@@ -5827,6 +5616,7 @@
           <a:lstStyle/>
           <a:p>
             <a:pPr algn="ctr"/>
+            <a:endParaRPr/>
           </a:p>
         </p:txBody>
       </p:sp>
@@ -5847,7 +5637,7 @@
           <a:noFill/>
         </p:spPr>
         <p:txBody>
-          <a:bodyPr wrap="square" anchor="t" lIns="0" rIns="0" tIns="0" bIns="0">
+          <a:bodyPr wrap="square" lIns="0" tIns="0" rIns="0" bIns="0" anchor="t">
             <a:spAutoFit/>
           </a:bodyPr>
           <a:lstStyle/>
@@ -5909,6 +5699,7 @@
           <a:lstStyle/>
           <a:p>
             <a:pPr algn="ctr"/>
+            <a:endParaRPr/>
           </a:p>
         </p:txBody>
       </p:sp>
@@ -5929,7 +5720,7 @@
           <a:noFill/>
         </p:spPr>
         <p:txBody>
-          <a:bodyPr wrap="square" anchor="t" lIns="0" rIns="0" tIns="0" bIns="0">
+          <a:bodyPr wrap="square" lIns="0" tIns="0" rIns="0" bIns="0" anchor="t">
             <a:spAutoFit/>
           </a:bodyPr>
           <a:lstStyle/>
@@ -5940,7 +5731,7 @@
               </a:lnSpc>
             </a:pPr>
             <a:r>
-              <a:rPr sz="3800" b="1">
+              <a:rPr sz="3800" b="1" dirty="0">
                 <a:solidFill>
                   <a:srgbClr val="000000"/>
                 </a:solidFill>
@@ -5960,15 +5751,15 @@
           <p:nvPr/>
         </p:nvPicPr>
         <p:blipFill>
-          <a:blip r:embed="rId2"/>
+          <a:blip r:embed="rId3"/>
           <a:stretch>
             <a:fillRect/>
           </a:stretch>
         </p:blipFill>
         <p:spPr>
           <a:xfrm>
-            <a:off x="566928" y="1234440"/>
-            <a:ext cx="3904487" cy="2926080"/>
+            <a:off x="566928" y="773985"/>
+            <a:ext cx="3739895" cy="3968496"/>
           </a:xfrm>
           <a:prstGeom prst="rect">
             <a:avLst/>
@@ -5983,8 +5774,8 @@
         </p:nvSpPr>
         <p:spPr>
           <a:xfrm>
-            <a:off x="4617720" y="1280160"/>
-            <a:ext cx="3931920" cy="1554480"/>
+            <a:off x="4636008" y="927403"/>
+            <a:ext cx="3931920" cy="1626407"/>
           </a:xfrm>
           <a:prstGeom prst="rect">
             <a:avLst/>
@@ -5992,7 +5783,7 @@
           <a:noFill/>
         </p:spPr>
         <p:txBody>
-          <a:bodyPr wrap="square" anchor="t" lIns="0" rIns="0" tIns="0" bIns="0">
+          <a:bodyPr wrap="square" lIns="0" tIns="0" rIns="0" bIns="0" anchor="t">
             <a:spAutoFit/>
           </a:bodyPr>
           <a:lstStyle/>
@@ -6003,7 +5794,7 @@
               </a:lnSpc>
             </a:pPr>
             <a:r>
-              <a:rPr sz="1250" b="0">
+              <a:rPr sz="1250" b="0" dirty="0">
                 <a:solidFill>
                   <a:srgbClr val="000000"/>
                 </a:solidFill>
@@ -6019,7 +5810,7 @@
               </a:lnSpc>
             </a:pPr>
             <a:r>
-              <a:rPr sz="1250" b="0">
+              <a:rPr sz="1250" b="0" dirty="0">
                 <a:solidFill>
                   <a:srgbClr val="000000"/>
                 </a:solidFill>
@@ -6035,7 +5826,7 @@
               </a:lnSpc>
             </a:pPr>
             <a:r>
-              <a:rPr sz="1250" b="0">
+              <a:rPr sz="1250" b="0" dirty="0">
                 <a:solidFill>
                   <a:srgbClr val="000000"/>
                 </a:solidFill>
@@ -6051,7 +5842,7 @@
               </a:lnSpc>
             </a:pPr>
             <a:r>
-              <a:rPr sz="1250" b="0">
+              <a:rPr sz="1250" b="0" dirty="0">
                 <a:solidFill>
                   <a:srgbClr val="000000"/>
                 </a:solidFill>
@@ -6067,7 +5858,7 @@
               </a:lnSpc>
             </a:pPr>
             <a:r>
-              <a:rPr sz="1250" b="0">
+              <a:rPr sz="1250" b="0" dirty="0">
                 <a:solidFill>
                   <a:srgbClr val="000000"/>
                 </a:solidFill>
@@ -6086,7 +5877,7 @@
         </p:nvSpPr>
         <p:spPr>
           <a:xfrm>
-            <a:off x="4617720" y="2880360"/>
+            <a:off x="4617720" y="2694225"/>
             <a:ext cx="3931920" cy="1325880"/>
           </a:xfrm>
           <a:prstGeom prst="rect">
@@ -6118,6 +5909,7 @@
           <a:lstStyle/>
           <a:p>
             <a:pPr algn="ctr"/>
+            <a:endParaRPr/>
           </a:p>
         </p:txBody>
       </p:sp>
@@ -6129,7 +5921,7 @@
         </p:nvSpPr>
         <p:spPr>
           <a:xfrm>
-            <a:off x="4782312" y="2990088"/>
+            <a:off x="4782312" y="2758233"/>
             <a:ext cx="3602736" cy="292608"/>
           </a:xfrm>
           <a:prstGeom prst="rect">
@@ -6138,7 +5930,7 @@
           <a:noFill/>
         </p:spPr>
         <p:txBody>
-          <a:bodyPr wrap="square" anchor="t" lIns="0" rIns="0" tIns="0" bIns="0">
+          <a:bodyPr wrap="square" lIns="0" tIns="0" rIns="0" bIns="0" anchor="t">
             <a:spAutoFit/>
           </a:bodyPr>
           <a:lstStyle/>
@@ -6149,7 +5941,7 @@
               </a:lnSpc>
             </a:pPr>
             <a:r>
-              <a:rPr sz="1500" b="1">
+              <a:rPr sz="1500" b="1" dirty="0">
                 <a:solidFill>
                   <a:srgbClr val="000000"/>
                 </a:solidFill>
@@ -6168,8 +5960,8 @@
         </p:nvSpPr>
         <p:spPr>
           <a:xfrm>
-            <a:off x="4782312" y="3319272"/>
-            <a:ext cx="3602736" cy="740664"/>
+            <a:off x="4782312" y="3119749"/>
+            <a:ext cx="3602736" cy="444609"/>
           </a:xfrm>
           <a:prstGeom prst="rect">
             <a:avLst/>
@@ -6177,7 +5969,7 @@
           <a:noFill/>
         </p:spPr>
         <p:txBody>
-          <a:bodyPr wrap="square" anchor="t" lIns="0" rIns="0" tIns="0" bIns="0">
+          <a:bodyPr wrap="square" lIns="0" tIns="0" rIns="0" bIns="0" anchor="t">
             <a:spAutoFit/>
           </a:bodyPr>
           <a:lstStyle/>
@@ -6188,7 +5980,7 @@
               </a:lnSpc>
             </a:pPr>
             <a:r>
-              <a:rPr sz="1200" b="0">
+              <a:rPr sz="1200" b="0" dirty="0">
                 <a:solidFill>
                   <a:srgbClr val="000000"/>
                 </a:solidFill>
@@ -6196,31 +5988,35 @@
               </a:rPr>
               <a:t>a tiny computer. Dumber than</a:t>
             </a:r>
-          </a:p>
-          <a:p>
-            <a:pPr algn="l">
-              <a:lnSpc>
-                <a:spcPct val="125000"/>
-              </a:lnSpc>
-            </a:pPr>
-            <a:r>
-              <a:rPr sz="1200" b="0">
-                <a:solidFill>
-                  <a:srgbClr val="000000"/>
-                </a:solidFill>
-                <a:latin typeface="Source Han Sans SC"/>
-              </a:rPr>
-              <a:t>your phone, but give it one job</a:t>
-            </a:r>
-          </a:p>
-          <a:p>
-            <a:pPr algn="l">
-              <a:lnSpc>
-                <a:spcPct val="125000"/>
-              </a:lnSpc>
-            </a:pPr>
-            <a:r>
-              <a:rPr sz="1200" b="0">
+            <a:r>
+              <a:rPr lang="en-US" sz="1200" b="0" dirty="0">
+                <a:solidFill>
+                  <a:srgbClr val="000000"/>
+                </a:solidFill>
+                <a:latin typeface="Source Han Sans SC"/>
+              </a:rPr>
+              <a:t> y</a:t>
+            </a:r>
+            <a:r>
+              <a:rPr sz="1200" b="0" dirty="0">
+                <a:solidFill>
+                  <a:srgbClr val="000000"/>
+                </a:solidFill>
+                <a:latin typeface="Source Han Sans SC"/>
+              </a:rPr>
+              <a:t>our phone, but give it one job</a:t>
+            </a:r>
+            <a:r>
+              <a:rPr lang="en-US" sz="1200" b="0" dirty="0">
+                <a:solidFill>
+                  <a:srgbClr val="000000"/>
+                </a:solidFill>
+                <a:latin typeface="Source Han Sans SC"/>
+              </a:rPr>
+              <a:t> </a:t>
+            </a:r>
+            <a:r>
+              <a:rPr sz="1200" b="0" dirty="0">
                 <a:solidFill>
                   <a:srgbClr val="000000"/>
                 </a:solidFill>
@@ -6228,15 +6024,17 @@
               </a:rPr>
               <a:t>and it'll do it all day, for a year,</a:t>
             </a:r>
-          </a:p>
-          <a:p>
-            <a:pPr algn="l">
-              <a:lnSpc>
-                <a:spcPct val="125000"/>
-              </a:lnSpc>
-            </a:pPr>
-            <a:r>
-              <a:rPr sz="1200" b="0">
+            <a:r>
+              <a:rPr lang="en-US" sz="1200" b="0" dirty="0">
+                <a:solidFill>
+                  <a:srgbClr val="000000"/>
+                </a:solidFill>
+                <a:latin typeface="Source Han Sans SC"/>
+              </a:rPr>
+              <a:t> </a:t>
+            </a:r>
+            <a:r>
+              <a:rPr sz="1200" b="0" dirty="0">
                 <a:solidFill>
                   <a:srgbClr val="000000"/>
                 </a:solidFill>
@@ -6287,6 +6085,7 @@
           <a:lstStyle/>
           <a:p>
             <a:pPr algn="ctr"/>
+            <a:endParaRPr/>
           </a:p>
         </p:txBody>
       </p:sp>
@@ -6299,7 +6098,7 @@
         <p:spPr>
           <a:xfrm>
             <a:off x="4782312" y="4233672"/>
-            <a:ext cx="3602736" cy="457200"/>
+            <a:ext cx="3602736" cy="392736"/>
           </a:xfrm>
           <a:prstGeom prst="rect">
             <a:avLst/>
@@ -6307,7 +6106,7 @@
           <a:noFill/>
         </p:spPr>
         <p:txBody>
-          <a:bodyPr wrap="square" anchor="t" lIns="0" rIns="0" tIns="0" bIns="0">
+          <a:bodyPr wrap="square" lIns="0" tIns="0" rIns="0" bIns="0" anchor="t">
             <a:spAutoFit/>
           </a:bodyPr>
           <a:lstStyle/>
@@ -6318,7 +6117,7 @@
               </a:lnSpc>
             </a:pPr>
             <a:r>
-              <a:rPr sz="1100" b="0">
+              <a:rPr sz="1100" b="0" dirty="0">
                 <a:solidFill>
                   <a:srgbClr val="000000"/>
                 </a:solidFill>
@@ -6334,7 +6133,7 @@
               </a:lnSpc>
             </a:pPr>
             <a:r>
-              <a:rPr sz="1100" b="0">
+              <a:rPr sz="1100" b="0" dirty="0">
                 <a:solidFill>
                   <a:srgbClr val="000000"/>
                 </a:solidFill>
@@ -6342,15 +6141,17 @@
               </a:rPr>
               <a:t>used separately later — not today.</a:t>
             </a:r>
-          </a:p>
-          <a:p>
-            <a:pPr algn="l">
-              <a:lnSpc>
-                <a:spcPct val="120000"/>
-              </a:lnSpc>
-            </a:pPr>
-            <a:r>
-              <a:rPr sz="1100" b="0">
+            <a:r>
+              <a:rPr lang="en-US" sz="1100" b="0" dirty="0">
+                <a:solidFill>
+                  <a:srgbClr val="000000"/>
+                </a:solidFill>
+                <a:latin typeface="Source Han Sans SC"/>
+              </a:rPr>
+              <a:t> </a:t>
+            </a:r>
+            <a:r>
+              <a:rPr sz="1100" b="0" dirty="0">
                 <a:solidFill>
                   <a:srgbClr val="000000"/>
                 </a:solidFill>
@@ -6370,7 +6171,7 @@
 </file>
 
 <file path=ppt/slides/slide11.xml><?xml version="1.0" encoding="utf-8"?>
-<p:sld xmlns:a="http://schemas.openxmlformats.org/drawingml/2006/main" xmlns:p="http://schemas.openxmlformats.org/presentationml/2006/main" xmlns:r="http://schemas.openxmlformats.org/officeDocument/2006/relationships">
+<p:sld xmlns:a="http://schemas.openxmlformats.org/drawingml/2006/main" xmlns:r="http://schemas.openxmlformats.org/officeDocument/2006/relationships" xmlns:p="http://schemas.openxmlformats.org/presentationml/2006/main">
   <p:cSld>
     <p:spTree>
       <p:nvGrpSpPr>
@@ -6378,7 +6179,14 @@
         <p:cNvGrpSpPr/>
         <p:nvPr/>
       </p:nvGrpSpPr>
-      <p:grpSpPr/>
+      <p:grpSpPr>
+        <a:xfrm>
+          <a:off x="0" y="0"/>
+          <a:ext cx="0" cy="0"/>
+          <a:chOff x="0" y="0"/>
+          <a:chExt cx="0" cy="0"/>
+        </a:xfrm>
+      </p:grpSpPr>
       <p:sp>
         <p:nvSpPr>
           <p:cNvPr id="2" name="Rectangle 1"/>
@@ -6419,6 +6227,7 @@
           <a:lstStyle/>
           <a:p>
             <a:pPr algn="ctr"/>
+            <a:endParaRPr/>
           </a:p>
         </p:txBody>
       </p:sp>
@@ -6439,7 +6248,7 @@
           <a:noFill/>
         </p:spPr>
         <p:txBody>
-          <a:bodyPr wrap="square" anchor="t" lIns="0" rIns="0" tIns="0" bIns="0">
+          <a:bodyPr wrap="square" lIns="0" tIns="0" rIns="0" bIns="0" anchor="t">
             <a:spAutoFit/>
           </a:bodyPr>
           <a:lstStyle/>
@@ -6501,6 +6310,7 @@
           <a:lstStyle/>
           <a:p>
             <a:pPr algn="ctr"/>
+            <a:endParaRPr/>
           </a:p>
         </p:txBody>
       </p:sp>
@@ -6521,7 +6331,7 @@
           <a:noFill/>
         </p:spPr>
         <p:txBody>
-          <a:bodyPr wrap="square" anchor="t" lIns="0" rIns="0" tIns="0" bIns="0">
+          <a:bodyPr wrap="square" lIns="0" tIns="0" rIns="0" bIns="0" anchor="t">
             <a:spAutoFit/>
           </a:bodyPr>
           <a:lstStyle/>
@@ -6585,6 +6395,7 @@
           <a:lstStyle/>
           <a:p>
             <a:pPr algn="ctr"/>
+            <a:endParaRPr/>
           </a:p>
         </p:txBody>
       </p:sp>
@@ -6630,6 +6441,7 @@
           <a:lstStyle/>
           <a:p>
             <a:pPr algn="ctr"/>
+            <a:endParaRPr/>
           </a:p>
         </p:txBody>
       </p:sp>
@@ -6650,7 +6462,7 @@
           <a:noFill/>
         </p:spPr>
         <p:txBody>
-          <a:bodyPr wrap="square" anchor="t" lIns="0" rIns="0" tIns="0" bIns="0">
+          <a:bodyPr wrap="square" lIns="0" tIns="0" rIns="0" bIns="0" anchor="t">
             <a:spAutoFit/>
           </a:bodyPr>
           <a:lstStyle/>
@@ -6714,6 +6526,7 @@
           <a:lstStyle/>
           <a:p>
             <a:pPr algn="ctr"/>
+            <a:endParaRPr/>
           </a:p>
         </p:txBody>
       </p:sp>
@@ -6734,7 +6547,7 @@
           <a:noFill/>
         </p:spPr>
         <p:txBody>
-          <a:bodyPr wrap="square" anchor="t" lIns="0" rIns="0" tIns="0" bIns="0">
+          <a:bodyPr wrap="square" lIns="0" tIns="0" rIns="0" bIns="0" anchor="t">
             <a:spAutoFit/>
           </a:bodyPr>
           <a:lstStyle/>
@@ -6798,6 +6611,7 @@
           <a:lstStyle/>
           <a:p>
             <a:pPr algn="ctr"/>
+            <a:endParaRPr/>
           </a:p>
         </p:txBody>
       </p:sp>
@@ -6818,7 +6632,7 @@
           <a:noFill/>
         </p:spPr>
         <p:txBody>
-          <a:bodyPr wrap="square" anchor="t" lIns="0" rIns="0" tIns="0" bIns="0">
+          <a:bodyPr wrap="square" lIns="0" tIns="0" rIns="0" bIns="0" anchor="t">
             <a:spAutoFit/>
           </a:bodyPr>
           <a:lstStyle/>
@@ -6882,6 +6696,7 @@
           <a:lstStyle/>
           <a:p>
             <a:pPr algn="ctr"/>
+            <a:endParaRPr/>
           </a:p>
         </p:txBody>
       </p:sp>
@@ -6902,7 +6717,7 @@
           <a:noFill/>
         </p:spPr>
         <p:txBody>
-          <a:bodyPr wrap="square" anchor="t" lIns="0" rIns="0" tIns="0" bIns="0">
+          <a:bodyPr wrap="square" lIns="0" tIns="0" rIns="0" bIns="0" anchor="t">
             <a:spAutoFit/>
           </a:bodyPr>
           <a:lstStyle/>
@@ -6966,6 +6781,7 @@
           <a:lstStyle/>
           <a:p>
             <a:pPr algn="ctr"/>
+            <a:endParaRPr/>
           </a:p>
         </p:txBody>
       </p:sp>
@@ -6986,7 +6802,7 @@
           <a:noFill/>
         </p:spPr>
         <p:txBody>
-          <a:bodyPr wrap="square" anchor="t" lIns="0" rIns="0" tIns="0" bIns="0">
+          <a:bodyPr wrap="square" lIns="0" tIns="0" rIns="0" bIns="0" anchor="t">
             <a:spAutoFit/>
           </a:bodyPr>
           <a:lstStyle/>
@@ -7025,7 +6841,7 @@
           <a:noFill/>
         </p:spPr>
         <p:txBody>
-          <a:bodyPr wrap="square" anchor="t" lIns="0" rIns="0" tIns="0" bIns="0">
+          <a:bodyPr wrap="square" lIns="0" tIns="0" rIns="0" bIns="0" anchor="t">
             <a:spAutoFit/>
           </a:bodyPr>
           <a:lstStyle/>
@@ -7088,7 +6904,7 @@
 </file>
 
 <file path=ppt/slides/slide12.xml><?xml version="1.0" encoding="utf-8"?>
-<p:sld xmlns:a="http://schemas.openxmlformats.org/drawingml/2006/main" xmlns:p="http://schemas.openxmlformats.org/presentationml/2006/main" xmlns:r="http://schemas.openxmlformats.org/officeDocument/2006/relationships">
+<p:sld xmlns:a="http://schemas.openxmlformats.org/drawingml/2006/main" xmlns:r="http://schemas.openxmlformats.org/officeDocument/2006/relationships" xmlns:p="http://schemas.openxmlformats.org/presentationml/2006/main">
   <p:cSld>
     <p:spTree>
       <p:nvGrpSpPr>
@@ -7096,7 +6912,14 @@
         <p:cNvGrpSpPr/>
         <p:nvPr/>
       </p:nvGrpSpPr>
-      <p:grpSpPr/>
+      <p:grpSpPr>
+        <a:xfrm>
+          <a:off x="0" y="0"/>
+          <a:ext cx="0" cy="0"/>
+          <a:chOff x="0" y="0"/>
+          <a:chExt cx="0" cy="0"/>
+        </a:xfrm>
+      </p:grpSpPr>
       <p:sp>
         <p:nvSpPr>
           <p:cNvPr id="2" name="Rectangle 1"/>
@@ -7137,6 +6960,7 @@
           <a:lstStyle/>
           <a:p>
             <a:pPr algn="ctr"/>
+            <a:endParaRPr/>
           </a:p>
         </p:txBody>
       </p:sp>
@@ -7157,7 +6981,7 @@
           <a:noFill/>
         </p:spPr>
         <p:txBody>
-          <a:bodyPr wrap="square" anchor="t" lIns="0" rIns="0" tIns="0" bIns="0">
+          <a:bodyPr wrap="square" lIns="0" tIns="0" rIns="0" bIns="0" anchor="t">
             <a:spAutoFit/>
           </a:bodyPr>
           <a:lstStyle/>
@@ -7219,6 +7043,7 @@
           <a:lstStyle/>
           <a:p>
             <a:pPr algn="ctr"/>
+            <a:endParaRPr/>
           </a:p>
         </p:txBody>
       </p:sp>
@@ -7239,7 +7064,7 @@
           <a:noFill/>
         </p:spPr>
         <p:txBody>
-          <a:bodyPr wrap="square" anchor="t" lIns="0" rIns="0" tIns="0" bIns="0">
+          <a:bodyPr wrap="square" lIns="0" tIns="0" rIns="0" bIns="0" anchor="t">
             <a:spAutoFit/>
           </a:bodyPr>
           <a:lstStyle/>
@@ -7303,6 +7128,7 @@
           <a:lstStyle/>
           <a:p>
             <a:pPr algn="ctr"/>
+            <a:endParaRPr/>
           </a:p>
         </p:txBody>
       </p:sp>
@@ -7348,6 +7174,7 @@
           <a:lstStyle/>
           <a:p>
             <a:pPr algn="ctr"/>
+            <a:endParaRPr/>
           </a:p>
         </p:txBody>
       </p:sp>
@@ -7368,7 +7195,7 @@
           <a:noFill/>
         </p:spPr>
         <p:txBody>
-          <a:bodyPr wrap="square" anchor="t" lIns="0" rIns="0" tIns="0" bIns="0">
+          <a:bodyPr wrap="square" lIns="0" tIns="0" rIns="0" bIns="0" anchor="t">
             <a:spAutoFit/>
           </a:bodyPr>
           <a:lstStyle/>
@@ -7432,6 +7259,7 @@
           <a:lstStyle/>
           <a:p>
             <a:pPr algn="ctr"/>
+            <a:endParaRPr/>
           </a:p>
         </p:txBody>
       </p:sp>
@@ -7452,7 +7280,7 @@
           <a:noFill/>
         </p:spPr>
         <p:txBody>
-          <a:bodyPr wrap="square" anchor="t" lIns="0" rIns="0" tIns="0" bIns="0">
+          <a:bodyPr wrap="square" lIns="0" tIns="0" rIns="0" bIns="0" anchor="t">
             <a:spAutoFit/>
           </a:bodyPr>
           <a:lstStyle/>
@@ -7516,6 +7344,7 @@
           <a:lstStyle/>
           <a:p>
             <a:pPr algn="ctr"/>
+            <a:endParaRPr/>
           </a:p>
         </p:txBody>
       </p:sp>
@@ -7536,7 +7365,7 @@
           <a:noFill/>
         </p:spPr>
         <p:txBody>
-          <a:bodyPr wrap="square" anchor="t" lIns="0" rIns="0" tIns="0" bIns="0">
+          <a:bodyPr wrap="square" lIns="0" tIns="0" rIns="0" bIns="0" anchor="t">
             <a:spAutoFit/>
           </a:bodyPr>
           <a:lstStyle/>
@@ -7600,6 +7429,7 @@
           <a:lstStyle/>
           <a:p>
             <a:pPr algn="ctr"/>
+            <a:endParaRPr/>
           </a:p>
         </p:txBody>
       </p:sp>
@@ -7620,7 +7450,7 @@
           <a:noFill/>
         </p:spPr>
         <p:txBody>
-          <a:bodyPr wrap="square" anchor="t" lIns="0" rIns="0" tIns="0" bIns="0">
+          <a:bodyPr wrap="square" lIns="0" tIns="0" rIns="0" bIns="0" anchor="t">
             <a:spAutoFit/>
           </a:bodyPr>
           <a:lstStyle/>
@@ -7684,6 +7514,7 @@
           <a:lstStyle/>
           <a:p>
             <a:pPr algn="ctr"/>
+            <a:endParaRPr/>
           </a:p>
         </p:txBody>
       </p:sp>
@@ -7704,7 +7535,7 @@
           <a:noFill/>
         </p:spPr>
         <p:txBody>
-          <a:bodyPr wrap="square" anchor="t" lIns="0" rIns="0" tIns="0" bIns="0">
+          <a:bodyPr wrap="square" lIns="0" tIns="0" rIns="0" bIns="0" anchor="t">
             <a:spAutoFit/>
           </a:bodyPr>
           <a:lstStyle/>
@@ -7743,7 +7574,7 @@
           <a:noFill/>
         </p:spPr>
         <p:txBody>
-          <a:bodyPr wrap="square" anchor="t" lIns="0" rIns="0" tIns="0" bIns="0">
+          <a:bodyPr wrap="square" lIns="0" tIns="0" rIns="0" bIns="0" anchor="t">
             <a:spAutoFit/>
           </a:bodyPr>
           <a:lstStyle/>
@@ -7854,7 +7685,7 @@
 </file>
 
 <file path=ppt/slides/slide13.xml><?xml version="1.0" encoding="utf-8"?>
-<p:sld xmlns:a="http://schemas.openxmlformats.org/drawingml/2006/main" xmlns:p="http://schemas.openxmlformats.org/presentationml/2006/main" xmlns:r="http://schemas.openxmlformats.org/officeDocument/2006/relationships">
+<p:sld xmlns:a="http://schemas.openxmlformats.org/drawingml/2006/main" xmlns:r="http://schemas.openxmlformats.org/officeDocument/2006/relationships" xmlns:p="http://schemas.openxmlformats.org/presentationml/2006/main">
   <p:cSld>
     <p:spTree>
       <p:nvGrpSpPr>
@@ -7862,7 +7693,14 @@
         <p:cNvGrpSpPr/>
         <p:nvPr/>
       </p:nvGrpSpPr>
-      <p:grpSpPr/>
+      <p:grpSpPr>
+        <a:xfrm>
+          <a:off x="0" y="0"/>
+          <a:ext cx="0" cy="0"/>
+          <a:chOff x="0" y="0"/>
+          <a:chExt cx="0" cy="0"/>
+        </a:xfrm>
+      </p:grpSpPr>
       <p:sp>
         <p:nvSpPr>
           <p:cNvPr id="2" name="Rectangle 1"/>
@@ -7903,6 +7741,7 @@
           <a:lstStyle/>
           <a:p>
             <a:pPr algn="ctr"/>
+            <a:endParaRPr/>
           </a:p>
         </p:txBody>
       </p:sp>
@@ -7923,7 +7762,7 @@
           <a:noFill/>
         </p:spPr>
         <p:txBody>
-          <a:bodyPr wrap="square" anchor="t" lIns="0" rIns="0" tIns="0" bIns="0">
+          <a:bodyPr wrap="square" lIns="0" tIns="0" rIns="0" bIns="0" anchor="t">
             <a:spAutoFit/>
           </a:bodyPr>
           <a:lstStyle/>
@@ -7985,6 +7824,7 @@
           <a:lstStyle/>
           <a:p>
             <a:pPr algn="ctr"/>
+            <a:endParaRPr/>
           </a:p>
         </p:txBody>
       </p:sp>
@@ -8005,7 +7845,7 @@
           <a:noFill/>
         </p:spPr>
         <p:txBody>
-          <a:bodyPr wrap="square" anchor="t" lIns="0" rIns="0" tIns="0" bIns="0">
+          <a:bodyPr wrap="square" lIns="0" tIns="0" rIns="0" bIns="0" anchor="t">
             <a:spAutoFit/>
           </a:bodyPr>
           <a:lstStyle/>
@@ -8069,6 +7909,7 @@
           <a:lstStyle/>
           <a:p>
             <a:pPr algn="ctr"/>
+            <a:endParaRPr/>
           </a:p>
         </p:txBody>
       </p:sp>
@@ -8114,6 +7955,7 @@
           <a:lstStyle/>
           <a:p>
             <a:pPr algn="ctr"/>
+            <a:endParaRPr/>
           </a:p>
         </p:txBody>
       </p:sp>
@@ -8134,7 +7976,7 @@
           <a:noFill/>
         </p:spPr>
         <p:txBody>
-          <a:bodyPr wrap="square" anchor="t" lIns="0" rIns="0" tIns="0" bIns="0">
+          <a:bodyPr wrap="square" lIns="0" tIns="0" rIns="0" bIns="0" anchor="t">
             <a:spAutoFit/>
           </a:bodyPr>
           <a:lstStyle/>
@@ -8198,6 +8040,7 @@
           <a:lstStyle/>
           <a:p>
             <a:pPr algn="ctr"/>
+            <a:endParaRPr/>
           </a:p>
         </p:txBody>
       </p:sp>
@@ -8218,7 +8061,7 @@
           <a:noFill/>
         </p:spPr>
         <p:txBody>
-          <a:bodyPr wrap="square" anchor="t" lIns="0" rIns="0" tIns="0" bIns="0">
+          <a:bodyPr wrap="square" lIns="0" tIns="0" rIns="0" bIns="0" anchor="t">
             <a:spAutoFit/>
           </a:bodyPr>
           <a:lstStyle/>
@@ -8282,6 +8125,7 @@
           <a:lstStyle/>
           <a:p>
             <a:pPr algn="ctr"/>
+            <a:endParaRPr/>
           </a:p>
         </p:txBody>
       </p:sp>
@@ -8302,7 +8146,7 @@
           <a:noFill/>
         </p:spPr>
         <p:txBody>
-          <a:bodyPr wrap="square" anchor="t" lIns="0" rIns="0" tIns="0" bIns="0">
+          <a:bodyPr wrap="square" lIns="0" tIns="0" rIns="0" bIns="0" anchor="t">
             <a:spAutoFit/>
           </a:bodyPr>
           <a:lstStyle/>
@@ -8366,6 +8210,7 @@
           <a:lstStyle/>
           <a:p>
             <a:pPr algn="ctr"/>
+            <a:endParaRPr/>
           </a:p>
         </p:txBody>
       </p:sp>
@@ -8386,7 +8231,7 @@
           <a:noFill/>
         </p:spPr>
         <p:txBody>
-          <a:bodyPr wrap="square" anchor="t" lIns="0" rIns="0" tIns="0" bIns="0">
+          <a:bodyPr wrap="square" lIns="0" tIns="0" rIns="0" bIns="0" anchor="t">
             <a:spAutoFit/>
           </a:bodyPr>
           <a:lstStyle/>
@@ -8450,6 +8295,7 @@
           <a:lstStyle/>
           <a:p>
             <a:pPr algn="ctr"/>
+            <a:endParaRPr/>
           </a:p>
         </p:txBody>
       </p:sp>
@@ -8470,7 +8316,7 @@
           <a:noFill/>
         </p:spPr>
         <p:txBody>
-          <a:bodyPr wrap="square" anchor="t" lIns="0" rIns="0" tIns="0" bIns="0">
+          <a:bodyPr wrap="square" lIns="0" tIns="0" rIns="0" bIns="0" anchor="t">
             <a:spAutoFit/>
           </a:bodyPr>
           <a:lstStyle/>
@@ -8509,7 +8355,7 @@
           <a:noFill/>
         </p:spPr>
         <p:txBody>
-          <a:bodyPr wrap="square" anchor="t" lIns="0" rIns="0" tIns="0" bIns="0">
+          <a:bodyPr wrap="square" lIns="0" tIns="0" rIns="0" bIns="0" anchor="t">
             <a:spAutoFit/>
           </a:bodyPr>
           <a:lstStyle/>
@@ -8588,7 +8434,7 @@
 </file>
 
 <file path=ppt/slides/slide14.xml><?xml version="1.0" encoding="utf-8"?>
-<p:sld xmlns:a="http://schemas.openxmlformats.org/drawingml/2006/main" xmlns:p="http://schemas.openxmlformats.org/presentationml/2006/main" xmlns:r="http://schemas.openxmlformats.org/officeDocument/2006/relationships">
+<p:sld xmlns:a="http://schemas.openxmlformats.org/drawingml/2006/main" xmlns:r="http://schemas.openxmlformats.org/officeDocument/2006/relationships" xmlns:p="http://schemas.openxmlformats.org/presentationml/2006/main">
   <p:cSld>
     <p:spTree>
       <p:nvGrpSpPr>
@@ -8596,7 +8442,14 @@
         <p:cNvGrpSpPr/>
         <p:nvPr/>
       </p:nvGrpSpPr>
-      <p:grpSpPr/>
+      <p:grpSpPr>
+        <a:xfrm>
+          <a:off x="0" y="0"/>
+          <a:ext cx="0" cy="0"/>
+          <a:chOff x="0" y="0"/>
+          <a:chExt cx="0" cy="0"/>
+        </a:xfrm>
+      </p:grpSpPr>
       <p:sp>
         <p:nvSpPr>
           <p:cNvPr id="2" name="Rectangle 1"/>
@@ -8637,6 +8490,7 @@
           <a:lstStyle/>
           <a:p>
             <a:pPr algn="ctr"/>
+            <a:endParaRPr/>
           </a:p>
         </p:txBody>
       </p:sp>
@@ -8657,7 +8511,7 @@
           <a:noFill/>
         </p:spPr>
         <p:txBody>
-          <a:bodyPr wrap="square" anchor="t" lIns="0" rIns="0" tIns="0" bIns="0">
+          <a:bodyPr wrap="square" lIns="0" tIns="0" rIns="0" bIns="0" anchor="t">
             <a:spAutoFit/>
           </a:bodyPr>
           <a:lstStyle/>
@@ -8719,6 +8573,7 @@
           <a:lstStyle/>
           <a:p>
             <a:pPr algn="ctr"/>
+            <a:endParaRPr/>
           </a:p>
         </p:txBody>
       </p:sp>
@@ -8739,7 +8594,7 @@
           <a:noFill/>
         </p:spPr>
         <p:txBody>
-          <a:bodyPr wrap="square" anchor="t" lIns="0" rIns="0" tIns="0" bIns="0">
+          <a:bodyPr wrap="square" lIns="0" tIns="0" rIns="0" bIns="0" anchor="t">
             <a:spAutoFit/>
           </a:bodyPr>
           <a:lstStyle/>
@@ -8803,6 +8658,7 @@
           <a:lstStyle/>
           <a:p>
             <a:pPr algn="ctr"/>
+            <a:endParaRPr/>
           </a:p>
         </p:txBody>
       </p:sp>
@@ -8848,6 +8704,7 @@
           <a:lstStyle/>
           <a:p>
             <a:pPr algn="ctr"/>
+            <a:endParaRPr/>
           </a:p>
         </p:txBody>
       </p:sp>
@@ -8868,7 +8725,7 @@
           <a:noFill/>
         </p:spPr>
         <p:txBody>
-          <a:bodyPr wrap="square" anchor="t" lIns="0" rIns="0" tIns="0" bIns="0">
+          <a:bodyPr wrap="square" lIns="0" tIns="0" rIns="0" bIns="0" anchor="t">
             <a:spAutoFit/>
           </a:bodyPr>
           <a:lstStyle/>
@@ -8932,6 +8789,7 @@
           <a:lstStyle/>
           <a:p>
             <a:pPr algn="ctr"/>
+            <a:endParaRPr/>
           </a:p>
         </p:txBody>
       </p:sp>
@@ -8952,7 +8810,7 @@
           <a:noFill/>
         </p:spPr>
         <p:txBody>
-          <a:bodyPr wrap="square" anchor="t" lIns="0" rIns="0" tIns="0" bIns="0">
+          <a:bodyPr wrap="square" lIns="0" tIns="0" rIns="0" bIns="0" anchor="t">
             <a:spAutoFit/>
           </a:bodyPr>
           <a:lstStyle/>
@@ -9016,6 +8874,7 @@
           <a:lstStyle/>
           <a:p>
             <a:pPr algn="ctr"/>
+            <a:endParaRPr/>
           </a:p>
         </p:txBody>
       </p:sp>
@@ -9036,7 +8895,7 @@
           <a:noFill/>
         </p:spPr>
         <p:txBody>
-          <a:bodyPr wrap="square" anchor="t" lIns="0" rIns="0" tIns="0" bIns="0">
+          <a:bodyPr wrap="square" lIns="0" tIns="0" rIns="0" bIns="0" anchor="t">
             <a:spAutoFit/>
           </a:bodyPr>
           <a:lstStyle/>
@@ -9100,6 +8959,7 @@
           <a:lstStyle/>
           <a:p>
             <a:pPr algn="ctr"/>
+            <a:endParaRPr/>
           </a:p>
         </p:txBody>
       </p:sp>
@@ -9120,7 +8980,7 @@
           <a:noFill/>
         </p:spPr>
         <p:txBody>
-          <a:bodyPr wrap="square" anchor="t" lIns="0" rIns="0" tIns="0" bIns="0">
+          <a:bodyPr wrap="square" lIns="0" tIns="0" rIns="0" bIns="0" anchor="t">
             <a:spAutoFit/>
           </a:bodyPr>
           <a:lstStyle/>
@@ -9184,6 +9044,7 @@
           <a:lstStyle/>
           <a:p>
             <a:pPr algn="ctr"/>
+            <a:endParaRPr/>
           </a:p>
         </p:txBody>
       </p:sp>
@@ -9204,7 +9065,7 @@
           <a:noFill/>
         </p:spPr>
         <p:txBody>
-          <a:bodyPr wrap="square" anchor="t" lIns="0" rIns="0" tIns="0" bIns="0">
+          <a:bodyPr wrap="square" lIns="0" tIns="0" rIns="0" bIns="0" anchor="t">
             <a:spAutoFit/>
           </a:bodyPr>
           <a:lstStyle/>
@@ -9243,7 +9104,7 @@
           <a:noFill/>
         </p:spPr>
         <p:txBody>
-          <a:bodyPr wrap="square" anchor="t" lIns="0" rIns="0" tIns="0" bIns="0">
+          <a:bodyPr wrap="square" lIns="0" tIns="0" rIns="0" bIns="0" anchor="t">
             <a:spAutoFit/>
           </a:bodyPr>
           <a:lstStyle/>
@@ -9306,7 +9167,7 @@
 </file>
 
 <file path=ppt/slides/slide15.xml><?xml version="1.0" encoding="utf-8"?>
-<p:sld xmlns:a="http://schemas.openxmlformats.org/drawingml/2006/main" xmlns:p="http://schemas.openxmlformats.org/presentationml/2006/main" xmlns:r="http://schemas.openxmlformats.org/officeDocument/2006/relationships">
+<p:sld xmlns:a="http://schemas.openxmlformats.org/drawingml/2006/main" xmlns:r="http://schemas.openxmlformats.org/officeDocument/2006/relationships" xmlns:p="http://schemas.openxmlformats.org/presentationml/2006/main">
   <p:cSld>
     <p:spTree>
       <p:nvGrpSpPr>
@@ -9314,7 +9175,14 @@
         <p:cNvGrpSpPr/>
         <p:nvPr/>
       </p:nvGrpSpPr>
-      <p:grpSpPr/>
+      <p:grpSpPr>
+        <a:xfrm>
+          <a:off x="0" y="0"/>
+          <a:ext cx="0" cy="0"/>
+          <a:chOff x="0" y="0"/>
+          <a:chExt cx="0" cy="0"/>
+        </a:xfrm>
+      </p:grpSpPr>
       <p:sp>
         <p:nvSpPr>
           <p:cNvPr id="2" name="Rectangle 1"/>
@@ -9355,6 +9223,7 @@
           <a:lstStyle/>
           <a:p>
             <a:pPr algn="ctr"/>
+            <a:endParaRPr/>
           </a:p>
         </p:txBody>
       </p:sp>
@@ -9375,7 +9244,7 @@
           <a:noFill/>
         </p:spPr>
         <p:txBody>
-          <a:bodyPr wrap="square" anchor="t" lIns="0" rIns="0" tIns="0" bIns="0">
+          <a:bodyPr wrap="square" lIns="0" tIns="0" rIns="0" bIns="0" anchor="t">
             <a:spAutoFit/>
           </a:bodyPr>
           <a:lstStyle/>
@@ -9437,6 +9306,7 @@
           <a:lstStyle/>
           <a:p>
             <a:pPr algn="ctr"/>
+            <a:endParaRPr/>
           </a:p>
         </p:txBody>
       </p:sp>
@@ -9457,7 +9327,7 @@
           <a:noFill/>
         </p:spPr>
         <p:txBody>
-          <a:bodyPr wrap="square" anchor="t" lIns="0" rIns="0" tIns="0" bIns="0">
+          <a:bodyPr wrap="square" lIns="0" tIns="0" rIns="0" bIns="0" anchor="t">
             <a:spAutoFit/>
           </a:bodyPr>
           <a:lstStyle/>
@@ -9521,6 +9391,7 @@
           <a:lstStyle/>
           <a:p>
             <a:pPr algn="ctr"/>
+            <a:endParaRPr/>
           </a:p>
         </p:txBody>
       </p:sp>
@@ -9566,6 +9437,7 @@
           <a:lstStyle/>
           <a:p>
             <a:pPr algn="ctr"/>
+            <a:endParaRPr/>
           </a:p>
         </p:txBody>
       </p:sp>
@@ -9586,7 +9458,7 @@
           <a:noFill/>
         </p:spPr>
         <p:txBody>
-          <a:bodyPr wrap="square" anchor="t" lIns="0" rIns="0" tIns="0" bIns="0">
+          <a:bodyPr wrap="square" lIns="0" tIns="0" rIns="0" bIns="0" anchor="t">
             <a:spAutoFit/>
           </a:bodyPr>
           <a:lstStyle/>
@@ -9650,6 +9522,7 @@
           <a:lstStyle/>
           <a:p>
             <a:pPr algn="ctr"/>
+            <a:endParaRPr/>
           </a:p>
         </p:txBody>
       </p:sp>
@@ -9670,7 +9543,7 @@
           <a:noFill/>
         </p:spPr>
         <p:txBody>
-          <a:bodyPr wrap="square" anchor="t" lIns="0" rIns="0" tIns="0" bIns="0">
+          <a:bodyPr wrap="square" lIns="0" tIns="0" rIns="0" bIns="0" anchor="t">
             <a:spAutoFit/>
           </a:bodyPr>
           <a:lstStyle/>
@@ -9734,6 +9607,7 @@
           <a:lstStyle/>
           <a:p>
             <a:pPr algn="ctr"/>
+            <a:endParaRPr/>
           </a:p>
         </p:txBody>
       </p:sp>
@@ -9754,7 +9628,7 @@
           <a:noFill/>
         </p:spPr>
         <p:txBody>
-          <a:bodyPr wrap="square" anchor="t" lIns="0" rIns="0" tIns="0" bIns="0">
+          <a:bodyPr wrap="square" lIns="0" tIns="0" rIns="0" bIns="0" anchor="t">
             <a:spAutoFit/>
           </a:bodyPr>
           <a:lstStyle/>
@@ -9818,6 +9692,7 @@
           <a:lstStyle/>
           <a:p>
             <a:pPr algn="ctr"/>
+            <a:endParaRPr/>
           </a:p>
         </p:txBody>
       </p:sp>
@@ -9838,7 +9713,7 @@
           <a:noFill/>
         </p:spPr>
         <p:txBody>
-          <a:bodyPr wrap="square" anchor="t" lIns="0" rIns="0" tIns="0" bIns="0">
+          <a:bodyPr wrap="square" lIns="0" tIns="0" rIns="0" bIns="0" anchor="t">
             <a:spAutoFit/>
           </a:bodyPr>
           <a:lstStyle/>
@@ -9902,6 +9777,7 @@
           <a:lstStyle/>
           <a:p>
             <a:pPr algn="ctr"/>
+            <a:endParaRPr/>
           </a:p>
         </p:txBody>
       </p:sp>
@@ -9922,7 +9798,7 @@
           <a:noFill/>
         </p:spPr>
         <p:txBody>
-          <a:bodyPr wrap="square" anchor="t" lIns="0" rIns="0" tIns="0" bIns="0">
+          <a:bodyPr wrap="square" lIns="0" tIns="0" rIns="0" bIns="0" anchor="t">
             <a:spAutoFit/>
           </a:bodyPr>
           <a:lstStyle/>
@@ -9961,7 +9837,7 @@
           <a:noFill/>
         </p:spPr>
         <p:txBody>
-          <a:bodyPr wrap="square" anchor="t" lIns="0" rIns="0" tIns="0" bIns="0">
+          <a:bodyPr wrap="square" lIns="0" tIns="0" rIns="0" bIns="0" anchor="t">
             <a:spAutoFit/>
           </a:bodyPr>
           <a:lstStyle/>
@@ -10008,7 +9884,7 @@
 </file>
 
 <file path=ppt/slides/slide16.xml><?xml version="1.0" encoding="utf-8"?>
-<p:sld xmlns:a="http://schemas.openxmlformats.org/drawingml/2006/main" xmlns:p="http://schemas.openxmlformats.org/presentationml/2006/main" xmlns:r="http://schemas.openxmlformats.org/officeDocument/2006/relationships">
+<p:sld xmlns:a="http://schemas.openxmlformats.org/drawingml/2006/main" xmlns:r="http://schemas.openxmlformats.org/officeDocument/2006/relationships" xmlns:p="http://schemas.openxmlformats.org/presentationml/2006/main">
   <p:cSld>
     <p:spTree>
       <p:nvGrpSpPr>
@@ -10016,7 +9892,14 @@
         <p:cNvGrpSpPr/>
         <p:nvPr/>
       </p:nvGrpSpPr>
-      <p:grpSpPr/>
+      <p:grpSpPr>
+        <a:xfrm>
+          <a:off x="0" y="0"/>
+          <a:ext cx="0" cy="0"/>
+          <a:chOff x="0" y="0"/>
+          <a:chExt cx="0" cy="0"/>
+        </a:xfrm>
+      </p:grpSpPr>
       <p:sp>
         <p:nvSpPr>
           <p:cNvPr id="2" name="Rectangle 1"/>
@@ -10057,6 +9940,7 @@
           <a:lstStyle/>
           <a:p>
             <a:pPr algn="ctr"/>
+            <a:endParaRPr/>
           </a:p>
         </p:txBody>
       </p:sp>
@@ -10077,7 +9961,7 @@
           <a:noFill/>
         </p:spPr>
         <p:txBody>
-          <a:bodyPr wrap="square" anchor="t" lIns="0" rIns="0" tIns="0" bIns="0">
+          <a:bodyPr wrap="square" lIns="0" tIns="0" rIns="0" bIns="0" anchor="t">
             <a:spAutoFit/>
           </a:bodyPr>
           <a:lstStyle/>
@@ -10139,6 +10023,7 @@
           <a:lstStyle/>
           <a:p>
             <a:pPr algn="ctr"/>
+            <a:endParaRPr/>
           </a:p>
         </p:txBody>
       </p:sp>
@@ -10159,7 +10044,7 @@
           <a:noFill/>
         </p:spPr>
         <p:txBody>
-          <a:bodyPr wrap="square" anchor="t" lIns="0" rIns="0" tIns="0" bIns="0">
+          <a:bodyPr wrap="square" lIns="0" tIns="0" rIns="0" bIns="0" anchor="t">
             <a:spAutoFit/>
           </a:bodyPr>
           <a:lstStyle/>
@@ -10221,6 +10106,7 @@
           <a:lstStyle/>
           <a:p>
             <a:pPr algn="ctr"/>
+            <a:endParaRPr/>
           </a:p>
         </p:txBody>
       </p:sp>
@@ -10241,7 +10127,7 @@
           <a:noFill/>
         </p:spPr>
         <p:txBody>
-          <a:bodyPr wrap="square" anchor="t" lIns="0" rIns="0" tIns="0" bIns="0">
+          <a:bodyPr wrap="square" lIns="0" tIns="0" rIns="0" bIns="0" anchor="t">
             <a:spAutoFit/>
           </a:bodyPr>
           <a:lstStyle/>
@@ -10280,7 +10166,7 @@
           <a:noFill/>
         </p:spPr>
         <p:txBody>
-          <a:bodyPr wrap="square" anchor="t" lIns="0" rIns="0" tIns="0" bIns="0">
+          <a:bodyPr wrap="square" lIns="0" tIns="0" rIns="0" bIns="0" anchor="t">
             <a:spAutoFit/>
           </a:bodyPr>
           <a:lstStyle/>
@@ -10342,6 +10228,7 @@
           <a:lstStyle/>
           <a:p>
             <a:pPr algn="ctr"/>
+            <a:endParaRPr/>
           </a:p>
         </p:txBody>
       </p:sp>
@@ -10362,7 +10249,7 @@
           <a:noFill/>
         </p:spPr>
         <p:txBody>
-          <a:bodyPr wrap="square" anchor="t" lIns="0" rIns="0" tIns="0" bIns="0">
+          <a:bodyPr wrap="square" lIns="0" tIns="0" rIns="0" bIns="0" anchor="t">
             <a:spAutoFit/>
           </a:bodyPr>
           <a:lstStyle/>
@@ -10401,7 +10288,7 @@
           <a:noFill/>
         </p:spPr>
         <p:txBody>
-          <a:bodyPr wrap="square" anchor="t" lIns="0" rIns="0" tIns="0" bIns="0">
+          <a:bodyPr wrap="square" lIns="0" tIns="0" rIns="0" bIns="0" anchor="t">
             <a:spAutoFit/>
           </a:bodyPr>
           <a:lstStyle/>
@@ -10463,6 +10350,7 @@
           <a:lstStyle/>
           <a:p>
             <a:pPr algn="ctr"/>
+            <a:endParaRPr/>
           </a:p>
         </p:txBody>
       </p:sp>
@@ -10483,7 +10371,7 @@
           <a:noFill/>
         </p:spPr>
         <p:txBody>
-          <a:bodyPr wrap="square" anchor="t" lIns="0" rIns="0" tIns="0" bIns="0">
+          <a:bodyPr wrap="square" lIns="0" tIns="0" rIns="0" bIns="0" anchor="t">
             <a:spAutoFit/>
           </a:bodyPr>
           <a:lstStyle/>
@@ -10522,7 +10410,7 @@
           <a:noFill/>
         </p:spPr>
         <p:txBody>
-          <a:bodyPr wrap="square" anchor="t" lIns="0" rIns="0" tIns="0" bIns="0">
+          <a:bodyPr wrap="square" lIns="0" tIns="0" rIns="0" bIns="0" anchor="t">
             <a:spAutoFit/>
           </a:bodyPr>
           <a:lstStyle/>
@@ -10584,6 +10472,7 @@
           <a:lstStyle/>
           <a:p>
             <a:pPr algn="ctr"/>
+            <a:endParaRPr/>
           </a:p>
         </p:txBody>
       </p:sp>
@@ -10604,7 +10493,7 @@
           <a:noFill/>
         </p:spPr>
         <p:txBody>
-          <a:bodyPr wrap="square" anchor="t" lIns="0" rIns="0" tIns="0" bIns="0">
+          <a:bodyPr wrap="square" lIns="0" tIns="0" rIns="0" bIns="0" anchor="t">
             <a:spAutoFit/>
           </a:bodyPr>
           <a:lstStyle/>
@@ -10643,7 +10532,7 @@
           <a:noFill/>
         </p:spPr>
         <p:txBody>
-          <a:bodyPr wrap="square" anchor="t" lIns="0" rIns="0" tIns="0" bIns="0">
+          <a:bodyPr wrap="square" lIns="0" tIns="0" rIns="0" bIns="0" anchor="t">
             <a:spAutoFit/>
           </a:bodyPr>
           <a:lstStyle/>
@@ -10705,6 +10594,7 @@
           <a:lstStyle/>
           <a:p>
             <a:pPr algn="ctr"/>
+            <a:endParaRPr/>
           </a:p>
         </p:txBody>
       </p:sp>
@@ -10725,7 +10615,7 @@
           <a:noFill/>
         </p:spPr>
         <p:txBody>
-          <a:bodyPr wrap="square" anchor="t" lIns="0" rIns="0" tIns="0" bIns="0">
+          <a:bodyPr wrap="square" lIns="0" tIns="0" rIns="0" bIns="0" anchor="t">
             <a:spAutoFit/>
           </a:bodyPr>
           <a:lstStyle/>
@@ -10764,7 +10654,7 @@
           <a:noFill/>
         </p:spPr>
         <p:txBody>
-          <a:bodyPr wrap="square" anchor="t" lIns="0" rIns="0" tIns="0" bIns="0">
+          <a:bodyPr wrap="square" lIns="0" tIns="0" rIns="0" bIns="0" anchor="t">
             <a:spAutoFit/>
           </a:bodyPr>
           <a:lstStyle/>
@@ -10826,6 +10716,7 @@
           <a:lstStyle/>
           <a:p>
             <a:pPr algn="ctr"/>
+            <a:endParaRPr/>
           </a:p>
         </p:txBody>
       </p:sp>
@@ -10846,7 +10737,7 @@
           <a:noFill/>
         </p:spPr>
         <p:txBody>
-          <a:bodyPr wrap="square" anchor="t" lIns="0" rIns="0" tIns="0" bIns="0">
+          <a:bodyPr wrap="square" lIns="0" tIns="0" rIns="0" bIns="0" anchor="t">
             <a:spAutoFit/>
           </a:bodyPr>
           <a:lstStyle/>
@@ -10877,7 +10768,7 @@
 </file>
 
 <file path=ppt/slides/slide17.xml><?xml version="1.0" encoding="utf-8"?>
-<p:sld xmlns:a="http://schemas.openxmlformats.org/drawingml/2006/main" xmlns:p="http://schemas.openxmlformats.org/presentationml/2006/main" xmlns:r="http://schemas.openxmlformats.org/officeDocument/2006/relationships">
+<p:sld xmlns:a="http://schemas.openxmlformats.org/drawingml/2006/main" xmlns:r="http://schemas.openxmlformats.org/officeDocument/2006/relationships" xmlns:p="http://schemas.openxmlformats.org/presentationml/2006/main">
   <p:cSld>
     <p:spTree>
       <p:nvGrpSpPr>
@@ -10885,7 +10776,14 @@
         <p:cNvGrpSpPr/>
         <p:nvPr/>
       </p:nvGrpSpPr>
-      <p:grpSpPr/>
+      <p:grpSpPr>
+        <a:xfrm>
+          <a:off x="0" y="0"/>
+          <a:ext cx="0" cy="0"/>
+          <a:chOff x="0" y="0"/>
+          <a:chExt cx="0" cy="0"/>
+        </a:xfrm>
+      </p:grpSpPr>
       <p:sp>
         <p:nvSpPr>
           <p:cNvPr id="2" name="Rectangle 1"/>
@@ -10926,6 +10824,7 @@
           <a:lstStyle/>
           <a:p>
             <a:pPr algn="ctr"/>
+            <a:endParaRPr/>
           </a:p>
         </p:txBody>
       </p:sp>
@@ -10946,7 +10845,7 @@
           <a:noFill/>
         </p:spPr>
         <p:txBody>
-          <a:bodyPr wrap="square" anchor="t" lIns="0" rIns="0" tIns="0" bIns="0">
+          <a:bodyPr wrap="square" lIns="0" tIns="0" rIns="0" bIns="0" anchor="t">
             <a:spAutoFit/>
           </a:bodyPr>
           <a:lstStyle/>
@@ -11008,6 +10907,7 @@
           <a:lstStyle/>
           <a:p>
             <a:pPr algn="ctr"/>
+            <a:endParaRPr/>
           </a:p>
         </p:txBody>
       </p:sp>
@@ -11028,7 +10928,7 @@
           <a:noFill/>
         </p:spPr>
         <p:txBody>
-          <a:bodyPr wrap="square" anchor="t" lIns="0" rIns="0" tIns="0" bIns="0">
+          <a:bodyPr wrap="square" lIns="0" tIns="0" rIns="0" bIns="0" anchor="t">
             <a:spAutoFit/>
           </a:bodyPr>
           <a:lstStyle/>
@@ -11092,6 +10992,7 @@
           <a:lstStyle/>
           <a:p>
             <a:pPr algn="ctr"/>
+            <a:endParaRPr/>
           </a:p>
         </p:txBody>
       </p:sp>
@@ -11112,7 +11013,7 @@
           <a:noFill/>
         </p:spPr>
         <p:txBody>
-          <a:bodyPr wrap="square" anchor="t" lIns="0" rIns="0" tIns="0" bIns="0">
+          <a:bodyPr wrap="square" lIns="0" tIns="0" rIns="0" bIns="0" anchor="t">
             <a:spAutoFit/>
           </a:bodyPr>
           <a:lstStyle/>
@@ -11174,6 +11075,7 @@
           <a:lstStyle/>
           <a:p>
             <a:pPr algn="ctr"/>
+            <a:endParaRPr/>
           </a:p>
         </p:txBody>
       </p:sp>
@@ -11194,7 +11096,7 @@
           <a:noFill/>
         </p:spPr>
         <p:txBody>
-          <a:bodyPr wrap="square" anchor="t" lIns="0" rIns="0" tIns="0" bIns="0">
+          <a:bodyPr wrap="square" lIns="0" tIns="0" rIns="0" bIns="0" anchor="t">
             <a:spAutoFit/>
           </a:bodyPr>
           <a:lstStyle/>
@@ -11258,6 +11160,7 @@
           <a:lstStyle/>
           <a:p>
             <a:pPr algn="ctr"/>
+            <a:endParaRPr/>
           </a:p>
         </p:txBody>
       </p:sp>
@@ -11278,7 +11181,7 @@
           <a:noFill/>
         </p:spPr>
         <p:txBody>
-          <a:bodyPr wrap="square" anchor="t" lIns="0" rIns="0" tIns="0" bIns="0">
+          <a:bodyPr wrap="square" lIns="0" tIns="0" rIns="0" bIns="0" anchor="t">
             <a:spAutoFit/>
           </a:bodyPr>
           <a:lstStyle/>
@@ -11340,6 +11243,7 @@
           <a:lstStyle/>
           <a:p>
             <a:pPr algn="ctr"/>
+            <a:endParaRPr/>
           </a:p>
         </p:txBody>
       </p:sp>
@@ -11360,7 +11264,7 @@
           <a:noFill/>
         </p:spPr>
         <p:txBody>
-          <a:bodyPr wrap="square" anchor="t" lIns="0" rIns="0" tIns="0" bIns="0">
+          <a:bodyPr wrap="square" lIns="0" tIns="0" rIns="0" bIns="0" anchor="t">
             <a:spAutoFit/>
           </a:bodyPr>
           <a:lstStyle/>
@@ -11424,6 +11328,7 @@
           <a:lstStyle/>
           <a:p>
             <a:pPr algn="ctr"/>
+            <a:endParaRPr/>
           </a:p>
         </p:txBody>
       </p:sp>
@@ -11444,7 +11349,7 @@
           <a:noFill/>
         </p:spPr>
         <p:txBody>
-          <a:bodyPr wrap="square" anchor="t" lIns="0" rIns="0" tIns="0" bIns="0">
+          <a:bodyPr wrap="square" lIns="0" tIns="0" rIns="0" bIns="0" anchor="t">
             <a:spAutoFit/>
           </a:bodyPr>
           <a:lstStyle/>
@@ -11491,7 +11396,7 @@
 </file>
 
 <file path=ppt/slides/slide18.xml><?xml version="1.0" encoding="utf-8"?>
-<p:sld xmlns:a="http://schemas.openxmlformats.org/drawingml/2006/main" xmlns:p="http://schemas.openxmlformats.org/presentationml/2006/main" xmlns:r="http://schemas.openxmlformats.org/officeDocument/2006/relationships">
+<p:sld xmlns:a="http://schemas.openxmlformats.org/drawingml/2006/main" xmlns:r="http://schemas.openxmlformats.org/officeDocument/2006/relationships" xmlns:p="http://schemas.openxmlformats.org/presentationml/2006/main">
   <p:cSld>
     <p:spTree>
       <p:nvGrpSpPr>
@@ -11499,7 +11404,14 @@
         <p:cNvGrpSpPr/>
         <p:nvPr/>
       </p:nvGrpSpPr>
-      <p:grpSpPr/>
+      <p:grpSpPr>
+        <a:xfrm>
+          <a:off x="0" y="0"/>
+          <a:ext cx="0" cy="0"/>
+          <a:chOff x="0" y="0"/>
+          <a:chExt cx="0" cy="0"/>
+        </a:xfrm>
+      </p:grpSpPr>
       <p:sp>
         <p:nvSpPr>
           <p:cNvPr id="2" name="Rectangle 1"/>
@@ -11540,6 +11452,7 @@
           <a:lstStyle/>
           <a:p>
             <a:pPr algn="ctr"/>
+            <a:endParaRPr/>
           </a:p>
         </p:txBody>
       </p:sp>
@@ -11560,7 +11473,7 @@
           <a:noFill/>
         </p:spPr>
         <p:txBody>
-          <a:bodyPr wrap="square" anchor="t" lIns="0" rIns="0" tIns="0" bIns="0">
+          <a:bodyPr wrap="square" lIns="0" tIns="0" rIns="0" bIns="0" anchor="t">
             <a:spAutoFit/>
           </a:bodyPr>
           <a:lstStyle/>
@@ -11622,6 +11535,7 @@
           <a:lstStyle/>
           <a:p>
             <a:pPr algn="ctr"/>
+            <a:endParaRPr/>
           </a:p>
         </p:txBody>
       </p:sp>
@@ -11642,7 +11556,7 @@
           <a:noFill/>
         </p:spPr>
         <p:txBody>
-          <a:bodyPr wrap="square" anchor="t" lIns="0" rIns="0" tIns="0" bIns="0">
+          <a:bodyPr wrap="square" lIns="0" tIns="0" rIns="0" bIns="0" anchor="t">
             <a:spAutoFit/>
           </a:bodyPr>
           <a:lstStyle/>
@@ -11704,6 +11618,7 @@
           <a:lstStyle/>
           <a:p>
             <a:pPr algn="ctr"/>
+            <a:endParaRPr/>
           </a:p>
         </p:txBody>
       </p:sp>
@@ -11724,7 +11639,7 @@
           <a:noFill/>
         </p:spPr>
         <p:txBody>
-          <a:bodyPr wrap="square" anchor="t" lIns="0" rIns="0" tIns="0" bIns="0">
+          <a:bodyPr wrap="square" lIns="0" tIns="0" rIns="0" bIns="0" anchor="t">
             <a:spAutoFit/>
           </a:bodyPr>
           <a:lstStyle/>
@@ -11763,7 +11678,7 @@
           <a:noFill/>
         </p:spPr>
         <p:txBody>
-          <a:bodyPr wrap="square" anchor="t" lIns="0" rIns="0" tIns="0" bIns="0">
+          <a:bodyPr wrap="square" lIns="0" tIns="0" rIns="0" bIns="0" anchor="t">
             <a:spAutoFit/>
           </a:bodyPr>
           <a:lstStyle/>
@@ -11802,7 +11717,7 @@
           <a:noFill/>
         </p:spPr>
         <p:txBody>
-          <a:bodyPr wrap="square" anchor="t" lIns="0" rIns="0" tIns="0" bIns="0">
+          <a:bodyPr wrap="square" lIns="0" tIns="0" rIns="0" bIns="0" anchor="t">
             <a:spAutoFit/>
           </a:bodyPr>
           <a:lstStyle/>
@@ -11864,6 +11779,7 @@
           <a:lstStyle/>
           <a:p>
             <a:pPr algn="ctr"/>
+            <a:endParaRPr/>
           </a:p>
         </p:txBody>
       </p:sp>
@@ -11884,7 +11800,7 @@
           <a:noFill/>
         </p:spPr>
         <p:txBody>
-          <a:bodyPr wrap="square" anchor="t" lIns="0" rIns="0" tIns="0" bIns="0">
+          <a:bodyPr wrap="square" lIns="0" tIns="0" rIns="0" bIns="0" anchor="t">
             <a:spAutoFit/>
           </a:bodyPr>
           <a:lstStyle/>
@@ -11923,7 +11839,7 @@
           <a:noFill/>
         </p:spPr>
         <p:txBody>
-          <a:bodyPr wrap="square" anchor="t" lIns="0" rIns="0" tIns="0" bIns="0">
+          <a:bodyPr wrap="square" lIns="0" tIns="0" rIns="0" bIns="0" anchor="t">
             <a:spAutoFit/>
           </a:bodyPr>
           <a:lstStyle/>
@@ -11962,7 +11878,7 @@
           <a:noFill/>
         </p:spPr>
         <p:txBody>
-          <a:bodyPr wrap="square" anchor="t" lIns="0" rIns="0" tIns="0" bIns="0">
+          <a:bodyPr wrap="square" lIns="0" tIns="0" rIns="0" bIns="0" anchor="t">
             <a:spAutoFit/>
           </a:bodyPr>
           <a:lstStyle/>
@@ -12001,7 +11917,7 @@
           <a:noFill/>
         </p:spPr>
         <p:txBody>
-          <a:bodyPr wrap="square" anchor="t" lIns="0" rIns="0" tIns="0" bIns="0">
+          <a:bodyPr wrap="square" lIns="0" tIns="0" rIns="0" bIns="0" anchor="t">
             <a:spAutoFit/>
           </a:bodyPr>
           <a:lstStyle/>
@@ -12032,7 +11948,7 @@
 </file>
 
 <file path=ppt/slides/slide19.xml><?xml version="1.0" encoding="utf-8"?>
-<p:sld xmlns:a="http://schemas.openxmlformats.org/drawingml/2006/main" xmlns:p="http://schemas.openxmlformats.org/presentationml/2006/main" xmlns:r="http://schemas.openxmlformats.org/officeDocument/2006/relationships">
+<p:sld xmlns:a="http://schemas.openxmlformats.org/drawingml/2006/main" xmlns:r="http://schemas.openxmlformats.org/officeDocument/2006/relationships" xmlns:p="http://schemas.openxmlformats.org/presentationml/2006/main">
   <p:cSld>
     <p:spTree>
       <p:nvGrpSpPr>
@@ -12040,7 +11956,14 @@
         <p:cNvGrpSpPr/>
         <p:nvPr/>
       </p:nvGrpSpPr>
-      <p:grpSpPr/>
+      <p:grpSpPr>
+        <a:xfrm>
+          <a:off x="0" y="0"/>
+          <a:ext cx="0" cy="0"/>
+          <a:chOff x="0" y="0"/>
+          <a:chExt cx="0" cy="0"/>
+        </a:xfrm>
+      </p:grpSpPr>
       <p:sp>
         <p:nvSpPr>
           <p:cNvPr id="2" name="Rectangle 1"/>
@@ -12081,6 +12004,7 @@
           <a:lstStyle/>
           <a:p>
             <a:pPr algn="ctr"/>
+            <a:endParaRPr/>
           </a:p>
         </p:txBody>
       </p:sp>
@@ -12101,7 +12025,7 @@
           <a:noFill/>
         </p:spPr>
         <p:txBody>
-          <a:bodyPr wrap="square" anchor="t" lIns="0" rIns="0" tIns="0" bIns="0">
+          <a:bodyPr wrap="square" lIns="0" tIns="0" rIns="0" bIns="0" anchor="t">
             <a:spAutoFit/>
           </a:bodyPr>
           <a:lstStyle/>
@@ -12163,6 +12087,7 @@
           <a:lstStyle/>
           <a:p>
             <a:pPr algn="ctr"/>
+            <a:endParaRPr/>
           </a:p>
         </p:txBody>
       </p:sp>
@@ -12183,7 +12108,7 @@
           <a:noFill/>
         </p:spPr>
         <p:txBody>
-          <a:bodyPr wrap="square" anchor="t" lIns="0" rIns="0" tIns="0" bIns="0">
+          <a:bodyPr wrap="square" lIns="0" tIns="0" rIns="0" bIns="0" anchor="t">
             <a:spAutoFit/>
           </a:bodyPr>
           <a:lstStyle/>
@@ -12247,6 +12172,7 @@
           <a:lstStyle/>
           <a:p>
             <a:pPr algn="ctr"/>
+            <a:endParaRPr/>
           </a:p>
         </p:txBody>
       </p:sp>
@@ -12290,6 +12216,7 @@
           <a:lstStyle/>
           <a:p>
             <a:pPr algn="ctr"/>
+            <a:endParaRPr/>
           </a:p>
         </p:txBody>
       </p:sp>
@@ -12310,7 +12237,7 @@
           <a:noFill/>
         </p:spPr>
         <p:txBody>
-          <a:bodyPr wrap="square" anchor="t" lIns="0" rIns="0" tIns="0" bIns="0">
+          <a:bodyPr wrap="square" lIns="0" tIns="0" rIns="0" bIns="0" anchor="t">
             <a:spAutoFit/>
           </a:bodyPr>
           <a:lstStyle/>
@@ -12349,7 +12276,7 @@
           <a:noFill/>
         </p:spPr>
         <p:txBody>
-          <a:bodyPr wrap="square" anchor="t" lIns="0" rIns="0" tIns="0" bIns="0">
+          <a:bodyPr wrap="square" lIns="0" tIns="0" rIns="0" bIns="0" anchor="t">
             <a:spAutoFit/>
           </a:bodyPr>
           <a:lstStyle/>
@@ -12413,6 +12340,7 @@
           <a:lstStyle/>
           <a:p>
             <a:pPr algn="ctr"/>
+            <a:endParaRPr/>
           </a:p>
         </p:txBody>
       </p:sp>
@@ -12456,6 +12384,7 @@
           <a:lstStyle/>
           <a:p>
             <a:pPr algn="ctr"/>
+            <a:endParaRPr/>
           </a:p>
         </p:txBody>
       </p:sp>
@@ -12476,7 +12405,7 @@
           <a:noFill/>
         </p:spPr>
         <p:txBody>
-          <a:bodyPr wrap="square" anchor="t" lIns="0" rIns="0" tIns="0" bIns="0">
+          <a:bodyPr wrap="square" lIns="0" tIns="0" rIns="0" bIns="0" anchor="t">
             <a:spAutoFit/>
           </a:bodyPr>
           <a:lstStyle/>
@@ -12515,7 +12444,7 @@
           <a:noFill/>
         </p:spPr>
         <p:txBody>
-          <a:bodyPr wrap="square" anchor="t" lIns="0" rIns="0" tIns="0" bIns="0">
+          <a:bodyPr wrap="square" lIns="0" tIns="0" rIns="0" bIns="0" anchor="t">
             <a:spAutoFit/>
           </a:bodyPr>
           <a:lstStyle/>
@@ -12579,6 +12508,7 @@
           <a:lstStyle/>
           <a:p>
             <a:pPr algn="ctr"/>
+            <a:endParaRPr/>
           </a:p>
         </p:txBody>
       </p:sp>
@@ -12622,6 +12552,7 @@
           <a:lstStyle/>
           <a:p>
             <a:pPr algn="ctr"/>
+            <a:endParaRPr/>
           </a:p>
         </p:txBody>
       </p:sp>
@@ -12642,7 +12573,7 @@
           <a:noFill/>
         </p:spPr>
         <p:txBody>
-          <a:bodyPr wrap="square" anchor="t" lIns="0" rIns="0" tIns="0" bIns="0">
+          <a:bodyPr wrap="square" lIns="0" tIns="0" rIns="0" bIns="0" anchor="t">
             <a:spAutoFit/>
           </a:bodyPr>
           <a:lstStyle/>
@@ -12681,7 +12612,7 @@
           <a:noFill/>
         </p:spPr>
         <p:txBody>
-          <a:bodyPr wrap="square" anchor="t" lIns="0" rIns="0" tIns="0" bIns="0">
+          <a:bodyPr wrap="square" lIns="0" tIns="0" rIns="0" bIns="0" anchor="t">
             <a:spAutoFit/>
           </a:bodyPr>
           <a:lstStyle/>
@@ -12745,6 +12676,7 @@
           <a:lstStyle/>
           <a:p>
             <a:pPr algn="ctr"/>
+            <a:endParaRPr/>
           </a:p>
         </p:txBody>
       </p:sp>
@@ -12765,7 +12697,7 @@
           <a:noFill/>
         </p:spPr>
         <p:txBody>
-          <a:bodyPr wrap="square" anchor="t" lIns="0" rIns="0" tIns="0" bIns="0">
+          <a:bodyPr wrap="square" lIns="0" tIns="0" rIns="0" bIns="0" anchor="t">
             <a:spAutoFit/>
           </a:bodyPr>
           <a:lstStyle/>
@@ -12804,7 +12736,7 @@
           <a:noFill/>
         </p:spPr>
         <p:txBody>
-          <a:bodyPr wrap="square" anchor="t" lIns="0" rIns="0" tIns="0" bIns="0">
+          <a:bodyPr wrap="square" lIns="0" tIns="0" rIns="0" bIns="0" anchor="t">
             <a:spAutoFit/>
           </a:bodyPr>
           <a:lstStyle/>
@@ -12875,7 +12807,7 @@
           <a:noFill/>
         </p:spPr>
         <p:txBody>
-          <a:bodyPr wrap="square" anchor="t" lIns="0" rIns="0" tIns="0" bIns="0">
+          <a:bodyPr wrap="square" lIns="0" tIns="0" rIns="0" bIns="0" anchor="t">
             <a:spAutoFit/>
           </a:bodyPr>
           <a:lstStyle/>
@@ -12906,7 +12838,7 @@
 </file>
 
 <file path=ppt/slides/slide2.xml><?xml version="1.0" encoding="utf-8"?>
-<p:sld xmlns:a="http://schemas.openxmlformats.org/drawingml/2006/main" xmlns:p="http://schemas.openxmlformats.org/presentationml/2006/main" xmlns:r="http://schemas.openxmlformats.org/officeDocument/2006/relationships">
+<p:sld xmlns:a="http://schemas.openxmlformats.org/drawingml/2006/main" xmlns:r="http://schemas.openxmlformats.org/officeDocument/2006/relationships" xmlns:p="http://schemas.openxmlformats.org/presentationml/2006/main">
   <p:cSld>
     <p:spTree>
       <p:nvGrpSpPr>
@@ -12914,7 +12846,14 @@
         <p:cNvGrpSpPr/>
         <p:nvPr/>
       </p:nvGrpSpPr>
-      <p:grpSpPr/>
+      <p:grpSpPr>
+        <a:xfrm>
+          <a:off x="0" y="0"/>
+          <a:ext cx="0" cy="0"/>
+          <a:chOff x="0" y="0"/>
+          <a:chExt cx="0" cy="0"/>
+        </a:xfrm>
+      </p:grpSpPr>
       <p:sp>
         <p:nvSpPr>
           <p:cNvPr id="2" name="Rectangle 1"/>
@@ -12955,6 +12894,7 @@
           <a:lstStyle/>
           <a:p>
             <a:pPr algn="ctr"/>
+            <a:endParaRPr/>
           </a:p>
         </p:txBody>
       </p:sp>
@@ -12975,7 +12915,7 @@
           <a:noFill/>
         </p:spPr>
         <p:txBody>
-          <a:bodyPr wrap="square" anchor="t" lIns="0" rIns="0" tIns="0" bIns="0">
+          <a:bodyPr wrap="square" lIns="0" tIns="0" rIns="0" bIns="0" anchor="t">
             <a:spAutoFit/>
           </a:bodyPr>
           <a:lstStyle/>
@@ -13037,6 +12977,7 @@
           <a:lstStyle/>
           <a:p>
             <a:pPr algn="ctr"/>
+            <a:endParaRPr/>
           </a:p>
         </p:txBody>
       </p:sp>
@@ -13057,7 +12998,7 @@
           <a:noFill/>
         </p:spPr>
         <p:txBody>
-          <a:bodyPr wrap="square" anchor="t" lIns="0" rIns="0" tIns="0" bIns="0">
+          <a:bodyPr wrap="square" lIns="0" tIns="0" rIns="0" bIns="0" anchor="t">
             <a:spAutoFit/>
           </a:bodyPr>
           <a:lstStyle/>
@@ -13119,6 +13060,7 @@
           <a:lstStyle/>
           <a:p>
             <a:pPr algn="ctr"/>
+            <a:endParaRPr/>
           </a:p>
         </p:txBody>
       </p:sp>
@@ -13139,7 +13081,7 @@
           <a:noFill/>
         </p:spPr>
         <p:txBody>
-          <a:bodyPr wrap="square" anchor="t" lIns="0" rIns="0" tIns="0" bIns="0">
+          <a:bodyPr wrap="square" lIns="0" tIns="0" rIns="0" bIns="0" anchor="t">
             <a:spAutoFit/>
           </a:bodyPr>
           <a:lstStyle/>
@@ -13165,6 +13107,19 @@
                 <a:spcPct val="135000"/>
               </a:lnSpc>
             </a:pPr>
+            <a:endParaRPr sz="1150" b="0">
+              <a:solidFill>
+                <a:srgbClr val="F3D230"/>
+              </a:solidFill>
+              <a:latin typeface="Source Code Pro"/>
+            </a:endParaRPr>
+          </a:p>
+          <a:p>
+            <a:pPr algn="l">
+              <a:lnSpc>
+                <a:spcPct val="135000"/>
+              </a:lnSpc>
+            </a:pPr>
             <a:r>
               <a:rPr sz="1150" b="0">
                 <a:solidFill>
@@ -13172,7 +13127,7 @@
                 </a:solidFill>
                 <a:latin typeface="Source Code Pro"/>
               </a:rPr>
-              <a:t/>
+              <a:t>Round 2  "While the LED is on, the buzzer beeps; when the LED is off, stop."</a:t>
             </a:r>
           </a:p>
           <a:p>
@@ -13181,31 +13136,12 @@
                 <a:spcPct val="135000"/>
               </a:lnSpc>
             </a:pPr>
-            <a:r>
-              <a:rPr sz="1150" b="0">
-                <a:solidFill>
-                  <a:srgbClr val="F3D230"/>
-                </a:solidFill>
-                <a:latin typeface="Source Code Pro"/>
-              </a:rPr>
-              <a:t>Round 2  "While the LED is on, the buzzer beeps; when the LED is off, stop."</a:t>
-            </a:r>
-          </a:p>
-          <a:p>
-            <a:pPr algn="l">
-              <a:lnSpc>
-                <a:spcPct val="135000"/>
-              </a:lnSpc>
-            </a:pPr>
-            <a:r>
-              <a:rPr sz="1150" b="0">
-                <a:solidFill>
-                  <a:srgbClr val="F3D230"/>
-                </a:solidFill>
-                <a:latin typeface="Source Code Pro"/>
-              </a:rPr>
-              <a:t/>
-            </a:r>
+            <a:endParaRPr sz="1150" b="0">
+              <a:solidFill>
+                <a:srgbClr val="F3D230"/>
+              </a:solidFill>
+              <a:latin typeface="Source Code Pro"/>
+            </a:endParaRPr>
           </a:p>
           <a:p>
             <a:pPr algn="l">
@@ -13242,7 +13178,7 @@
           <a:noFill/>
         </p:spPr>
         <p:txBody>
-          <a:bodyPr wrap="square" anchor="t" lIns="0" rIns="0" tIns="0" bIns="0">
+          <a:bodyPr wrap="square" lIns="0" tIns="0" rIns="0" bIns="0" anchor="t">
             <a:spAutoFit/>
           </a:bodyPr>
           <a:lstStyle/>
@@ -13281,7 +13217,7 @@
           <a:noFill/>
         </p:spPr>
         <p:txBody>
-          <a:bodyPr wrap="square" anchor="t" lIns="0" rIns="0" tIns="0" bIns="0">
+          <a:bodyPr wrap="square" lIns="0" tIns="0" rIns="0" bIns="0" anchor="t">
             <a:spAutoFit/>
           </a:bodyPr>
           <a:lstStyle/>
@@ -13312,7 +13248,7 @@
 </file>
 
 <file path=ppt/slides/slide20.xml><?xml version="1.0" encoding="utf-8"?>
-<p:sld xmlns:a="http://schemas.openxmlformats.org/drawingml/2006/main" xmlns:p="http://schemas.openxmlformats.org/presentationml/2006/main" xmlns:r="http://schemas.openxmlformats.org/officeDocument/2006/relationships">
+<p:sld xmlns:a="http://schemas.openxmlformats.org/drawingml/2006/main" xmlns:r="http://schemas.openxmlformats.org/officeDocument/2006/relationships" xmlns:p="http://schemas.openxmlformats.org/presentationml/2006/main">
   <p:cSld>
     <p:spTree>
       <p:nvGrpSpPr>
@@ -13320,7 +13256,14 @@
         <p:cNvGrpSpPr/>
         <p:nvPr/>
       </p:nvGrpSpPr>
-      <p:grpSpPr/>
+      <p:grpSpPr>
+        <a:xfrm>
+          <a:off x="0" y="0"/>
+          <a:ext cx="0" cy="0"/>
+          <a:chOff x="0" y="0"/>
+          <a:chExt cx="0" cy="0"/>
+        </a:xfrm>
+      </p:grpSpPr>
       <p:sp>
         <p:nvSpPr>
           <p:cNvPr id="2" name="Rectangle 1"/>
@@ -13361,6 +13304,7 @@
           <a:lstStyle/>
           <a:p>
             <a:pPr algn="ctr"/>
+            <a:endParaRPr/>
           </a:p>
         </p:txBody>
       </p:sp>
@@ -13381,7 +13325,7 @@
           <a:noFill/>
         </p:spPr>
         <p:txBody>
-          <a:bodyPr wrap="square" anchor="t" lIns="0" rIns="0" tIns="0" bIns="0">
+          <a:bodyPr wrap="square" lIns="0" tIns="0" rIns="0" bIns="0" anchor="t">
             <a:spAutoFit/>
           </a:bodyPr>
           <a:lstStyle/>
@@ -13443,6 +13387,7 @@
           <a:lstStyle/>
           <a:p>
             <a:pPr algn="ctr"/>
+            <a:endParaRPr/>
           </a:p>
         </p:txBody>
       </p:sp>
@@ -13463,7 +13408,7 @@
           <a:noFill/>
         </p:spPr>
         <p:txBody>
-          <a:bodyPr wrap="square" anchor="t" lIns="0" rIns="0" tIns="0" bIns="0">
+          <a:bodyPr wrap="square" lIns="0" tIns="0" rIns="0" bIns="0" anchor="t">
             <a:spAutoFit/>
           </a:bodyPr>
           <a:lstStyle/>
@@ -13502,7 +13447,7 @@
           <a:noFill/>
         </p:spPr>
         <p:txBody>
-          <a:bodyPr wrap="square" anchor="t" lIns="0" rIns="0" tIns="0" bIns="0">
+          <a:bodyPr wrap="square" lIns="0" tIns="0" rIns="0" bIns="0" anchor="t">
             <a:spAutoFit/>
           </a:bodyPr>
           <a:lstStyle/>
@@ -13580,6 +13525,7 @@
           <a:lstStyle/>
           <a:p>
             <a:pPr algn="ctr"/>
+            <a:endParaRPr/>
           </a:p>
         </p:txBody>
       </p:sp>
@@ -13600,7 +13546,7 @@
           <a:noFill/>
         </p:spPr>
         <p:txBody>
-          <a:bodyPr wrap="square" anchor="t" lIns="0" rIns="0" tIns="0" bIns="0">
+          <a:bodyPr wrap="square" lIns="0" tIns="0" rIns="0" bIns="0" anchor="t">
             <a:spAutoFit/>
           </a:bodyPr>
           <a:lstStyle/>
@@ -13631,7 +13577,7 @@
 </file>
 
 <file path=ppt/slides/slide21.xml><?xml version="1.0" encoding="utf-8"?>
-<p:sld xmlns:a="http://schemas.openxmlformats.org/drawingml/2006/main" xmlns:p="http://schemas.openxmlformats.org/presentationml/2006/main" xmlns:r="http://schemas.openxmlformats.org/officeDocument/2006/relationships">
+<p:sld xmlns:a="http://schemas.openxmlformats.org/drawingml/2006/main" xmlns:r="http://schemas.openxmlformats.org/officeDocument/2006/relationships" xmlns:p="http://schemas.openxmlformats.org/presentationml/2006/main">
   <p:cSld>
     <p:spTree>
       <p:nvGrpSpPr>
@@ -13639,7 +13585,14 @@
         <p:cNvGrpSpPr/>
         <p:nvPr/>
       </p:nvGrpSpPr>
-      <p:grpSpPr/>
+      <p:grpSpPr>
+        <a:xfrm>
+          <a:off x="0" y="0"/>
+          <a:ext cx="0" cy="0"/>
+          <a:chOff x="0" y="0"/>
+          <a:chExt cx="0" cy="0"/>
+        </a:xfrm>
+      </p:grpSpPr>
       <p:sp>
         <p:nvSpPr>
           <p:cNvPr id="2" name="Rectangle 1"/>
@@ -13680,6 +13633,7 @@
           <a:lstStyle/>
           <a:p>
             <a:pPr algn="ctr"/>
+            <a:endParaRPr/>
           </a:p>
         </p:txBody>
       </p:sp>
@@ -13700,7 +13654,7 @@
           <a:noFill/>
         </p:spPr>
         <p:txBody>
-          <a:bodyPr wrap="square" anchor="t" lIns="0" rIns="0" tIns="0" bIns="0">
+          <a:bodyPr wrap="square" lIns="0" tIns="0" rIns="0" bIns="0" anchor="t">
             <a:spAutoFit/>
           </a:bodyPr>
           <a:lstStyle/>
@@ -13762,6 +13716,7 @@
           <a:lstStyle/>
           <a:p>
             <a:pPr algn="ctr"/>
+            <a:endParaRPr/>
           </a:p>
         </p:txBody>
       </p:sp>
@@ -13782,7 +13737,7 @@
           <a:noFill/>
         </p:spPr>
         <p:txBody>
-          <a:bodyPr wrap="square" anchor="t" lIns="0" rIns="0" tIns="0" bIns="0">
+          <a:bodyPr wrap="square" lIns="0" tIns="0" rIns="0" bIns="0" anchor="t">
             <a:spAutoFit/>
           </a:bodyPr>
           <a:lstStyle/>
@@ -13821,7 +13776,7 @@
           <a:noFill/>
         </p:spPr>
         <p:txBody>
-          <a:bodyPr wrap="square" anchor="t" lIns="0" rIns="0" tIns="0" bIns="0">
+          <a:bodyPr wrap="square" lIns="0" tIns="0" rIns="0" bIns="0" anchor="t">
             <a:spAutoFit/>
           </a:bodyPr>
           <a:lstStyle/>
@@ -13885,6 +13840,7 @@
           <a:lstStyle/>
           <a:p>
             <a:pPr algn="ctr"/>
+            <a:endParaRPr/>
           </a:p>
         </p:txBody>
       </p:sp>
@@ -13905,7 +13861,7 @@
           <a:noFill/>
         </p:spPr>
         <p:txBody>
-          <a:bodyPr wrap="square" anchor="t" lIns="0" rIns="0" tIns="0" bIns="0">
+          <a:bodyPr wrap="square" lIns="0" tIns="0" rIns="0" bIns="0" anchor="t">
             <a:spAutoFit/>
           </a:bodyPr>
           <a:lstStyle/>
@@ -13969,6 +13925,7 @@
           <a:lstStyle/>
           <a:p>
             <a:pPr algn="ctr"/>
+            <a:endParaRPr/>
           </a:p>
         </p:txBody>
       </p:sp>
@@ -13989,7 +13946,7 @@
           <a:noFill/>
         </p:spPr>
         <p:txBody>
-          <a:bodyPr wrap="square" anchor="t" lIns="0" rIns="0" tIns="0" bIns="0">
+          <a:bodyPr wrap="square" lIns="0" tIns="0" rIns="0" bIns="0" anchor="t">
             <a:spAutoFit/>
           </a:bodyPr>
           <a:lstStyle/>
@@ -14053,6 +14010,7 @@
           <a:lstStyle/>
           <a:p>
             <a:pPr algn="ctr"/>
+            <a:endParaRPr/>
           </a:p>
         </p:txBody>
       </p:sp>
@@ -14073,7 +14031,7 @@
           <a:noFill/>
         </p:spPr>
         <p:txBody>
-          <a:bodyPr wrap="square" anchor="t" lIns="0" rIns="0" tIns="0" bIns="0">
+          <a:bodyPr wrap="square" lIns="0" tIns="0" rIns="0" bIns="0" anchor="t">
             <a:spAutoFit/>
           </a:bodyPr>
           <a:lstStyle/>
@@ -14135,6 +14093,7 @@
           <a:lstStyle/>
           <a:p>
             <a:pPr algn="ctr"/>
+            <a:endParaRPr/>
           </a:p>
         </p:txBody>
       </p:sp>
@@ -14155,7 +14114,7 @@
           <a:noFill/>
         </p:spPr>
         <p:txBody>
-          <a:bodyPr wrap="square" anchor="t" lIns="0" rIns="0" tIns="0" bIns="0">
+          <a:bodyPr wrap="square" lIns="0" tIns="0" rIns="0" bIns="0" anchor="t">
             <a:spAutoFit/>
           </a:bodyPr>
           <a:lstStyle/>
@@ -14186,7 +14145,7 @@
 </file>
 
 <file path=ppt/slides/slide22.xml><?xml version="1.0" encoding="utf-8"?>
-<p:sld xmlns:a="http://schemas.openxmlformats.org/drawingml/2006/main" xmlns:p="http://schemas.openxmlformats.org/presentationml/2006/main" xmlns:r="http://schemas.openxmlformats.org/officeDocument/2006/relationships">
+<p:sld xmlns:a="http://schemas.openxmlformats.org/drawingml/2006/main" xmlns:r="http://schemas.openxmlformats.org/officeDocument/2006/relationships" xmlns:p="http://schemas.openxmlformats.org/presentationml/2006/main">
   <p:cSld>
     <p:spTree>
       <p:nvGrpSpPr>
@@ -14194,7 +14153,14 @@
         <p:cNvGrpSpPr/>
         <p:nvPr/>
       </p:nvGrpSpPr>
-      <p:grpSpPr/>
+      <p:grpSpPr>
+        <a:xfrm>
+          <a:off x="0" y="0"/>
+          <a:ext cx="0" cy="0"/>
+          <a:chOff x="0" y="0"/>
+          <a:chExt cx="0" cy="0"/>
+        </a:xfrm>
+      </p:grpSpPr>
       <p:sp>
         <p:nvSpPr>
           <p:cNvPr id="2" name="Rectangle 1"/>
@@ -14235,6 +14201,7 @@
           <a:lstStyle/>
           <a:p>
             <a:pPr algn="ctr"/>
+            <a:endParaRPr/>
           </a:p>
         </p:txBody>
       </p:sp>
@@ -14255,7 +14222,7 @@
           <a:noFill/>
         </p:spPr>
         <p:txBody>
-          <a:bodyPr wrap="square" anchor="t" lIns="0" rIns="0" tIns="0" bIns="0">
+          <a:bodyPr wrap="square" lIns="0" tIns="0" rIns="0" bIns="0" anchor="t">
             <a:spAutoFit/>
           </a:bodyPr>
           <a:lstStyle/>
@@ -14317,6 +14284,7 @@
           <a:lstStyle/>
           <a:p>
             <a:pPr algn="ctr"/>
+            <a:endParaRPr/>
           </a:p>
         </p:txBody>
       </p:sp>
@@ -14337,7 +14305,7 @@
           <a:noFill/>
         </p:spPr>
         <p:txBody>
-          <a:bodyPr wrap="square" anchor="t" lIns="0" rIns="0" tIns="0" bIns="0">
+          <a:bodyPr wrap="square" lIns="0" tIns="0" rIns="0" bIns="0" anchor="t">
             <a:spAutoFit/>
           </a:bodyPr>
           <a:lstStyle/>
@@ -14376,7 +14344,7 @@
           <a:noFill/>
         </p:spPr>
         <p:txBody>
-          <a:bodyPr wrap="square" anchor="t" lIns="0" rIns="0" tIns="0" bIns="0">
+          <a:bodyPr wrap="square" lIns="0" tIns="0" rIns="0" bIns="0" anchor="t">
             <a:spAutoFit/>
           </a:bodyPr>
           <a:lstStyle/>
@@ -14440,6 +14408,7 @@
           <a:lstStyle/>
           <a:p>
             <a:pPr algn="ctr"/>
+            <a:endParaRPr/>
           </a:p>
         </p:txBody>
       </p:sp>
@@ -14460,7 +14429,7 @@
           <a:noFill/>
         </p:spPr>
         <p:txBody>
-          <a:bodyPr wrap="square" anchor="t" lIns="0" rIns="0" tIns="0" bIns="0">
+          <a:bodyPr wrap="square" lIns="0" tIns="0" rIns="0" bIns="0" anchor="t">
             <a:spAutoFit/>
           </a:bodyPr>
           <a:lstStyle/>
@@ -14524,6 +14493,7 @@
           <a:lstStyle/>
           <a:p>
             <a:pPr algn="ctr"/>
+            <a:endParaRPr/>
           </a:p>
         </p:txBody>
       </p:sp>
@@ -14544,7 +14514,7 @@
           <a:noFill/>
         </p:spPr>
         <p:txBody>
-          <a:bodyPr wrap="square" anchor="t" lIns="0" rIns="0" tIns="0" bIns="0">
+          <a:bodyPr wrap="square" lIns="0" tIns="0" rIns="0" bIns="0" anchor="t">
             <a:spAutoFit/>
           </a:bodyPr>
           <a:lstStyle/>
@@ -14608,6 +14578,7 @@
           <a:lstStyle/>
           <a:p>
             <a:pPr algn="ctr"/>
+            <a:endParaRPr/>
           </a:p>
         </p:txBody>
       </p:sp>
@@ -14628,7 +14599,7 @@
           <a:noFill/>
         </p:spPr>
         <p:txBody>
-          <a:bodyPr wrap="square" anchor="t" lIns="0" rIns="0" tIns="0" bIns="0">
+          <a:bodyPr wrap="square" lIns="0" tIns="0" rIns="0" bIns="0" anchor="t">
             <a:spAutoFit/>
           </a:bodyPr>
           <a:lstStyle/>
@@ -14667,7 +14638,7 @@
           <a:noFill/>
         </p:spPr>
         <p:txBody>
-          <a:bodyPr wrap="square" anchor="t" lIns="0" rIns="0" tIns="0" bIns="0">
+          <a:bodyPr wrap="square" lIns="0" tIns="0" rIns="0" bIns="0" anchor="t">
             <a:spAutoFit/>
           </a:bodyPr>
           <a:lstStyle/>
@@ -14706,7 +14677,7 @@
           <a:noFill/>
         </p:spPr>
         <p:txBody>
-          <a:bodyPr wrap="square" anchor="t" lIns="0" rIns="0" tIns="0" bIns="0">
+          <a:bodyPr wrap="square" lIns="0" tIns="0" rIns="0" bIns="0" anchor="t">
             <a:spAutoFit/>
           </a:bodyPr>
           <a:lstStyle/>
@@ -14745,7 +14716,7 @@
           <a:noFill/>
         </p:spPr>
         <p:txBody>
-          <a:bodyPr wrap="square" anchor="t" lIns="0" rIns="0" tIns="0" bIns="0">
+          <a:bodyPr wrap="square" lIns="0" tIns="0" rIns="0" bIns="0" anchor="t">
             <a:spAutoFit/>
           </a:bodyPr>
           <a:lstStyle/>
@@ -14816,7 +14787,7 @@
           <a:noFill/>
         </p:spPr>
         <p:txBody>
-          <a:bodyPr wrap="square" anchor="t" lIns="0" rIns="0" tIns="0" bIns="0">
+          <a:bodyPr wrap="square" lIns="0" tIns="0" rIns="0" bIns="0" anchor="t">
             <a:spAutoFit/>
           </a:bodyPr>
           <a:lstStyle/>
@@ -14847,7 +14818,7 @@
 </file>
 
 <file path=ppt/slides/slide23.xml><?xml version="1.0" encoding="utf-8"?>
-<p:sld xmlns:a="http://schemas.openxmlformats.org/drawingml/2006/main" xmlns:p="http://schemas.openxmlformats.org/presentationml/2006/main" xmlns:r="http://schemas.openxmlformats.org/officeDocument/2006/relationships">
+<p:sld xmlns:a="http://schemas.openxmlformats.org/drawingml/2006/main" xmlns:r="http://schemas.openxmlformats.org/officeDocument/2006/relationships" xmlns:p="http://schemas.openxmlformats.org/presentationml/2006/main">
   <p:cSld>
     <p:spTree>
       <p:nvGrpSpPr>
@@ -14855,7 +14826,14 @@
         <p:cNvGrpSpPr/>
         <p:nvPr/>
       </p:nvGrpSpPr>
-      <p:grpSpPr/>
+      <p:grpSpPr>
+        <a:xfrm>
+          <a:off x="0" y="0"/>
+          <a:ext cx="0" cy="0"/>
+          <a:chOff x="0" y="0"/>
+          <a:chExt cx="0" cy="0"/>
+        </a:xfrm>
+      </p:grpSpPr>
       <p:sp>
         <p:nvSpPr>
           <p:cNvPr id="2" name="Rectangle 1"/>
@@ -14896,6 +14874,7 @@
           <a:lstStyle/>
           <a:p>
             <a:pPr algn="ctr"/>
+            <a:endParaRPr/>
           </a:p>
         </p:txBody>
       </p:sp>
@@ -14916,7 +14895,7 @@
           <a:noFill/>
         </p:spPr>
         <p:txBody>
-          <a:bodyPr wrap="square" anchor="t" lIns="0" rIns="0" tIns="0" bIns="0">
+          <a:bodyPr wrap="square" lIns="0" tIns="0" rIns="0" bIns="0" anchor="t">
             <a:spAutoFit/>
           </a:bodyPr>
           <a:lstStyle/>
@@ -14978,6 +14957,7 @@
           <a:lstStyle/>
           <a:p>
             <a:pPr algn="ctr"/>
+            <a:endParaRPr/>
           </a:p>
         </p:txBody>
       </p:sp>
@@ -14998,7 +14978,7 @@
           <a:noFill/>
         </p:spPr>
         <p:txBody>
-          <a:bodyPr wrap="square" anchor="t" lIns="0" rIns="0" tIns="0" bIns="0">
+          <a:bodyPr wrap="square" lIns="0" tIns="0" rIns="0" bIns="0" anchor="t">
             <a:spAutoFit/>
           </a:bodyPr>
           <a:lstStyle/>
@@ -15062,6 +15042,7 @@
           <a:lstStyle/>
           <a:p>
             <a:pPr algn="ctr"/>
+            <a:endParaRPr/>
           </a:p>
         </p:txBody>
       </p:sp>
@@ -15082,7 +15063,7 @@
           <a:noFill/>
         </p:spPr>
         <p:txBody>
-          <a:bodyPr wrap="square" anchor="t" lIns="0" rIns="0" tIns="0" bIns="0">
+          <a:bodyPr wrap="square" lIns="0" tIns="0" rIns="0" bIns="0" anchor="t">
             <a:spAutoFit/>
           </a:bodyPr>
           <a:lstStyle/>
@@ -15146,6 +15127,7 @@
           <a:lstStyle/>
           <a:p>
             <a:pPr algn="ctr"/>
+            <a:endParaRPr/>
           </a:p>
         </p:txBody>
       </p:sp>
@@ -15189,6 +15171,7 @@
           <a:lstStyle/>
           <a:p>
             <a:pPr algn="ctr"/>
+            <a:endParaRPr/>
           </a:p>
         </p:txBody>
       </p:sp>
@@ -15209,7 +15192,7 @@
           <a:noFill/>
         </p:spPr>
         <p:txBody>
-          <a:bodyPr wrap="square" anchor="t" lIns="0" rIns="0" tIns="0" bIns="0">
+          <a:bodyPr wrap="square" lIns="0" tIns="0" rIns="0" bIns="0" anchor="t">
             <a:spAutoFit/>
           </a:bodyPr>
           <a:lstStyle/>
@@ -15248,7 +15231,7 @@
           <a:noFill/>
         </p:spPr>
         <p:txBody>
-          <a:bodyPr wrap="square" anchor="t" lIns="0" rIns="0" tIns="0" bIns="0">
+          <a:bodyPr wrap="square" lIns="0" tIns="0" rIns="0" bIns="0" anchor="t">
             <a:spAutoFit/>
           </a:bodyPr>
           <a:lstStyle/>
@@ -15312,6 +15295,7 @@
           <a:lstStyle/>
           <a:p>
             <a:pPr algn="ctr"/>
+            <a:endParaRPr/>
           </a:p>
         </p:txBody>
       </p:sp>
@@ -15355,6 +15339,7 @@
           <a:lstStyle/>
           <a:p>
             <a:pPr algn="ctr"/>
+            <a:endParaRPr/>
           </a:p>
         </p:txBody>
       </p:sp>
@@ -15375,7 +15360,7 @@
           <a:noFill/>
         </p:spPr>
         <p:txBody>
-          <a:bodyPr wrap="square" anchor="t" lIns="0" rIns="0" tIns="0" bIns="0">
+          <a:bodyPr wrap="square" lIns="0" tIns="0" rIns="0" bIns="0" anchor="t">
             <a:spAutoFit/>
           </a:bodyPr>
           <a:lstStyle/>
@@ -15414,7 +15399,7 @@
           <a:noFill/>
         </p:spPr>
         <p:txBody>
-          <a:bodyPr wrap="square" anchor="t" lIns="0" rIns="0" tIns="0" bIns="0">
+          <a:bodyPr wrap="square" lIns="0" tIns="0" rIns="0" bIns="0" anchor="t">
             <a:spAutoFit/>
           </a:bodyPr>
           <a:lstStyle/>
@@ -15478,6 +15463,7 @@
           <a:lstStyle/>
           <a:p>
             <a:pPr algn="ctr"/>
+            <a:endParaRPr/>
           </a:p>
         </p:txBody>
       </p:sp>
@@ -15521,6 +15507,7 @@
           <a:lstStyle/>
           <a:p>
             <a:pPr algn="ctr"/>
+            <a:endParaRPr/>
           </a:p>
         </p:txBody>
       </p:sp>
@@ -15541,7 +15528,7 @@
           <a:noFill/>
         </p:spPr>
         <p:txBody>
-          <a:bodyPr wrap="square" anchor="t" lIns="0" rIns="0" tIns="0" bIns="0">
+          <a:bodyPr wrap="square" lIns="0" tIns="0" rIns="0" bIns="0" anchor="t">
             <a:spAutoFit/>
           </a:bodyPr>
           <a:lstStyle/>
@@ -15580,7 +15567,7 @@
           <a:noFill/>
         </p:spPr>
         <p:txBody>
-          <a:bodyPr wrap="square" anchor="t" lIns="0" rIns="0" tIns="0" bIns="0">
+          <a:bodyPr wrap="square" lIns="0" tIns="0" rIns="0" bIns="0" anchor="t">
             <a:spAutoFit/>
           </a:bodyPr>
           <a:lstStyle/>
@@ -15619,7 +15606,7 @@
           <a:noFill/>
         </p:spPr>
         <p:txBody>
-          <a:bodyPr wrap="square" anchor="t" lIns="0" rIns="0" tIns="0" bIns="0">
+          <a:bodyPr wrap="square" lIns="0" tIns="0" rIns="0" bIns="0" anchor="t">
             <a:spAutoFit/>
           </a:bodyPr>
           <a:lstStyle/>
@@ -15681,6 +15668,7 @@
           <a:lstStyle/>
           <a:p>
             <a:pPr algn="ctr"/>
+            <a:endParaRPr/>
           </a:p>
         </p:txBody>
       </p:sp>
@@ -15701,7 +15689,7 @@
           <a:noFill/>
         </p:spPr>
         <p:txBody>
-          <a:bodyPr wrap="square" anchor="t" lIns="0" rIns="0" tIns="0" bIns="0">
+          <a:bodyPr wrap="square" lIns="0" tIns="0" rIns="0" bIns="0" anchor="t">
             <a:spAutoFit/>
           </a:bodyPr>
           <a:lstStyle/>
@@ -15763,6 +15751,7 @@
           <a:lstStyle/>
           <a:p>
             <a:pPr algn="ctr"/>
+            <a:endParaRPr/>
           </a:p>
         </p:txBody>
       </p:sp>
@@ -15783,7 +15772,7 @@
           <a:noFill/>
         </p:spPr>
         <p:txBody>
-          <a:bodyPr wrap="square" anchor="t" lIns="0" rIns="0" tIns="0" bIns="0">
+          <a:bodyPr wrap="square" lIns="0" tIns="0" rIns="0" bIns="0" anchor="t">
             <a:spAutoFit/>
           </a:bodyPr>
           <a:lstStyle/>
@@ -15845,6 +15834,7 @@
           <a:lstStyle/>
           <a:p>
             <a:pPr algn="ctr"/>
+            <a:endParaRPr/>
           </a:p>
         </p:txBody>
       </p:sp>
@@ -15865,7 +15855,7 @@
           <a:noFill/>
         </p:spPr>
         <p:txBody>
-          <a:bodyPr wrap="square" anchor="t" lIns="0" rIns="0" tIns="0" bIns="0">
+          <a:bodyPr wrap="square" lIns="0" tIns="0" rIns="0" bIns="0" anchor="t">
             <a:spAutoFit/>
           </a:bodyPr>
           <a:lstStyle/>
@@ -15896,7 +15886,7 @@
 </file>
 
 <file path=ppt/slides/slide24.xml><?xml version="1.0" encoding="utf-8"?>
-<p:sld xmlns:a="http://schemas.openxmlformats.org/drawingml/2006/main" xmlns:p="http://schemas.openxmlformats.org/presentationml/2006/main" xmlns:r="http://schemas.openxmlformats.org/officeDocument/2006/relationships">
+<p:sld xmlns:a="http://schemas.openxmlformats.org/drawingml/2006/main" xmlns:r="http://schemas.openxmlformats.org/officeDocument/2006/relationships" xmlns:p="http://schemas.openxmlformats.org/presentationml/2006/main">
   <p:cSld>
     <p:spTree>
       <p:nvGrpSpPr>
@@ -15904,7 +15894,14 @@
         <p:cNvGrpSpPr/>
         <p:nvPr/>
       </p:nvGrpSpPr>
-      <p:grpSpPr/>
+      <p:grpSpPr>
+        <a:xfrm>
+          <a:off x="0" y="0"/>
+          <a:ext cx="0" cy="0"/>
+          <a:chOff x="0" y="0"/>
+          <a:chExt cx="0" cy="0"/>
+        </a:xfrm>
+      </p:grpSpPr>
       <p:sp>
         <p:nvSpPr>
           <p:cNvPr id="2" name="Rectangle 1"/>
@@ -15945,6 +15942,7 @@
           <a:lstStyle/>
           <a:p>
             <a:pPr algn="ctr"/>
+            <a:endParaRPr/>
           </a:p>
         </p:txBody>
       </p:sp>
@@ -15965,7 +15963,7 @@
           <a:noFill/>
         </p:spPr>
         <p:txBody>
-          <a:bodyPr wrap="square" anchor="t" lIns="0" rIns="0" tIns="0" bIns="0">
+          <a:bodyPr wrap="square" lIns="0" tIns="0" rIns="0" bIns="0" anchor="t">
             <a:spAutoFit/>
           </a:bodyPr>
           <a:lstStyle/>
@@ -16027,6 +16025,7 @@
           <a:lstStyle/>
           <a:p>
             <a:pPr algn="ctr"/>
+            <a:endParaRPr/>
           </a:p>
         </p:txBody>
       </p:sp>
@@ -16047,7 +16046,7 @@
           <a:noFill/>
         </p:spPr>
         <p:txBody>
-          <a:bodyPr wrap="square" anchor="t" lIns="0" rIns="0" tIns="0" bIns="0">
+          <a:bodyPr wrap="square" lIns="0" tIns="0" rIns="0" bIns="0" anchor="t">
             <a:spAutoFit/>
           </a:bodyPr>
           <a:lstStyle/>
@@ -16086,7 +16085,7 @@
           <a:noFill/>
         </p:spPr>
         <p:txBody>
-          <a:bodyPr wrap="square" anchor="t" lIns="0" rIns="0" tIns="0" bIns="0">
+          <a:bodyPr wrap="square" lIns="0" tIns="0" rIns="0" bIns="0" anchor="t">
             <a:spAutoFit/>
           </a:bodyPr>
           <a:lstStyle/>
@@ -16150,6 +16149,7 @@
           <a:lstStyle/>
           <a:p>
             <a:pPr algn="ctr"/>
+            <a:endParaRPr/>
           </a:p>
         </p:txBody>
       </p:sp>
@@ -16170,7 +16170,7 @@
           <a:noFill/>
         </p:spPr>
         <p:txBody>
-          <a:bodyPr wrap="square" anchor="t" lIns="0" rIns="0" tIns="0" bIns="0">
+          <a:bodyPr wrap="square" lIns="0" tIns="0" rIns="0" bIns="0" anchor="t">
             <a:spAutoFit/>
           </a:bodyPr>
           <a:lstStyle/>
@@ -16209,7 +16209,7 @@
           <a:noFill/>
         </p:spPr>
         <p:txBody>
-          <a:bodyPr wrap="square" anchor="t" lIns="0" rIns="0" tIns="0" bIns="0">
+          <a:bodyPr wrap="square" lIns="0" tIns="0" rIns="0" bIns="0" anchor="t">
             <a:spAutoFit/>
           </a:bodyPr>
           <a:lstStyle/>
@@ -16273,6 +16273,7 @@
           <a:lstStyle/>
           <a:p>
             <a:pPr algn="ctr"/>
+            <a:endParaRPr/>
           </a:p>
         </p:txBody>
       </p:sp>
@@ -16293,7 +16294,7 @@
           <a:noFill/>
         </p:spPr>
         <p:txBody>
-          <a:bodyPr wrap="square" anchor="t" lIns="0" rIns="0" tIns="0" bIns="0">
+          <a:bodyPr wrap="square" lIns="0" tIns="0" rIns="0" bIns="0" anchor="t">
             <a:spAutoFit/>
           </a:bodyPr>
           <a:lstStyle/>
@@ -16332,7 +16333,7 @@
           <a:noFill/>
         </p:spPr>
         <p:txBody>
-          <a:bodyPr wrap="square" anchor="t" lIns="0" rIns="0" tIns="0" bIns="0">
+          <a:bodyPr wrap="square" lIns="0" tIns="0" rIns="0" bIns="0" anchor="t">
             <a:spAutoFit/>
           </a:bodyPr>
           <a:lstStyle/>
@@ -16396,6 +16397,7 @@
           <a:lstStyle/>
           <a:p>
             <a:pPr algn="ctr"/>
+            <a:endParaRPr/>
           </a:p>
         </p:txBody>
       </p:sp>
@@ -16416,7 +16418,7 @@
           <a:noFill/>
         </p:spPr>
         <p:txBody>
-          <a:bodyPr wrap="square" anchor="t" lIns="0" rIns="0" tIns="0" bIns="0">
+          <a:bodyPr wrap="square" lIns="0" tIns="0" rIns="0" bIns="0" anchor="t">
             <a:spAutoFit/>
           </a:bodyPr>
           <a:lstStyle/>
@@ -16455,7 +16457,7 @@
           <a:noFill/>
         </p:spPr>
         <p:txBody>
-          <a:bodyPr wrap="square" anchor="t" lIns="0" rIns="0" tIns="0" bIns="0">
+          <a:bodyPr wrap="square" lIns="0" tIns="0" rIns="0" bIns="0" anchor="t">
             <a:spAutoFit/>
           </a:bodyPr>
           <a:lstStyle/>
@@ -16486,7 +16488,7 @@
         <p:spPr>
           <a:xfrm>
             <a:off x="566928" y="3520440"/>
-            <a:ext cx="8010144" cy="822960"/>
+            <a:ext cx="8010144" cy="1000760"/>
           </a:xfrm>
           <a:prstGeom prst="rect">
             <a:avLst/>
@@ -16517,6 +16519,7 @@
           <a:lstStyle/>
           <a:p>
             <a:pPr algn="ctr"/>
+            <a:endParaRPr/>
           </a:p>
         </p:txBody>
       </p:sp>
@@ -16537,7 +16540,7 @@
           <a:noFill/>
         </p:spPr>
         <p:txBody>
-          <a:bodyPr wrap="square" anchor="t" lIns="0" rIns="0" tIns="0" bIns="0">
+          <a:bodyPr wrap="square" lIns="0" tIns="0" rIns="0" bIns="0" anchor="t">
             <a:spAutoFit/>
           </a:bodyPr>
           <a:lstStyle/>
@@ -16576,7 +16579,7 @@
           <a:noFill/>
         </p:spPr>
         <p:txBody>
-          <a:bodyPr wrap="square" anchor="t" lIns="0" rIns="0" tIns="0" bIns="0">
+          <a:bodyPr wrap="square" lIns="0" tIns="0" rIns="0" bIns="0" anchor="t">
             <a:spAutoFit/>
           </a:bodyPr>
           <a:lstStyle/>
@@ -16623,7 +16626,7 @@
 </file>
 
 <file path=ppt/slides/slide25.xml><?xml version="1.0" encoding="utf-8"?>
-<p:sld xmlns:a="http://schemas.openxmlformats.org/drawingml/2006/main" xmlns:p="http://schemas.openxmlformats.org/presentationml/2006/main" xmlns:r="http://schemas.openxmlformats.org/officeDocument/2006/relationships">
+<p:sld xmlns:a="http://schemas.openxmlformats.org/drawingml/2006/main" xmlns:r="http://schemas.openxmlformats.org/officeDocument/2006/relationships" xmlns:p="http://schemas.openxmlformats.org/presentationml/2006/main">
   <p:cSld>
     <p:spTree>
       <p:nvGrpSpPr>
@@ -16631,7 +16634,14 @@
         <p:cNvGrpSpPr/>
         <p:nvPr/>
       </p:nvGrpSpPr>
-      <p:grpSpPr/>
+      <p:grpSpPr>
+        <a:xfrm>
+          <a:off x="0" y="0"/>
+          <a:ext cx="0" cy="0"/>
+          <a:chOff x="0" y="0"/>
+          <a:chExt cx="0" cy="0"/>
+        </a:xfrm>
+      </p:grpSpPr>
       <p:sp>
         <p:nvSpPr>
           <p:cNvPr id="2" name="Rectangle 1"/>
@@ -16672,6 +16682,7 @@
           <a:lstStyle/>
           <a:p>
             <a:pPr algn="ctr"/>
+            <a:endParaRPr/>
           </a:p>
         </p:txBody>
       </p:sp>
@@ -16692,7 +16703,7 @@
           <a:noFill/>
         </p:spPr>
         <p:txBody>
-          <a:bodyPr wrap="square" anchor="t" lIns="0" rIns="0" tIns="0" bIns="0">
+          <a:bodyPr wrap="square" lIns="0" tIns="0" rIns="0" bIns="0" anchor="t">
             <a:spAutoFit/>
           </a:bodyPr>
           <a:lstStyle/>
@@ -16754,6 +16765,7 @@
           <a:lstStyle/>
           <a:p>
             <a:pPr algn="ctr"/>
+            <a:endParaRPr/>
           </a:p>
         </p:txBody>
       </p:sp>
@@ -16774,7 +16786,7 @@
           <a:noFill/>
         </p:spPr>
         <p:txBody>
-          <a:bodyPr wrap="square" anchor="t" lIns="0" rIns="0" tIns="0" bIns="0">
+          <a:bodyPr wrap="square" lIns="0" tIns="0" rIns="0" bIns="0" anchor="t">
             <a:spAutoFit/>
           </a:bodyPr>
           <a:lstStyle/>
@@ -16813,7 +16825,7 @@
           <a:noFill/>
         </p:spPr>
         <p:txBody>
-          <a:bodyPr wrap="square" anchor="t" lIns="0" rIns="0" tIns="0" bIns="0">
+          <a:bodyPr wrap="square" lIns="0" tIns="0" rIns="0" bIns="0" anchor="t">
             <a:spAutoFit/>
           </a:bodyPr>
           <a:lstStyle/>
@@ -16875,6 +16887,7 @@
           <a:lstStyle/>
           <a:p>
             <a:pPr algn="ctr"/>
+            <a:endParaRPr/>
           </a:p>
         </p:txBody>
       </p:sp>
@@ -16895,7 +16908,7 @@
           <a:noFill/>
         </p:spPr>
         <p:txBody>
-          <a:bodyPr wrap="square" anchor="t" lIns="0" rIns="0" tIns="0" bIns="0">
+          <a:bodyPr wrap="square" lIns="0" tIns="0" rIns="0" bIns="0" anchor="t">
             <a:spAutoFit/>
           </a:bodyPr>
           <a:lstStyle/>
@@ -16934,7 +16947,7 @@
           <a:noFill/>
         </p:spPr>
         <p:txBody>
-          <a:bodyPr wrap="square" anchor="t" lIns="0" rIns="0" tIns="0" bIns="0">
+          <a:bodyPr wrap="square" lIns="0" tIns="0" rIns="0" bIns="0" anchor="t">
             <a:spAutoFit/>
           </a:bodyPr>
           <a:lstStyle/>
@@ -16996,6 +17009,7 @@
           <a:lstStyle/>
           <a:p>
             <a:pPr algn="ctr"/>
+            <a:endParaRPr/>
           </a:p>
         </p:txBody>
       </p:sp>
@@ -17016,7 +17030,7 @@
           <a:noFill/>
         </p:spPr>
         <p:txBody>
-          <a:bodyPr wrap="square" anchor="t" lIns="0" rIns="0" tIns="0" bIns="0">
+          <a:bodyPr wrap="square" lIns="0" tIns="0" rIns="0" bIns="0" anchor="t">
             <a:spAutoFit/>
           </a:bodyPr>
           <a:lstStyle/>
@@ -17055,7 +17069,7 @@
           <a:noFill/>
         </p:spPr>
         <p:txBody>
-          <a:bodyPr wrap="square" anchor="t" lIns="0" rIns="0" tIns="0" bIns="0">
+          <a:bodyPr wrap="square" lIns="0" tIns="0" rIns="0" bIns="0" anchor="t">
             <a:spAutoFit/>
           </a:bodyPr>
           <a:lstStyle/>
@@ -17086,7 +17100,7 @@
 </file>
 
 <file path=ppt/slides/slide26.xml><?xml version="1.0" encoding="utf-8"?>
-<p:sld xmlns:a="http://schemas.openxmlformats.org/drawingml/2006/main" xmlns:p="http://schemas.openxmlformats.org/presentationml/2006/main" xmlns:r="http://schemas.openxmlformats.org/officeDocument/2006/relationships">
+<p:sld xmlns:a="http://schemas.openxmlformats.org/drawingml/2006/main" xmlns:r="http://schemas.openxmlformats.org/officeDocument/2006/relationships" xmlns:p="http://schemas.openxmlformats.org/presentationml/2006/main">
   <p:cSld>
     <p:spTree>
       <p:nvGrpSpPr>
@@ -17094,7 +17108,14 @@
         <p:cNvGrpSpPr/>
         <p:nvPr/>
       </p:nvGrpSpPr>
-      <p:grpSpPr/>
+      <p:grpSpPr>
+        <a:xfrm>
+          <a:off x="0" y="0"/>
+          <a:ext cx="0" cy="0"/>
+          <a:chOff x="0" y="0"/>
+          <a:chExt cx="0" cy="0"/>
+        </a:xfrm>
+      </p:grpSpPr>
       <p:sp>
         <p:nvSpPr>
           <p:cNvPr id="2" name="Rectangle 1"/>
@@ -17135,6 +17156,7 @@
           <a:lstStyle/>
           <a:p>
             <a:pPr algn="ctr"/>
+            <a:endParaRPr/>
           </a:p>
         </p:txBody>
       </p:sp>
@@ -17155,7 +17177,7 @@
           <a:noFill/>
         </p:spPr>
         <p:txBody>
-          <a:bodyPr wrap="square" anchor="t" lIns="0" rIns="0" tIns="0" bIns="0">
+          <a:bodyPr wrap="square" lIns="0" tIns="0" rIns="0" bIns="0" anchor="t">
             <a:spAutoFit/>
           </a:bodyPr>
           <a:lstStyle/>
@@ -17217,6 +17239,7 @@
           <a:lstStyle/>
           <a:p>
             <a:pPr algn="ctr"/>
+            <a:endParaRPr/>
           </a:p>
         </p:txBody>
       </p:sp>
@@ -17237,7 +17260,7 @@
           <a:noFill/>
         </p:spPr>
         <p:txBody>
-          <a:bodyPr wrap="square" anchor="t" lIns="0" rIns="0" tIns="0" bIns="0">
+          <a:bodyPr wrap="square" lIns="0" tIns="0" rIns="0" bIns="0" anchor="t">
             <a:spAutoFit/>
           </a:bodyPr>
           <a:lstStyle/>
@@ -17276,7 +17299,7 @@
           <a:noFill/>
         </p:spPr>
         <p:txBody>
-          <a:bodyPr wrap="square" anchor="t" lIns="0" rIns="0" tIns="0" bIns="0">
+          <a:bodyPr wrap="square" lIns="0" tIns="0" rIns="0" bIns="0" anchor="t">
             <a:spAutoFit/>
           </a:bodyPr>
           <a:lstStyle/>
@@ -17340,6 +17363,7 @@
           <a:lstStyle/>
           <a:p>
             <a:pPr algn="ctr"/>
+            <a:endParaRPr/>
           </a:p>
         </p:txBody>
       </p:sp>
@@ -17360,7 +17384,7 @@
           <a:noFill/>
         </p:spPr>
         <p:txBody>
-          <a:bodyPr wrap="square" anchor="t" lIns="0" rIns="0" tIns="0" bIns="0">
+          <a:bodyPr wrap="square" lIns="0" tIns="0" rIns="0" bIns="0" anchor="t">
             <a:spAutoFit/>
           </a:bodyPr>
           <a:lstStyle/>
@@ -17399,7 +17423,7 @@
           <a:noFill/>
         </p:spPr>
         <p:txBody>
-          <a:bodyPr wrap="square" anchor="t" lIns="0" rIns="0" tIns="0" bIns="0">
+          <a:bodyPr wrap="square" lIns="0" tIns="0" rIns="0" bIns="0" anchor="t">
             <a:spAutoFit/>
           </a:bodyPr>
           <a:lstStyle/>
@@ -17463,6 +17487,7 @@
           <a:lstStyle/>
           <a:p>
             <a:pPr algn="ctr"/>
+            <a:endParaRPr/>
           </a:p>
         </p:txBody>
       </p:sp>
@@ -17483,7 +17508,7 @@
           <a:noFill/>
         </p:spPr>
         <p:txBody>
-          <a:bodyPr wrap="square" anchor="t" lIns="0" rIns="0" tIns="0" bIns="0">
+          <a:bodyPr wrap="square" lIns="0" tIns="0" rIns="0" bIns="0" anchor="t">
             <a:spAutoFit/>
           </a:bodyPr>
           <a:lstStyle/>
@@ -17522,7 +17547,7 @@
           <a:noFill/>
         </p:spPr>
         <p:txBody>
-          <a:bodyPr wrap="square" anchor="t" lIns="0" rIns="0" tIns="0" bIns="0">
+          <a:bodyPr wrap="square" lIns="0" tIns="0" rIns="0" bIns="0" anchor="t">
             <a:spAutoFit/>
           </a:bodyPr>
           <a:lstStyle/>
@@ -17586,6 +17611,7 @@
           <a:lstStyle/>
           <a:p>
             <a:pPr algn="ctr"/>
+            <a:endParaRPr/>
           </a:p>
         </p:txBody>
       </p:sp>
@@ -17606,7 +17632,7 @@
           <a:noFill/>
         </p:spPr>
         <p:txBody>
-          <a:bodyPr wrap="square" anchor="t" lIns="0" rIns="0" tIns="0" bIns="0">
+          <a:bodyPr wrap="square" lIns="0" tIns="0" rIns="0" bIns="0" anchor="t">
             <a:spAutoFit/>
           </a:bodyPr>
           <a:lstStyle/>
@@ -17645,7 +17671,7 @@
           <a:noFill/>
         </p:spPr>
         <p:txBody>
-          <a:bodyPr wrap="square" anchor="t" lIns="0" rIns="0" tIns="0" bIns="0">
+          <a:bodyPr wrap="square" lIns="0" tIns="0" rIns="0" bIns="0" anchor="t">
             <a:spAutoFit/>
           </a:bodyPr>
           <a:lstStyle/>
@@ -17707,6 +17733,7 @@
           <a:lstStyle/>
           <a:p>
             <a:pPr algn="ctr"/>
+            <a:endParaRPr/>
           </a:p>
         </p:txBody>
       </p:sp>
@@ -17727,7 +17754,7 @@
           <a:noFill/>
         </p:spPr>
         <p:txBody>
-          <a:bodyPr wrap="square" anchor="t" lIns="0" rIns="0" tIns="0" bIns="0">
+          <a:bodyPr wrap="square" lIns="0" tIns="0" rIns="0" bIns="0" anchor="t">
             <a:spAutoFit/>
           </a:bodyPr>
           <a:lstStyle/>
@@ -17766,7 +17793,7 @@
           <a:noFill/>
         </p:spPr>
         <p:txBody>
-          <a:bodyPr wrap="square" anchor="t" lIns="0" rIns="0" tIns="0" bIns="0">
+          <a:bodyPr wrap="square" lIns="0" tIns="0" rIns="0" bIns="0" anchor="t">
             <a:spAutoFit/>
           </a:bodyPr>
           <a:lstStyle/>
@@ -17797,7 +17824,7 @@
 </file>
 
 <file path=ppt/slides/slide27.xml><?xml version="1.0" encoding="utf-8"?>
-<p:sld xmlns:a="http://schemas.openxmlformats.org/drawingml/2006/main" xmlns:p="http://schemas.openxmlformats.org/presentationml/2006/main" xmlns:r="http://schemas.openxmlformats.org/officeDocument/2006/relationships">
+<p:sld xmlns:a="http://schemas.openxmlformats.org/drawingml/2006/main" xmlns:r="http://schemas.openxmlformats.org/officeDocument/2006/relationships" xmlns:p="http://schemas.openxmlformats.org/presentationml/2006/main">
   <p:cSld>
     <p:spTree>
       <p:nvGrpSpPr>
@@ -17805,7 +17832,14 @@
         <p:cNvGrpSpPr/>
         <p:nvPr/>
       </p:nvGrpSpPr>
-      <p:grpSpPr/>
+      <p:grpSpPr>
+        <a:xfrm>
+          <a:off x="0" y="0"/>
+          <a:ext cx="0" cy="0"/>
+          <a:chOff x="0" y="0"/>
+          <a:chExt cx="0" cy="0"/>
+        </a:xfrm>
+      </p:grpSpPr>
       <p:sp>
         <p:nvSpPr>
           <p:cNvPr id="2" name="Rectangle 1"/>
@@ -17846,6 +17880,7 @@
           <a:lstStyle/>
           <a:p>
             <a:pPr algn="ctr"/>
+            <a:endParaRPr/>
           </a:p>
         </p:txBody>
       </p:sp>
@@ -17866,7 +17901,7 @@
           <a:noFill/>
         </p:spPr>
         <p:txBody>
-          <a:bodyPr wrap="square" anchor="t" lIns="0" rIns="0" tIns="0" bIns="0">
+          <a:bodyPr wrap="square" lIns="0" tIns="0" rIns="0" bIns="0" anchor="t">
             <a:spAutoFit/>
           </a:bodyPr>
           <a:lstStyle/>
@@ -17928,6 +17963,7 @@
           <a:lstStyle/>
           <a:p>
             <a:pPr algn="ctr"/>
+            <a:endParaRPr/>
           </a:p>
         </p:txBody>
       </p:sp>
@@ -17948,7 +17984,7 @@
           <a:noFill/>
         </p:spPr>
         <p:txBody>
-          <a:bodyPr wrap="square" anchor="t" lIns="0" rIns="0" tIns="0" bIns="0">
+          <a:bodyPr wrap="square" lIns="0" tIns="0" rIns="0" bIns="0" anchor="t">
             <a:spAutoFit/>
           </a:bodyPr>
           <a:lstStyle/>
@@ -17987,7 +18023,7 @@
           <a:noFill/>
         </p:spPr>
         <p:txBody>
-          <a:bodyPr wrap="square" anchor="t" lIns="0" rIns="0" tIns="0" bIns="0">
+          <a:bodyPr wrap="square" lIns="0" tIns="0" rIns="0" bIns="0" anchor="t">
             <a:spAutoFit/>
           </a:bodyPr>
           <a:lstStyle/>
@@ -18026,7 +18062,7 @@
           <a:noFill/>
         </p:spPr>
         <p:txBody>
-          <a:bodyPr wrap="square" anchor="t" lIns="0" rIns="0" tIns="0" bIns="0">
+          <a:bodyPr wrap="square" lIns="0" tIns="0" rIns="0" bIns="0" anchor="t">
             <a:spAutoFit/>
           </a:bodyPr>
           <a:lstStyle/>
@@ -18065,7 +18101,7 @@
           <a:noFill/>
         </p:spPr>
         <p:txBody>
-          <a:bodyPr wrap="square" anchor="t" lIns="0" rIns="0" tIns="0" bIns="0">
+          <a:bodyPr wrap="square" lIns="0" tIns="0" rIns="0" bIns="0" anchor="t">
             <a:spAutoFit/>
           </a:bodyPr>
           <a:lstStyle/>
@@ -18143,7 +18179,7 @@
         </p:nvSpPr>
         <p:spPr>
           <a:xfrm>
-            <a:off x="566928" y="2926080"/>
+            <a:off x="566928" y="3017520"/>
             <a:ext cx="8010144" cy="731520"/>
           </a:xfrm>
           <a:prstGeom prst="rect">
@@ -18177,6 +18213,7 @@
           <a:lstStyle/>
           <a:p>
             <a:pPr algn="ctr"/>
+            <a:endParaRPr/>
           </a:p>
         </p:txBody>
       </p:sp>
@@ -18188,7 +18225,7 @@
         </p:nvSpPr>
         <p:spPr>
           <a:xfrm>
-            <a:off x="731520" y="3017520"/>
+            <a:off x="731520" y="3113532"/>
             <a:ext cx="7680960" cy="548640"/>
           </a:xfrm>
           <a:prstGeom prst="rect">
@@ -18197,7 +18234,7 @@
           <a:noFill/>
         </p:spPr>
         <p:txBody>
-          <a:bodyPr wrap="square" anchor="t" lIns="0" rIns="0" tIns="0" bIns="0">
+          <a:bodyPr wrap="square" lIns="0" tIns="0" rIns="0" bIns="0" anchor="t">
             <a:spAutoFit/>
           </a:bodyPr>
           <a:lstStyle/>
@@ -18208,7 +18245,7 @@
               </a:lnSpc>
             </a:pPr>
             <a:r>
-              <a:rPr sz="1200" b="0">
+              <a:rPr sz="1200" b="0" dirty="0">
                 <a:solidFill>
                   <a:srgbClr val="000000"/>
                 </a:solidFill>
@@ -18259,6 +18296,7 @@
           <a:lstStyle/>
           <a:p>
             <a:pPr algn="ctr"/>
+            <a:endParaRPr/>
           </a:p>
         </p:txBody>
       </p:sp>
@@ -18302,6 +18340,7 @@
           <a:lstStyle/>
           <a:p>
             <a:pPr algn="ctr"/>
+            <a:endParaRPr/>
           </a:p>
         </p:txBody>
       </p:sp>
@@ -18322,7 +18361,7 @@
           <a:noFill/>
         </p:spPr>
         <p:txBody>
-          <a:bodyPr wrap="square" anchor="t" lIns="0" rIns="0" tIns="0" bIns="0">
+          <a:bodyPr wrap="square" lIns="0" tIns="0" rIns="0" bIns="0" anchor="t">
             <a:spAutoFit/>
           </a:bodyPr>
           <a:lstStyle/>
@@ -18361,7 +18400,7 @@
           <a:noFill/>
         </p:spPr>
         <p:txBody>
-          <a:bodyPr wrap="square" anchor="t" lIns="0" rIns="0" tIns="0" bIns="0">
+          <a:bodyPr wrap="square" lIns="0" tIns="0" rIns="0" bIns="0" anchor="t">
             <a:spAutoFit/>
           </a:bodyPr>
           <a:lstStyle/>
@@ -18392,7 +18431,7 @@
 </file>
 
 <file path=ppt/slides/slide28.xml><?xml version="1.0" encoding="utf-8"?>
-<p:sld xmlns:a="http://schemas.openxmlformats.org/drawingml/2006/main" xmlns:p="http://schemas.openxmlformats.org/presentationml/2006/main" xmlns:r="http://schemas.openxmlformats.org/officeDocument/2006/relationships">
+<p:sld xmlns:a="http://schemas.openxmlformats.org/drawingml/2006/main" xmlns:r="http://schemas.openxmlformats.org/officeDocument/2006/relationships" xmlns:p="http://schemas.openxmlformats.org/presentationml/2006/main">
   <p:cSld>
     <p:spTree>
       <p:nvGrpSpPr>
@@ -18400,7 +18439,14 @@
         <p:cNvGrpSpPr/>
         <p:nvPr/>
       </p:nvGrpSpPr>
-      <p:grpSpPr/>
+      <p:grpSpPr>
+        <a:xfrm>
+          <a:off x="0" y="0"/>
+          <a:ext cx="0" cy="0"/>
+          <a:chOff x="0" y="0"/>
+          <a:chExt cx="0" cy="0"/>
+        </a:xfrm>
+      </p:grpSpPr>
       <p:sp>
         <p:nvSpPr>
           <p:cNvPr id="2" name="Rectangle 1"/>
@@ -18441,6 +18487,7 @@
           <a:lstStyle/>
           <a:p>
             <a:pPr algn="ctr"/>
+            <a:endParaRPr/>
           </a:p>
         </p:txBody>
       </p:sp>
@@ -18461,7 +18508,7 @@
           <a:noFill/>
         </p:spPr>
         <p:txBody>
-          <a:bodyPr wrap="square" anchor="t" lIns="0" rIns="0" tIns="0" bIns="0">
+          <a:bodyPr wrap="square" lIns="0" tIns="0" rIns="0" bIns="0" anchor="t">
             <a:spAutoFit/>
           </a:bodyPr>
           <a:lstStyle/>
@@ -18523,6 +18570,7 @@
           <a:lstStyle/>
           <a:p>
             <a:pPr algn="ctr"/>
+            <a:endParaRPr/>
           </a:p>
         </p:txBody>
       </p:sp>
@@ -18543,7 +18591,7 @@
           <a:noFill/>
         </p:spPr>
         <p:txBody>
-          <a:bodyPr wrap="square" anchor="t" lIns="0" rIns="0" tIns="0" bIns="0">
+          <a:bodyPr wrap="square" lIns="0" tIns="0" rIns="0" bIns="0" anchor="t">
             <a:spAutoFit/>
           </a:bodyPr>
           <a:lstStyle/>
@@ -18605,6 +18653,7 @@
           <a:lstStyle/>
           <a:p>
             <a:pPr algn="ctr"/>
+            <a:endParaRPr/>
           </a:p>
         </p:txBody>
       </p:sp>
@@ -18625,7 +18674,7 @@
           <a:noFill/>
         </p:spPr>
         <p:txBody>
-          <a:bodyPr wrap="square" anchor="t" lIns="0" rIns="0" tIns="0" bIns="0">
+          <a:bodyPr wrap="square" lIns="0" tIns="0" rIns="0" bIns="0" anchor="t">
             <a:spAutoFit/>
           </a:bodyPr>
           <a:lstStyle/>
@@ -18664,7 +18713,7 @@
           <a:noFill/>
         </p:spPr>
         <p:txBody>
-          <a:bodyPr wrap="square" anchor="t" lIns="0" rIns="0" tIns="0" bIns="0">
+          <a:bodyPr wrap="square" lIns="0" tIns="0" rIns="0" bIns="0" anchor="t">
             <a:spAutoFit/>
           </a:bodyPr>
           <a:lstStyle/>
@@ -18703,7 +18752,7 @@
           <a:noFill/>
         </p:spPr>
         <p:txBody>
-          <a:bodyPr wrap="square" anchor="t" lIns="0" rIns="0" tIns="0" bIns="0">
+          <a:bodyPr wrap="square" lIns="0" tIns="0" rIns="0" bIns="0" anchor="t">
             <a:spAutoFit/>
           </a:bodyPr>
           <a:lstStyle/>
@@ -18742,7 +18791,7 @@
           <a:noFill/>
         </p:spPr>
         <p:txBody>
-          <a:bodyPr wrap="square" anchor="t" lIns="0" rIns="0" tIns="0" bIns="0">
+          <a:bodyPr wrap="square" lIns="0" tIns="0" rIns="0" bIns="0" anchor="t">
             <a:spAutoFit/>
           </a:bodyPr>
           <a:lstStyle/>
@@ -18773,7 +18822,7 @@
 </file>
 
 <file path=ppt/slides/slide3.xml><?xml version="1.0" encoding="utf-8"?>
-<p:sld xmlns:a="http://schemas.openxmlformats.org/drawingml/2006/main" xmlns:p="http://schemas.openxmlformats.org/presentationml/2006/main" xmlns:r="http://schemas.openxmlformats.org/officeDocument/2006/relationships">
+<p:sld xmlns:a="http://schemas.openxmlformats.org/drawingml/2006/main" xmlns:r="http://schemas.openxmlformats.org/officeDocument/2006/relationships" xmlns:p="http://schemas.openxmlformats.org/presentationml/2006/main">
   <p:cSld>
     <p:spTree>
       <p:nvGrpSpPr>
@@ -18781,7 +18830,14 @@
         <p:cNvGrpSpPr/>
         <p:nvPr/>
       </p:nvGrpSpPr>
-      <p:grpSpPr/>
+      <p:grpSpPr>
+        <a:xfrm>
+          <a:off x="0" y="0"/>
+          <a:ext cx="0" cy="0"/>
+          <a:chOff x="0" y="0"/>
+          <a:chExt cx="0" cy="0"/>
+        </a:xfrm>
+      </p:grpSpPr>
       <p:sp>
         <p:nvSpPr>
           <p:cNvPr id="2" name="Rectangle 1"/>
@@ -18822,6 +18878,7 @@
           <a:lstStyle/>
           <a:p>
             <a:pPr algn="ctr"/>
+            <a:endParaRPr/>
           </a:p>
         </p:txBody>
       </p:sp>
@@ -18842,7 +18899,7 @@
           <a:noFill/>
         </p:spPr>
         <p:txBody>
-          <a:bodyPr wrap="square" anchor="t" lIns="0" rIns="0" tIns="0" bIns="0">
+          <a:bodyPr wrap="square" lIns="0" tIns="0" rIns="0" bIns="0" anchor="t">
             <a:spAutoFit/>
           </a:bodyPr>
           <a:lstStyle/>
@@ -18904,6 +18961,7 @@
           <a:lstStyle/>
           <a:p>
             <a:pPr algn="ctr"/>
+            <a:endParaRPr/>
           </a:p>
         </p:txBody>
       </p:sp>
@@ -18924,7 +18982,7 @@
           <a:noFill/>
         </p:spPr>
         <p:txBody>
-          <a:bodyPr wrap="square" anchor="t" lIns="0" rIns="0" tIns="0" bIns="0">
+          <a:bodyPr wrap="square" lIns="0" tIns="0" rIns="0" bIns="0" anchor="t">
             <a:spAutoFit/>
           </a:bodyPr>
           <a:lstStyle/>
@@ -18986,6 +19044,7 @@
           <a:lstStyle/>
           <a:p>
             <a:pPr algn="ctr"/>
+            <a:endParaRPr/>
           </a:p>
         </p:txBody>
       </p:sp>
@@ -19006,7 +19065,7 @@
           <a:noFill/>
         </p:spPr>
         <p:txBody>
-          <a:bodyPr wrap="square" anchor="t" lIns="0" rIns="0" tIns="0" bIns="0">
+          <a:bodyPr wrap="square" lIns="0" tIns="0" rIns="0" bIns="0" anchor="t">
             <a:spAutoFit/>
           </a:bodyPr>
           <a:lstStyle/>
@@ -19045,7 +19104,7 @@
           <a:noFill/>
         </p:spPr>
         <p:txBody>
-          <a:bodyPr wrap="square" anchor="t" lIns="0" rIns="0" tIns="0" bIns="0">
+          <a:bodyPr wrap="square" lIns="0" tIns="0" rIns="0" bIns="0" anchor="t">
             <a:spAutoFit/>
           </a:bodyPr>
           <a:lstStyle/>
@@ -19084,7 +19143,7 @@
           <a:noFill/>
         </p:spPr>
         <p:txBody>
-          <a:bodyPr wrap="square" anchor="t" lIns="0" rIns="0" tIns="0" bIns="0">
+          <a:bodyPr wrap="square" lIns="0" tIns="0" rIns="0" bIns="0" anchor="t">
             <a:spAutoFit/>
           </a:bodyPr>
           <a:lstStyle/>
@@ -19146,6 +19205,7 @@
           <a:lstStyle/>
           <a:p>
             <a:pPr algn="ctr"/>
+            <a:endParaRPr/>
           </a:p>
         </p:txBody>
       </p:sp>
@@ -19166,7 +19226,7 @@
           <a:noFill/>
         </p:spPr>
         <p:txBody>
-          <a:bodyPr wrap="square" anchor="t" lIns="0" rIns="0" tIns="0" bIns="0">
+          <a:bodyPr wrap="square" lIns="0" tIns="0" rIns="0" bIns="0" anchor="t">
             <a:spAutoFit/>
           </a:bodyPr>
           <a:lstStyle/>
@@ -19205,7 +19265,7 @@
           <a:noFill/>
         </p:spPr>
         <p:txBody>
-          <a:bodyPr wrap="square" anchor="t" lIns="0" rIns="0" tIns="0" bIns="0">
+          <a:bodyPr wrap="square" lIns="0" tIns="0" rIns="0" bIns="0" anchor="t">
             <a:spAutoFit/>
           </a:bodyPr>
           <a:lstStyle/>
@@ -19244,7 +19304,7 @@
           <a:noFill/>
         </p:spPr>
         <p:txBody>
-          <a:bodyPr wrap="square" anchor="t" lIns="0" rIns="0" tIns="0" bIns="0">
+          <a:bodyPr wrap="square" lIns="0" tIns="0" rIns="0" bIns="0" anchor="t">
             <a:spAutoFit/>
           </a:bodyPr>
           <a:lstStyle/>
@@ -19306,6 +19366,7 @@
           <a:lstStyle/>
           <a:p>
             <a:pPr algn="ctr"/>
+            <a:endParaRPr/>
           </a:p>
         </p:txBody>
       </p:sp>
@@ -19326,7 +19387,7 @@
           <a:noFill/>
         </p:spPr>
         <p:txBody>
-          <a:bodyPr wrap="square" anchor="t" lIns="0" rIns="0" tIns="0" bIns="0">
+          <a:bodyPr wrap="square" lIns="0" tIns="0" rIns="0" bIns="0" anchor="t">
             <a:spAutoFit/>
           </a:bodyPr>
           <a:lstStyle/>
@@ -19365,7 +19426,7 @@
           <a:noFill/>
         </p:spPr>
         <p:txBody>
-          <a:bodyPr wrap="square" anchor="t" lIns="0" rIns="0" tIns="0" bIns="0">
+          <a:bodyPr wrap="square" lIns="0" tIns="0" rIns="0" bIns="0" anchor="t">
             <a:spAutoFit/>
           </a:bodyPr>
           <a:lstStyle/>
@@ -19404,7 +19465,7 @@
           <a:noFill/>
         </p:spPr>
         <p:txBody>
-          <a:bodyPr wrap="square" anchor="t" lIns="0" rIns="0" tIns="0" bIns="0">
+          <a:bodyPr wrap="square" lIns="0" tIns="0" rIns="0" bIns="0" anchor="t">
             <a:spAutoFit/>
           </a:bodyPr>
           <a:lstStyle/>
@@ -19466,6 +19527,7 @@
           <a:lstStyle/>
           <a:p>
             <a:pPr algn="ctr"/>
+            <a:endParaRPr/>
           </a:p>
         </p:txBody>
       </p:sp>
@@ -19486,7 +19548,7 @@
           <a:noFill/>
         </p:spPr>
         <p:txBody>
-          <a:bodyPr wrap="square" anchor="t" lIns="0" rIns="0" tIns="0" bIns="0">
+          <a:bodyPr wrap="square" lIns="0" tIns="0" rIns="0" bIns="0" anchor="t">
             <a:spAutoFit/>
           </a:bodyPr>
           <a:lstStyle/>
@@ -19525,7 +19587,7 @@
           <a:noFill/>
         </p:spPr>
         <p:txBody>
-          <a:bodyPr wrap="square" anchor="t" lIns="0" rIns="0" tIns="0" bIns="0">
+          <a:bodyPr wrap="square" lIns="0" tIns="0" rIns="0" bIns="0" anchor="t">
             <a:spAutoFit/>
           </a:bodyPr>
           <a:lstStyle/>
@@ -19564,7 +19626,7 @@
           <a:noFill/>
         </p:spPr>
         <p:txBody>
-          <a:bodyPr wrap="square" anchor="t" lIns="0" rIns="0" tIns="0" bIns="0">
+          <a:bodyPr wrap="square" lIns="0" tIns="0" rIns="0" bIns="0" anchor="t">
             <a:spAutoFit/>
           </a:bodyPr>
           <a:lstStyle/>
@@ -19626,6 +19688,7 @@
           <a:lstStyle/>
           <a:p>
             <a:pPr algn="ctr"/>
+            <a:endParaRPr/>
           </a:p>
         </p:txBody>
       </p:sp>
@@ -19646,7 +19709,7 @@
           <a:noFill/>
         </p:spPr>
         <p:txBody>
-          <a:bodyPr wrap="square" anchor="t" lIns="0" rIns="0" tIns="0" bIns="0">
+          <a:bodyPr wrap="square" lIns="0" tIns="0" rIns="0" bIns="0" anchor="t">
             <a:spAutoFit/>
           </a:bodyPr>
           <a:lstStyle/>
@@ -19677,7 +19740,7 @@
 </file>
 
 <file path=ppt/slides/slide4.xml><?xml version="1.0" encoding="utf-8"?>
-<p:sld xmlns:a="http://schemas.openxmlformats.org/drawingml/2006/main" xmlns:p="http://schemas.openxmlformats.org/presentationml/2006/main" xmlns:r="http://schemas.openxmlformats.org/officeDocument/2006/relationships">
+<p:sld xmlns:a="http://schemas.openxmlformats.org/drawingml/2006/main" xmlns:r="http://schemas.openxmlformats.org/officeDocument/2006/relationships" xmlns:p="http://schemas.openxmlformats.org/presentationml/2006/main">
   <p:cSld>
     <p:spTree>
       <p:nvGrpSpPr>
@@ -19685,7 +19748,14 @@
         <p:cNvGrpSpPr/>
         <p:nvPr/>
       </p:nvGrpSpPr>
-      <p:grpSpPr/>
+      <p:grpSpPr>
+        <a:xfrm>
+          <a:off x="0" y="0"/>
+          <a:ext cx="0" cy="0"/>
+          <a:chOff x="0" y="0"/>
+          <a:chExt cx="0" cy="0"/>
+        </a:xfrm>
+      </p:grpSpPr>
       <p:sp>
         <p:nvSpPr>
           <p:cNvPr id="2" name="Rectangle 1"/>
@@ -19726,6 +19796,7 @@
           <a:lstStyle/>
           <a:p>
             <a:pPr algn="ctr"/>
+            <a:endParaRPr/>
           </a:p>
         </p:txBody>
       </p:sp>
@@ -19746,7 +19817,7 @@
           <a:noFill/>
         </p:spPr>
         <p:txBody>
-          <a:bodyPr wrap="square" anchor="t" lIns="0" rIns="0" tIns="0" bIns="0">
+          <a:bodyPr wrap="square" lIns="0" tIns="0" rIns="0" bIns="0" anchor="t">
             <a:spAutoFit/>
           </a:bodyPr>
           <a:lstStyle/>
@@ -19808,6 +19879,7 @@
           <a:lstStyle/>
           <a:p>
             <a:pPr algn="ctr"/>
+            <a:endParaRPr/>
           </a:p>
         </p:txBody>
       </p:sp>
@@ -19828,7 +19900,7 @@
           <a:noFill/>
         </p:spPr>
         <p:txBody>
-          <a:bodyPr wrap="square" anchor="t" lIns="0" rIns="0" tIns="0" bIns="0">
+          <a:bodyPr wrap="square" lIns="0" tIns="0" rIns="0" bIns="0" anchor="t">
             <a:spAutoFit/>
           </a:bodyPr>
           <a:lstStyle/>
@@ -19890,6 +19962,7 @@
           <a:lstStyle/>
           <a:p>
             <a:pPr algn="ctr"/>
+            <a:endParaRPr/>
           </a:p>
         </p:txBody>
       </p:sp>
@@ -19910,7 +19983,7 @@
           <a:noFill/>
         </p:spPr>
         <p:txBody>
-          <a:bodyPr wrap="square" anchor="t" lIns="0" rIns="0" tIns="0" bIns="0">
+          <a:bodyPr wrap="square" lIns="0" tIns="0" rIns="0" bIns="0" anchor="t">
             <a:spAutoFit/>
           </a:bodyPr>
           <a:lstStyle/>
@@ -19949,7 +20022,7 @@
           <a:noFill/>
         </p:spPr>
         <p:txBody>
-          <a:bodyPr wrap="square" anchor="t" lIns="0" rIns="0" tIns="0" bIns="0">
+          <a:bodyPr wrap="square" lIns="0" tIns="0" rIns="0" bIns="0" anchor="t">
             <a:spAutoFit/>
           </a:bodyPr>
           <a:lstStyle/>
@@ -20011,6 +20084,7 @@
           <a:lstStyle/>
           <a:p>
             <a:pPr algn="ctr"/>
+            <a:endParaRPr/>
           </a:p>
         </p:txBody>
       </p:sp>
@@ -20031,7 +20105,7 @@
           <a:noFill/>
         </p:spPr>
         <p:txBody>
-          <a:bodyPr wrap="square" anchor="t" lIns="0" rIns="0" tIns="0" bIns="0">
+          <a:bodyPr wrap="square" lIns="0" tIns="0" rIns="0" bIns="0" anchor="t">
             <a:spAutoFit/>
           </a:bodyPr>
           <a:lstStyle/>
@@ -20070,7 +20144,7 @@
           <a:noFill/>
         </p:spPr>
         <p:txBody>
-          <a:bodyPr wrap="square" anchor="t" lIns="0" rIns="0" tIns="0" bIns="0">
+          <a:bodyPr wrap="square" lIns="0" tIns="0" rIns="0" bIns="0" anchor="t">
             <a:spAutoFit/>
           </a:bodyPr>
           <a:lstStyle/>
@@ -20132,6 +20206,7 @@
           <a:lstStyle/>
           <a:p>
             <a:pPr algn="ctr"/>
+            <a:endParaRPr/>
           </a:p>
         </p:txBody>
       </p:sp>
@@ -20152,7 +20227,7 @@
           <a:noFill/>
         </p:spPr>
         <p:txBody>
-          <a:bodyPr wrap="square" anchor="t" lIns="0" rIns="0" tIns="0" bIns="0">
+          <a:bodyPr wrap="square" lIns="0" tIns="0" rIns="0" bIns="0" anchor="t">
             <a:spAutoFit/>
           </a:bodyPr>
           <a:lstStyle/>
@@ -20191,7 +20266,7 @@
           <a:noFill/>
         </p:spPr>
         <p:txBody>
-          <a:bodyPr wrap="square" anchor="t" lIns="0" rIns="0" tIns="0" bIns="0">
+          <a:bodyPr wrap="square" lIns="0" tIns="0" rIns="0" bIns="0" anchor="t">
             <a:spAutoFit/>
           </a:bodyPr>
           <a:lstStyle/>
@@ -20238,7 +20313,7 @@
 </file>
 
 <file path=ppt/slides/slide5.xml><?xml version="1.0" encoding="utf-8"?>
-<p:sld xmlns:a="http://schemas.openxmlformats.org/drawingml/2006/main" xmlns:p="http://schemas.openxmlformats.org/presentationml/2006/main" xmlns:r="http://schemas.openxmlformats.org/officeDocument/2006/relationships">
+<p:sld xmlns:a="http://schemas.openxmlformats.org/drawingml/2006/main" xmlns:r="http://schemas.openxmlformats.org/officeDocument/2006/relationships" xmlns:p="http://schemas.openxmlformats.org/presentationml/2006/main">
   <p:cSld>
     <p:spTree>
       <p:nvGrpSpPr>
@@ -20246,7 +20321,14 @@
         <p:cNvGrpSpPr/>
         <p:nvPr/>
       </p:nvGrpSpPr>
-      <p:grpSpPr/>
+      <p:grpSpPr>
+        <a:xfrm>
+          <a:off x="0" y="0"/>
+          <a:ext cx="0" cy="0"/>
+          <a:chOff x="0" y="0"/>
+          <a:chExt cx="0" cy="0"/>
+        </a:xfrm>
+      </p:grpSpPr>
       <p:sp>
         <p:nvSpPr>
           <p:cNvPr id="2" name="Rectangle 1"/>
@@ -20287,6 +20369,7 @@
           <a:lstStyle/>
           <a:p>
             <a:pPr algn="ctr"/>
+            <a:endParaRPr/>
           </a:p>
         </p:txBody>
       </p:sp>
@@ -20307,7 +20390,7 @@
           <a:noFill/>
         </p:spPr>
         <p:txBody>
-          <a:bodyPr wrap="square" anchor="t" lIns="0" rIns="0" tIns="0" bIns="0">
+          <a:bodyPr wrap="square" lIns="0" tIns="0" rIns="0" bIns="0" anchor="t">
             <a:spAutoFit/>
           </a:bodyPr>
           <a:lstStyle/>
@@ -20369,6 +20452,7 @@
           <a:lstStyle/>
           <a:p>
             <a:pPr algn="ctr"/>
+            <a:endParaRPr/>
           </a:p>
         </p:txBody>
       </p:sp>
@@ -20389,7 +20473,7 @@
           <a:noFill/>
         </p:spPr>
         <p:txBody>
-          <a:bodyPr wrap="square" anchor="t" lIns="0" rIns="0" tIns="0" bIns="0">
+          <a:bodyPr wrap="square" lIns="0" tIns="0" rIns="0" bIns="0" anchor="t">
             <a:spAutoFit/>
           </a:bodyPr>
           <a:lstStyle/>
@@ -20453,6 +20537,7 @@
           <a:lstStyle/>
           <a:p>
             <a:pPr algn="ctr"/>
+            <a:endParaRPr/>
           </a:p>
         </p:txBody>
       </p:sp>
@@ -20496,6 +20581,7 @@
           <a:lstStyle/>
           <a:p>
             <a:pPr algn="ctr"/>
+            <a:endParaRPr/>
           </a:p>
         </p:txBody>
       </p:sp>
@@ -20516,7 +20602,7 @@
           <a:noFill/>
         </p:spPr>
         <p:txBody>
-          <a:bodyPr wrap="square" anchor="t" lIns="0" rIns="0" tIns="0" bIns="0">
+          <a:bodyPr wrap="square" lIns="0" tIns="0" rIns="0" bIns="0" anchor="t">
             <a:spAutoFit/>
           </a:bodyPr>
           <a:lstStyle/>
@@ -20555,7 +20641,7 @@
           <a:noFill/>
         </p:spPr>
         <p:txBody>
-          <a:bodyPr wrap="square" anchor="t" lIns="0" rIns="0" tIns="0" bIns="0">
+          <a:bodyPr wrap="square" lIns="0" tIns="0" rIns="0" bIns="0" anchor="t">
             <a:spAutoFit/>
           </a:bodyPr>
           <a:lstStyle/>
@@ -20635,6 +20721,7 @@
           <a:lstStyle/>
           <a:p>
             <a:pPr algn="ctr"/>
+            <a:endParaRPr/>
           </a:p>
         </p:txBody>
       </p:sp>
@@ -20678,6 +20765,7 @@
           <a:lstStyle/>
           <a:p>
             <a:pPr algn="ctr"/>
+            <a:endParaRPr/>
           </a:p>
         </p:txBody>
       </p:sp>
@@ -20698,7 +20786,7 @@
           <a:noFill/>
         </p:spPr>
         <p:txBody>
-          <a:bodyPr wrap="square" anchor="t" lIns="0" rIns="0" tIns="0" bIns="0">
+          <a:bodyPr wrap="square" lIns="0" tIns="0" rIns="0" bIns="0" anchor="t">
             <a:spAutoFit/>
           </a:bodyPr>
           <a:lstStyle/>
@@ -20737,7 +20825,7 @@
           <a:noFill/>
         </p:spPr>
         <p:txBody>
-          <a:bodyPr wrap="square" anchor="t" lIns="0" rIns="0" tIns="0" bIns="0">
+          <a:bodyPr wrap="square" lIns="0" tIns="0" rIns="0" bIns="0" anchor="t">
             <a:spAutoFit/>
           </a:bodyPr>
           <a:lstStyle/>
@@ -20817,6 +20905,7 @@
           <a:lstStyle/>
           <a:p>
             <a:pPr algn="ctr"/>
+            <a:endParaRPr/>
           </a:p>
         </p:txBody>
       </p:sp>
@@ -20860,6 +20949,7 @@
           <a:lstStyle/>
           <a:p>
             <a:pPr algn="ctr"/>
+            <a:endParaRPr/>
           </a:p>
         </p:txBody>
       </p:sp>
@@ -20880,7 +20970,7 @@
           <a:noFill/>
         </p:spPr>
         <p:txBody>
-          <a:bodyPr wrap="square" anchor="t" lIns="0" rIns="0" tIns="0" bIns="0">
+          <a:bodyPr wrap="square" lIns="0" tIns="0" rIns="0" bIns="0" anchor="t">
             <a:spAutoFit/>
           </a:bodyPr>
           <a:lstStyle/>
@@ -20919,7 +21009,7 @@
           <a:noFill/>
         </p:spPr>
         <p:txBody>
-          <a:bodyPr wrap="square" anchor="t" lIns="0" rIns="0" tIns="0" bIns="0">
+          <a:bodyPr wrap="square" lIns="0" tIns="0" rIns="0" bIns="0" anchor="t">
             <a:spAutoFit/>
           </a:bodyPr>
           <a:lstStyle/>
@@ -20958,7 +21048,7 @@
           <a:noFill/>
         </p:spPr>
         <p:txBody>
-          <a:bodyPr wrap="square" anchor="t" lIns="0" rIns="0" tIns="0" bIns="0">
+          <a:bodyPr wrap="square" lIns="0" tIns="0" rIns="0" bIns="0" anchor="t">
             <a:spAutoFit/>
           </a:bodyPr>
           <a:lstStyle/>
@@ -20989,7 +21079,7 @@
 </file>
 
 <file path=ppt/slides/slide6.xml><?xml version="1.0" encoding="utf-8"?>
-<p:sld xmlns:a="http://schemas.openxmlformats.org/drawingml/2006/main" xmlns:p="http://schemas.openxmlformats.org/presentationml/2006/main" xmlns:r="http://schemas.openxmlformats.org/officeDocument/2006/relationships">
+<p:sld xmlns:a="http://schemas.openxmlformats.org/drawingml/2006/main" xmlns:r="http://schemas.openxmlformats.org/officeDocument/2006/relationships" xmlns:p="http://schemas.openxmlformats.org/presentationml/2006/main">
   <p:cSld>
     <p:spTree>
       <p:nvGrpSpPr>
@@ -20997,7 +21087,14 @@
         <p:cNvGrpSpPr/>
         <p:nvPr/>
       </p:nvGrpSpPr>
-      <p:grpSpPr/>
+      <p:grpSpPr>
+        <a:xfrm>
+          <a:off x="0" y="0"/>
+          <a:ext cx="0" cy="0"/>
+          <a:chOff x="0" y="0"/>
+          <a:chExt cx="0" cy="0"/>
+        </a:xfrm>
+      </p:grpSpPr>
       <p:sp>
         <p:nvSpPr>
           <p:cNvPr id="2" name="Rectangle 1"/>
@@ -21038,6 +21135,7 @@
           <a:lstStyle/>
           <a:p>
             <a:pPr algn="ctr"/>
+            <a:endParaRPr/>
           </a:p>
         </p:txBody>
       </p:sp>
@@ -21058,7 +21156,7 @@
           <a:noFill/>
         </p:spPr>
         <p:txBody>
-          <a:bodyPr wrap="square" anchor="t" lIns="0" rIns="0" tIns="0" bIns="0">
+          <a:bodyPr wrap="square" lIns="0" tIns="0" rIns="0" bIns="0" anchor="t">
             <a:spAutoFit/>
           </a:bodyPr>
           <a:lstStyle/>
@@ -21120,6 +21218,7 @@
           <a:lstStyle/>
           <a:p>
             <a:pPr algn="ctr"/>
+            <a:endParaRPr/>
           </a:p>
         </p:txBody>
       </p:sp>
@@ -21140,7 +21239,7 @@
           <a:noFill/>
         </p:spPr>
         <p:txBody>
-          <a:bodyPr wrap="square" anchor="t" lIns="0" rIns="0" tIns="0" bIns="0">
+          <a:bodyPr wrap="square" lIns="0" tIns="0" rIns="0" bIns="0" anchor="t">
             <a:spAutoFit/>
           </a:bodyPr>
           <a:lstStyle/>
@@ -21179,7 +21278,7 @@
           <a:noFill/>
         </p:spPr>
         <p:txBody>
-          <a:bodyPr wrap="square" anchor="t" lIns="0" rIns="0" tIns="0" bIns="0">
+          <a:bodyPr wrap="square" lIns="0" tIns="0" rIns="0" bIns="0" anchor="t">
             <a:spAutoFit/>
           </a:bodyPr>
           <a:lstStyle/>
@@ -21243,6 +21342,7 @@
           <a:lstStyle/>
           <a:p>
             <a:pPr algn="ctr"/>
+            <a:endParaRPr/>
           </a:p>
         </p:txBody>
       </p:sp>
@@ -21263,7 +21363,7 @@
           <a:noFill/>
         </p:spPr>
         <p:txBody>
-          <a:bodyPr wrap="square" anchor="t" lIns="0" rIns="0" tIns="0" bIns="0">
+          <a:bodyPr wrap="square" lIns="0" tIns="0" rIns="0" bIns="0" anchor="t">
             <a:spAutoFit/>
           </a:bodyPr>
           <a:lstStyle/>
@@ -21327,6 +21427,7 @@
           <a:lstStyle/>
           <a:p>
             <a:pPr algn="ctr"/>
+            <a:endParaRPr/>
           </a:p>
         </p:txBody>
       </p:sp>
@@ -21347,7 +21448,7 @@
           <a:noFill/>
         </p:spPr>
         <p:txBody>
-          <a:bodyPr wrap="square" anchor="t" lIns="0" rIns="0" tIns="0" bIns="0">
+          <a:bodyPr wrap="square" lIns="0" tIns="0" rIns="0" bIns="0" anchor="t">
             <a:spAutoFit/>
           </a:bodyPr>
           <a:lstStyle/>
@@ -21411,6 +21512,7 @@
           <a:lstStyle/>
           <a:p>
             <a:pPr algn="ctr"/>
+            <a:endParaRPr/>
           </a:p>
         </p:txBody>
       </p:sp>
@@ -21431,7 +21533,7 @@
           <a:noFill/>
         </p:spPr>
         <p:txBody>
-          <a:bodyPr wrap="square" anchor="t" lIns="0" rIns="0" tIns="0" bIns="0">
+          <a:bodyPr wrap="square" lIns="0" tIns="0" rIns="0" bIns="0" anchor="t">
             <a:spAutoFit/>
           </a:bodyPr>
           <a:lstStyle/>
@@ -21495,6 +21597,7 @@
           <a:lstStyle/>
           <a:p>
             <a:pPr algn="ctr"/>
+            <a:endParaRPr/>
           </a:p>
         </p:txBody>
       </p:sp>
@@ -21515,7 +21618,7 @@
           <a:noFill/>
         </p:spPr>
         <p:txBody>
-          <a:bodyPr wrap="square" anchor="t" lIns="0" rIns="0" tIns="0" bIns="0">
+          <a:bodyPr wrap="square" lIns="0" tIns="0" rIns="0" bIns="0" anchor="t">
             <a:spAutoFit/>
           </a:bodyPr>
           <a:lstStyle/>
@@ -21579,6 +21682,7 @@
           <a:lstStyle/>
           <a:p>
             <a:pPr algn="ctr"/>
+            <a:endParaRPr/>
           </a:p>
         </p:txBody>
       </p:sp>
@@ -21599,7 +21703,7 @@
           <a:noFill/>
         </p:spPr>
         <p:txBody>
-          <a:bodyPr wrap="square" anchor="t" lIns="0" rIns="0" tIns="0" bIns="0">
+          <a:bodyPr wrap="square" lIns="0" tIns="0" rIns="0" bIns="0" anchor="t">
             <a:spAutoFit/>
           </a:bodyPr>
           <a:lstStyle/>
@@ -21663,6 +21767,7 @@
           <a:lstStyle/>
           <a:p>
             <a:pPr algn="ctr"/>
+            <a:endParaRPr/>
           </a:p>
         </p:txBody>
       </p:sp>
@@ -21683,7 +21788,7 @@
           <a:noFill/>
         </p:spPr>
         <p:txBody>
-          <a:bodyPr wrap="square" anchor="t" lIns="0" rIns="0" tIns="0" bIns="0">
+          <a:bodyPr wrap="square" lIns="0" tIns="0" rIns="0" bIns="0" anchor="t">
             <a:spAutoFit/>
           </a:bodyPr>
           <a:lstStyle/>
@@ -21722,7 +21827,7 @@
           <a:noFill/>
         </p:spPr>
         <p:txBody>
-          <a:bodyPr wrap="square" anchor="t" lIns="0" rIns="0" tIns="0" bIns="0">
+          <a:bodyPr wrap="square" lIns="0" tIns="0" rIns="0" bIns="0" anchor="t">
             <a:spAutoFit/>
           </a:bodyPr>
           <a:lstStyle/>
@@ -21753,7 +21858,7 @@
 </file>
 
 <file path=ppt/slides/slide7.xml><?xml version="1.0" encoding="utf-8"?>
-<p:sld xmlns:a="http://schemas.openxmlformats.org/drawingml/2006/main" xmlns:p="http://schemas.openxmlformats.org/presentationml/2006/main" xmlns:r="http://schemas.openxmlformats.org/officeDocument/2006/relationships">
+<p:sld xmlns:a="http://schemas.openxmlformats.org/drawingml/2006/main" xmlns:r="http://schemas.openxmlformats.org/officeDocument/2006/relationships" xmlns:p="http://schemas.openxmlformats.org/presentationml/2006/main">
   <p:cSld>
     <p:spTree>
       <p:nvGrpSpPr>
@@ -21761,7 +21866,14 @@
         <p:cNvGrpSpPr/>
         <p:nvPr/>
       </p:nvGrpSpPr>
-      <p:grpSpPr/>
+      <p:grpSpPr>
+        <a:xfrm>
+          <a:off x="0" y="0"/>
+          <a:ext cx="0" cy="0"/>
+          <a:chOff x="0" y="0"/>
+          <a:chExt cx="0" cy="0"/>
+        </a:xfrm>
+      </p:grpSpPr>
       <p:sp>
         <p:nvSpPr>
           <p:cNvPr id="2" name="Rectangle 1"/>
@@ -21802,6 +21914,7 @@
           <a:lstStyle/>
           <a:p>
             <a:pPr algn="ctr"/>
+            <a:endParaRPr/>
           </a:p>
         </p:txBody>
       </p:sp>
@@ -21822,7 +21935,7 @@
           <a:noFill/>
         </p:spPr>
         <p:txBody>
-          <a:bodyPr wrap="square" anchor="t" lIns="0" rIns="0" tIns="0" bIns="0">
+          <a:bodyPr wrap="square" lIns="0" tIns="0" rIns="0" bIns="0" anchor="t">
             <a:spAutoFit/>
           </a:bodyPr>
           <a:lstStyle/>
@@ -21884,6 +21997,7 @@
           <a:lstStyle/>
           <a:p>
             <a:pPr algn="ctr"/>
+            <a:endParaRPr/>
           </a:p>
         </p:txBody>
       </p:sp>
@@ -21904,7 +22018,7 @@
           <a:noFill/>
         </p:spPr>
         <p:txBody>
-          <a:bodyPr wrap="square" anchor="t" lIns="0" rIns="0" tIns="0" bIns="0">
+          <a:bodyPr wrap="square" lIns="0" tIns="0" rIns="0" bIns="0" anchor="t">
             <a:spAutoFit/>
           </a:bodyPr>
           <a:lstStyle/>
@@ -21943,7 +22057,7 @@
           <a:noFill/>
         </p:spPr>
         <p:txBody>
-          <a:bodyPr wrap="square" anchor="t" lIns="0" rIns="0" tIns="0" bIns="0">
+          <a:bodyPr wrap="square" lIns="0" tIns="0" rIns="0" bIns="0" anchor="t">
             <a:spAutoFit/>
           </a:bodyPr>
           <a:lstStyle/>
@@ -21982,7 +22096,7 @@
           <a:noFill/>
         </p:spPr>
         <p:txBody>
-          <a:bodyPr wrap="square" anchor="t" lIns="0" rIns="0" tIns="0" bIns="0">
+          <a:bodyPr wrap="square" lIns="0" tIns="0" rIns="0" bIns="0" anchor="t">
             <a:spAutoFit/>
           </a:bodyPr>
           <a:lstStyle/>
@@ -22044,6 +22158,7 @@
           <a:lstStyle/>
           <a:p>
             <a:pPr algn="ctr"/>
+            <a:endParaRPr/>
           </a:p>
         </p:txBody>
       </p:sp>
@@ -22056,7 +22171,7 @@
 </file>
 
 <file path=ppt/slides/slide8.xml><?xml version="1.0" encoding="utf-8"?>
-<p:sld xmlns:a="http://schemas.openxmlformats.org/drawingml/2006/main" xmlns:p="http://schemas.openxmlformats.org/presentationml/2006/main" xmlns:r="http://schemas.openxmlformats.org/officeDocument/2006/relationships">
+<p:sld xmlns:a="http://schemas.openxmlformats.org/drawingml/2006/main" xmlns:r="http://schemas.openxmlformats.org/officeDocument/2006/relationships" xmlns:p="http://schemas.openxmlformats.org/presentationml/2006/main">
   <p:cSld>
     <p:spTree>
       <p:nvGrpSpPr>
@@ -22064,7 +22179,14 @@
         <p:cNvGrpSpPr/>
         <p:nvPr/>
       </p:nvGrpSpPr>
-      <p:grpSpPr/>
+      <p:grpSpPr>
+        <a:xfrm>
+          <a:off x="0" y="0"/>
+          <a:ext cx="0" cy="0"/>
+          <a:chOff x="0" y="0"/>
+          <a:chExt cx="0" cy="0"/>
+        </a:xfrm>
+      </p:grpSpPr>
       <p:sp>
         <p:nvSpPr>
           <p:cNvPr id="2" name="Rectangle 1"/>
@@ -22105,6 +22227,7 @@
           <a:lstStyle/>
           <a:p>
             <a:pPr algn="ctr"/>
+            <a:endParaRPr/>
           </a:p>
         </p:txBody>
       </p:sp>
@@ -22125,7 +22248,7 @@
           <a:noFill/>
         </p:spPr>
         <p:txBody>
-          <a:bodyPr wrap="square" anchor="t" lIns="0" rIns="0" tIns="0" bIns="0">
+          <a:bodyPr wrap="square" lIns="0" tIns="0" rIns="0" bIns="0" anchor="t">
             <a:spAutoFit/>
           </a:bodyPr>
           <a:lstStyle/>
@@ -22187,6 +22310,7 @@
           <a:lstStyle/>
           <a:p>
             <a:pPr algn="ctr"/>
+            <a:endParaRPr/>
           </a:p>
         </p:txBody>
       </p:sp>
@@ -22207,7 +22331,7 @@
           <a:noFill/>
         </p:spPr>
         <p:txBody>
-          <a:bodyPr wrap="square" anchor="t" lIns="0" rIns="0" tIns="0" bIns="0">
+          <a:bodyPr wrap="square" lIns="0" tIns="0" rIns="0" bIns="0" anchor="t">
             <a:spAutoFit/>
           </a:bodyPr>
           <a:lstStyle/>
@@ -22269,6 +22393,7 @@
           <a:lstStyle/>
           <a:p>
             <a:pPr algn="ctr"/>
+            <a:endParaRPr/>
           </a:p>
         </p:txBody>
       </p:sp>
@@ -22289,7 +22414,7 @@
           <a:noFill/>
         </p:spPr>
         <p:txBody>
-          <a:bodyPr wrap="square" anchor="t" lIns="0" rIns="0" tIns="0" bIns="0">
+          <a:bodyPr wrap="square" lIns="0" tIns="0" rIns="0" bIns="0" anchor="t">
             <a:spAutoFit/>
           </a:bodyPr>
           <a:lstStyle/>
@@ -22328,7 +22453,7 @@
           <a:noFill/>
         </p:spPr>
         <p:txBody>
-          <a:bodyPr wrap="square" anchor="t" lIns="0" rIns="0" tIns="0" bIns="0">
+          <a:bodyPr wrap="square" lIns="0" tIns="0" rIns="0" bIns="0" anchor="t">
             <a:spAutoFit/>
           </a:bodyPr>
           <a:lstStyle/>
@@ -22383,7 +22508,7 @@
           <a:noFill/>
         </p:spPr>
         <p:txBody>
-          <a:bodyPr wrap="square" anchor="t" lIns="0" rIns="0" tIns="0" bIns="0">
+          <a:bodyPr wrap="square" lIns="0" tIns="0" rIns="0" bIns="0" anchor="t">
             <a:spAutoFit/>
           </a:bodyPr>
           <a:lstStyle/>
@@ -22445,6 +22570,7 @@
           <a:lstStyle/>
           <a:p>
             <a:pPr algn="ctr"/>
+            <a:endParaRPr/>
           </a:p>
         </p:txBody>
       </p:sp>
@@ -22465,7 +22591,7 @@
           <a:noFill/>
         </p:spPr>
         <p:txBody>
-          <a:bodyPr wrap="square" anchor="t" lIns="0" rIns="0" tIns="0" bIns="0">
+          <a:bodyPr wrap="square" lIns="0" tIns="0" rIns="0" bIns="0" anchor="t">
             <a:spAutoFit/>
           </a:bodyPr>
           <a:lstStyle/>
@@ -22504,7 +22630,7 @@
           <a:noFill/>
         </p:spPr>
         <p:txBody>
-          <a:bodyPr wrap="square" anchor="t" lIns="0" rIns="0" tIns="0" bIns="0">
+          <a:bodyPr wrap="square" lIns="0" tIns="0" rIns="0" bIns="0" anchor="t">
             <a:spAutoFit/>
           </a:bodyPr>
           <a:lstStyle/>
@@ -22566,6 +22692,7 @@
           <a:lstStyle/>
           <a:p>
             <a:pPr algn="ctr"/>
+            <a:endParaRPr/>
           </a:p>
         </p:txBody>
       </p:sp>
@@ -22586,7 +22713,7 @@
           <a:noFill/>
         </p:spPr>
         <p:txBody>
-          <a:bodyPr wrap="square" anchor="t" lIns="0" rIns="0" tIns="0" bIns="0">
+          <a:bodyPr wrap="square" lIns="0" tIns="0" rIns="0" bIns="0" anchor="t">
             <a:spAutoFit/>
           </a:bodyPr>
           <a:lstStyle/>
@@ -22625,7 +22752,7 @@
           <a:noFill/>
         </p:spPr>
         <p:txBody>
-          <a:bodyPr wrap="square" anchor="t" lIns="0" rIns="0" tIns="0" bIns="0">
+          <a:bodyPr wrap="square" lIns="0" tIns="0" rIns="0" bIns="0" anchor="t">
             <a:spAutoFit/>
           </a:bodyPr>
           <a:lstStyle/>
@@ -22687,6 +22814,7 @@
           <a:lstStyle/>
           <a:p>
             <a:pPr algn="ctr"/>
+            <a:endParaRPr/>
           </a:p>
         </p:txBody>
       </p:sp>
@@ -22707,7 +22835,7 @@
           <a:noFill/>
         </p:spPr>
         <p:txBody>
-          <a:bodyPr wrap="square" anchor="t" lIns="0" rIns="0" tIns="0" bIns="0">
+          <a:bodyPr wrap="square" lIns="0" tIns="0" rIns="0" bIns="0" anchor="t">
             <a:spAutoFit/>
           </a:bodyPr>
           <a:lstStyle/>
@@ -22738,7 +22866,7 @@
 </file>
 
 <file path=ppt/slides/slide9.xml><?xml version="1.0" encoding="utf-8"?>
-<p:sld xmlns:a="http://schemas.openxmlformats.org/drawingml/2006/main" xmlns:p="http://schemas.openxmlformats.org/presentationml/2006/main" xmlns:r="http://schemas.openxmlformats.org/officeDocument/2006/relationships">
+<p:sld xmlns:a="http://schemas.openxmlformats.org/drawingml/2006/main" xmlns:r="http://schemas.openxmlformats.org/officeDocument/2006/relationships" xmlns:p="http://schemas.openxmlformats.org/presentationml/2006/main">
   <p:cSld>
     <p:spTree>
       <p:nvGrpSpPr>
@@ -22746,7 +22874,14 @@
         <p:cNvGrpSpPr/>
         <p:nvPr/>
       </p:nvGrpSpPr>
-      <p:grpSpPr/>
+      <p:grpSpPr>
+        <a:xfrm>
+          <a:off x="0" y="0"/>
+          <a:ext cx="0" cy="0"/>
+          <a:chOff x="0" y="0"/>
+          <a:chExt cx="0" cy="0"/>
+        </a:xfrm>
+      </p:grpSpPr>
       <p:sp>
         <p:nvSpPr>
           <p:cNvPr id="2" name="Rectangle 1"/>
@@ -22787,6 +22922,7 @@
           <a:lstStyle/>
           <a:p>
             <a:pPr algn="ctr"/>
+            <a:endParaRPr/>
           </a:p>
         </p:txBody>
       </p:sp>
@@ -22807,7 +22943,7 @@
           <a:noFill/>
         </p:spPr>
         <p:txBody>
-          <a:bodyPr wrap="square" anchor="t" lIns="0" rIns="0" tIns="0" bIns="0">
+          <a:bodyPr wrap="square" lIns="0" tIns="0" rIns="0" bIns="0" anchor="t">
             <a:spAutoFit/>
           </a:bodyPr>
           <a:lstStyle/>
@@ -22869,6 +23005,7 @@
           <a:lstStyle/>
           <a:p>
             <a:pPr algn="ctr"/>
+            <a:endParaRPr/>
           </a:p>
         </p:txBody>
       </p:sp>
@@ -22889,7 +23026,7 @@
           <a:noFill/>
         </p:spPr>
         <p:txBody>
-          <a:bodyPr wrap="square" anchor="t" lIns="0" rIns="0" tIns="0" bIns="0">
+          <a:bodyPr wrap="square" lIns="0" tIns="0" rIns="0" bIns="0" anchor="t">
             <a:spAutoFit/>
           </a:bodyPr>
           <a:lstStyle/>
@@ -22928,7 +23065,7 @@
           <a:noFill/>
         </p:spPr>
         <p:txBody>
-          <a:bodyPr wrap="square" anchor="t" lIns="0" rIns="0" tIns="0" bIns="0">
+          <a:bodyPr wrap="square" lIns="0" tIns="0" rIns="0" bIns="0" anchor="t">
             <a:spAutoFit/>
           </a:bodyPr>
           <a:lstStyle/>
@@ -23289,44 +23426,44 @@
         <a:sysClr val="window" lastClr="FFFFFF"/>
       </a:lt1>
       <a:dk2>
-        <a:srgbClr val="1F497D"/>
+        <a:srgbClr val="0E2841"/>
       </a:dk2>
       <a:lt2>
-        <a:srgbClr val="EEECE1"/>
+        <a:srgbClr val="E8E8E8"/>
       </a:lt2>
       <a:accent1>
-        <a:srgbClr val="4F81BD"/>
+        <a:srgbClr val="156082"/>
       </a:accent1>
       <a:accent2>
-        <a:srgbClr val="C0504D"/>
+        <a:srgbClr val="E97132"/>
       </a:accent2>
       <a:accent3>
-        <a:srgbClr val="9BBB59"/>
+        <a:srgbClr val="196B24"/>
       </a:accent3>
       <a:accent4>
-        <a:srgbClr val="8064A2"/>
+        <a:srgbClr val="0F9ED5"/>
       </a:accent4>
       <a:accent5>
-        <a:srgbClr val="4BACC6"/>
+        <a:srgbClr val="A02B93"/>
       </a:accent5>
       <a:accent6>
-        <a:srgbClr val="F79646"/>
+        <a:srgbClr val="4EA72E"/>
       </a:accent6>
       <a:hlink>
-        <a:srgbClr val="0000FF"/>
+        <a:srgbClr val="467886"/>
       </a:hlink>
       <a:folHlink>
-        <a:srgbClr val="800080"/>
+        <a:srgbClr val="96607D"/>
       </a:folHlink>
     </a:clrScheme>
     <a:fontScheme name="Office">
       <a:majorFont>
-        <a:latin typeface="Calibri"/>
+        <a:latin typeface="Aptos Display" panose="02110004020202020204"/>
         <a:ea typeface=""/>
         <a:cs typeface=""/>
-        <a:font script="Jpan" typeface="ＭＳ Ｐゴシック"/>
+        <a:font script="Jpan" typeface="游ゴシック Light"/>
         <a:font script="Hang" typeface="맑은 고딕"/>
-        <a:font script="Hans" typeface="宋体"/>
+        <a:font script="Hans" typeface="等线 Light"/>
         <a:font script="Hant" typeface="新細明體"/>
         <a:font script="Arab" typeface="Times New Roman"/>
         <a:font script="Hebr" typeface="Times New Roman"/>
@@ -23354,14 +23491,31 @@
         <a:font script="Viet" typeface="Times New Roman"/>
         <a:font script="Uigh" typeface="Microsoft Uighur"/>
         <a:font script="Geor" typeface="Sylfaen"/>
+        <a:font script="Armn" typeface="Arial"/>
+        <a:font script="Bugi" typeface="Leelawadee UI"/>
+        <a:font script="Bopo" typeface="Microsoft JhengHei"/>
+        <a:font script="Java" typeface="Javanese Text"/>
+        <a:font script="Lisu" typeface="Segoe UI"/>
+        <a:font script="Mymr" typeface="Myanmar Text"/>
+        <a:font script="Nkoo" typeface="Ebrima"/>
+        <a:font script="Olck" typeface="Nirmala UI"/>
+        <a:font script="Osma" typeface="Ebrima"/>
+        <a:font script="Phag" typeface="Phagspa"/>
+        <a:font script="Syrn" typeface="Estrangelo Edessa"/>
+        <a:font script="Syrj" typeface="Estrangelo Edessa"/>
+        <a:font script="Syre" typeface="Estrangelo Edessa"/>
+        <a:font script="Sora" typeface="Nirmala UI"/>
+        <a:font script="Tale" typeface="Microsoft Tai Le"/>
+        <a:font script="Talu" typeface="Microsoft New Tai Lue"/>
+        <a:font script="Tfng" typeface="Ebrima"/>
       </a:majorFont>
       <a:minorFont>
-        <a:latin typeface="Calibri"/>
+        <a:latin typeface="Aptos" panose="02110004020202020204"/>
         <a:ea typeface=""/>
         <a:cs typeface=""/>
-        <a:font script="Jpan" typeface="ＭＳ Ｐゴシック"/>
+        <a:font script="Jpan" typeface="游ゴシック"/>
         <a:font script="Hang" typeface="맑은 고딕"/>
-        <a:font script="Hans" typeface="宋体"/>
+        <a:font script="Hans" typeface="等线"/>
         <a:font script="Hant" typeface="新細明體"/>
         <a:font script="Arab" typeface="Arial"/>
         <a:font script="Hebr" typeface="Arial"/>
@@ -23389,6 +23543,23 @@
         <a:font script="Viet" typeface="Arial"/>
         <a:font script="Uigh" typeface="Microsoft Uighur"/>
         <a:font script="Geor" typeface="Sylfaen"/>
+        <a:font script="Armn" typeface="Arial"/>
+        <a:font script="Bugi" typeface="Leelawadee UI"/>
+        <a:font script="Bopo" typeface="Microsoft JhengHei"/>
+        <a:font script="Java" typeface="Javanese Text"/>
+        <a:font script="Lisu" typeface="Segoe UI"/>
+        <a:font script="Mymr" typeface="Myanmar Text"/>
+        <a:font script="Nkoo" typeface="Ebrima"/>
+        <a:font script="Olck" typeface="Nirmala UI"/>
+        <a:font script="Osma" typeface="Ebrima"/>
+        <a:font script="Phag" typeface="Phagspa"/>
+        <a:font script="Syrn" typeface="Estrangelo Edessa"/>
+        <a:font script="Syrj" typeface="Estrangelo Edessa"/>
+        <a:font script="Syre" typeface="Estrangelo Edessa"/>
+        <a:font script="Sora" typeface="Nirmala UI"/>
+        <a:font script="Tale" typeface="Microsoft Tai Le"/>
+        <a:font script="Talu" typeface="Microsoft New Tai Lue"/>
+        <a:font script="Tfng" typeface="Ebrima"/>
       </a:minorFont>
     </a:fontScheme>
     <a:fmtScheme name="Office">
@@ -23400,180 +23571,136 @@
           <a:gsLst>
             <a:gs pos="0">
               <a:schemeClr val="phClr">
-                <a:tint val="50000"/>
-                <a:satMod val="300000"/>
+                <a:lumMod val="110000"/>
+                <a:satMod val="105000"/>
+                <a:tint val="67000"/>
               </a:schemeClr>
             </a:gs>
-            <a:gs pos="35000">
+            <a:gs pos="50000">
               <a:schemeClr val="phClr">
-                <a:tint val="37000"/>
-                <a:satMod val="300000"/>
+                <a:lumMod val="105000"/>
+                <a:satMod val="103000"/>
+                <a:tint val="73000"/>
               </a:schemeClr>
             </a:gs>
             <a:gs pos="100000">
               <a:schemeClr val="phClr">
-                <a:tint val="15000"/>
-                <a:satMod val="350000"/>
+                <a:lumMod val="105000"/>
+                <a:satMod val="109000"/>
+                <a:tint val="81000"/>
               </a:schemeClr>
             </a:gs>
           </a:gsLst>
-          <a:lin ang="16200000" scaled="1"/>
+          <a:lin ang="5400000" scaled="0"/>
         </a:gradFill>
         <a:gradFill rotWithShape="1">
           <a:gsLst>
             <a:gs pos="0">
               <a:schemeClr val="phClr">
-                <a:tint val="100000"/>
+                <a:satMod val="103000"/>
+                <a:lumMod val="102000"/>
+                <a:tint val="94000"/>
+              </a:schemeClr>
+            </a:gs>
+            <a:gs pos="50000">
+              <a:schemeClr val="phClr">
+                <a:satMod val="110000"/>
+                <a:lumMod val="100000"/>
                 <a:shade val="100000"/>
-                <a:satMod val="130000"/>
               </a:schemeClr>
             </a:gs>
             <a:gs pos="100000">
               <a:schemeClr val="phClr">
-                <a:tint val="50000"/>
-                <a:shade val="100000"/>
-                <a:satMod val="350000"/>
+                <a:lumMod val="99000"/>
+                <a:satMod val="120000"/>
+                <a:shade val="78000"/>
               </a:schemeClr>
             </a:gs>
           </a:gsLst>
-          <a:lin ang="16200000" scaled="0"/>
+          <a:lin ang="5400000" scaled="0"/>
         </a:gradFill>
       </a:fillStyleLst>
       <a:lnStyleLst>
-        <a:ln w="9525" cap="flat" cmpd="sng" algn="ctr">
+        <a:ln w="12700" cap="flat" cmpd="sng" algn="ctr">
           <a:solidFill>
-            <a:schemeClr val="phClr">
-              <a:shade val="95000"/>
-              <a:satMod val="105000"/>
-            </a:schemeClr>
+            <a:schemeClr val="phClr"/>
           </a:solidFill>
           <a:prstDash val="solid"/>
+          <a:miter lim="800000"/>
+        </a:ln>
+        <a:ln w="19050" cap="flat" cmpd="sng" algn="ctr">
+          <a:solidFill>
+            <a:schemeClr val="phClr"/>
+          </a:solidFill>
+          <a:prstDash val="solid"/>
+          <a:miter lim="800000"/>
         </a:ln>
         <a:ln w="25400" cap="flat" cmpd="sng" algn="ctr">
           <a:solidFill>
             <a:schemeClr val="phClr"/>
           </a:solidFill>
           <a:prstDash val="solid"/>
-        </a:ln>
-        <a:ln w="38100" cap="flat" cmpd="sng" algn="ctr">
-          <a:solidFill>
-            <a:schemeClr val="phClr"/>
-          </a:solidFill>
-          <a:prstDash val="solid"/>
+          <a:miter lim="800000"/>
         </a:ln>
       </a:lnStyleLst>
       <a:effectStyleLst>
         <a:effectStyle>
+          <a:effectLst/>
+        </a:effectStyle>
+        <a:effectStyle>
+          <a:effectLst/>
+        </a:effectStyle>
+        <a:effectStyle>
           <a:effectLst>
-            <a:outerShdw blurRad="40000" dist="20000" dir="5400000" rotWithShape="0">
+            <a:outerShdw blurRad="57150" dist="19050" dir="5400000" algn="ctr" rotWithShape="0">
               <a:srgbClr val="000000">
-                <a:alpha val="38000"/>
+                <a:alpha val="63000"/>
               </a:srgbClr>
             </a:outerShdw>
           </a:effectLst>
-        </a:effectStyle>
-        <a:effectStyle>
-          <a:effectLst>
-            <a:outerShdw blurRad="40000" dist="23000" dir="5400000" rotWithShape="0">
-              <a:srgbClr val="000000">
-                <a:alpha val="35000"/>
-              </a:srgbClr>
-            </a:outerShdw>
-          </a:effectLst>
-        </a:effectStyle>
-        <a:effectStyle>
-          <a:effectLst>
-            <a:outerShdw blurRad="40000" dist="23000" dir="5400000" rotWithShape="0">
-              <a:srgbClr val="000000">
-                <a:alpha val="35000"/>
-              </a:srgbClr>
-            </a:outerShdw>
-          </a:effectLst>
-          <a:scene3d>
-            <a:camera prst="orthographicFront">
-              <a:rot lat="0" lon="0" rev="0"/>
-            </a:camera>
-            <a:lightRig rig="threePt" dir="t">
-              <a:rot lat="0" lon="0" rev="1200000"/>
-            </a:lightRig>
-          </a:scene3d>
-          <a:sp3d>
-            <a:bevelT w="63500" h="25400"/>
-          </a:sp3d>
         </a:effectStyle>
       </a:effectStyleLst>
       <a:bgFillStyleLst>
         <a:solidFill>
           <a:schemeClr val="phClr"/>
         </a:solidFill>
+        <a:solidFill>
+          <a:schemeClr val="phClr">
+            <a:tint val="95000"/>
+            <a:satMod val="170000"/>
+          </a:schemeClr>
+        </a:solidFill>
         <a:gradFill rotWithShape="1">
           <a:gsLst>
             <a:gs pos="0">
               <a:schemeClr val="phClr">
-                <a:tint val="40000"/>
-                <a:satMod val="350000"/>
+                <a:tint val="93000"/>
+                <a:satMod val="150000"/>
+                <a:shade val="98000"/>
+                <a:lumMod val="102000"/>
               </a:schemeClr>
             </a:gs>
-            <a:gs pos="40000">
+            <a:gs pos="50000">
               <a:schemeClr val="phClr">
-                <a:tint val="45000"/>
-                <a:shade val="99000"/>
-                <a:satMod val="350000"/>
+                <a:tint val="98000"/>
+                <a:satMod val="130000"/>
+                <a:shade val="90000"/>
+                <a:lumMod val="103000"/>
               </a:schemeClr>
             </a:gs>
             <a:gs pos="100000">
               <a:schemeClr val="phClr">
-                <a:shade val="20000"/>
-                <a:satMod val="255000"/>
+                <a:shade val="63000"/>
+                <a:satMod val="120000"/>
               </a:schemeClr>
             </a:gs>
           </a:gsLst>
-          <a:path path="circle">
-            <a:fillToRect l="50000" t="-80000" r="50000" b="180000"/>
-          </a:path>
-        </a:gradFill>
-        <a:gradFill rotWithShape="1">
-          <a:gsLst>
-            <a:gs pos="0">
-              <a:schemeClr val="phClr">
-                <a:tint val="80000"/>
-                <a:satMod val="300000"/>
-              </a:schemeClr>
-            </a:gs>
-            <a:gs pos="100000">
-              <a:schemeClr val="phClr">
-                <a:shade val="30000"/>
-                <a:satMod val="200000"/>
-              </a:schemeClr>
-            </a:gs>
-          </a:gsLst>
-          <a:path path="circle">
-            <a:fillToRect l="50000" t="50000" r="50000" b="50000"/>
-          </a:path>
+          <a:lin ang="5400000" scaled="0"/>
         </a:gradFill>
       </a:bgFillStyleLst>
     </a:fmtScheme>
   </a:themeElements>
   <a:objectDefaults>
-    <a:spDef>
-      <a:spPr/>
-      <a:bodyPr/>
-      <a:lstStyle/>
-      <a:style>
-        <a:lnRef idx="1">
-          <a:schemeClr val="accent1"/>
-        </a:lnRef>
-        <a:fillRef idx="3">
-          <a:schemeClr val="accent1"/>
-        </a:fillRef>
-        <a:effectRef idx="2">
-          <a:schemeClr val="accent1"/>
-        </a:effectRef>
-        <a:fontRef idx="minor">
-          <a:schemeClr val="lt1"/>
-        </a:fontRef>
-      </a:style>
-    </a:spDef>
     <a:lnDef>
       <a:spPr/>
       <a:bodyPr/>
@@ -23595,5 +23722,10 @@
     </a:lnDef>
   </a:objectDefaults>
   <a:extraClrSchemeLst/>
+  <a:extLst>
+    <a:ext uri="{05A4C25C-085E-4340-85A3-A5531E510DB2}">
+      <thm15:themeFamily xmlns:thm15="http://schemas.microsoft.com/office/thememl/2012/main" name="Office Theme" id="{2E142A2C-CD16-42D6-873A-C26D2A0506FA}" vid="{1BDDFF52-6CD6-40A5-AB3C-68EB2F1E4D0A}"/>
+    </a:ext>
+  </a:extLst>
 </a:theme>
 </file>